--- a/entrega/PRESENTACION_GRUPO5_DAW2.pptx
+++ b/entrega/PRESENTACION_GRUPO5_DAW2.pptx
@@ -21,9 +21,10 @@
     <p:sldId id="269" r:id="rId15"/>
     <p:sldId id="270" r:id="rId16"/>
     <p:sldId id="271" r:id="rId17"/>
+    <p:sldId id="272" r:id="rId18"/>
   </p:sldIdLst>
   <p:notesMasterIdLst>
-    <p:notesMasterId r:id="rId18"/>
+    <p:notesMasterId r:id="rId19"/>
   </p:notesMasterIdLst>
   <p:sldSz cx="9144000" cy="5143500"/>
   <p:notesSz cx="5143500" cy="9144000"/>
@@ -122,48 +123,49 @@
   <p:extLst>
     <p:ext uri="{521415D9-36F7-43E2-AB2F-B90AF26B5E84}">
       <p14:sectionLst xmlns:p14="http://schemas.microsoft.com/office/powerpoint/2010/main">
-        <p14:section name="Apertura" id="{f55c0126-7b05-9037-922e-ded9a5da8a60}">
+        <p14:section name="Apertura" id="{a81e3a32-38ba-534d-2e62-6107f6231ae6}">
           <p14:sldIdLst>
             <p14:sldId id="256"/>
             <p14:sldId id="257"/>
           </p14:sldIdLst>
         </p14:section>
-        <p14:section name="Diagnóstico" id="{88786aff-cad0-8156-8402-b7b8ddfd0a0f}">
+        <p14:section name="Diagnóstico" id="{225694e4-4979-96d3-3221-7119ebad06ec}">
           <p14:sldIdLst>
             <p14:sldId id="258"/>
             <p14:sldId id="259"/>
             <p14:sldId id="260"/>
           </p14:sldIdLst>
         </p14:section>
-        <p14:section name="Objetivos" id="{e1bffac6-e880-c002-b7d3-7f7ca537af30}">
+        <p14:section name="Objetivos" id="{3fdae380-170f-2c72-a3d9-046596d8745f}">
           <p14:sldIdLst>
             <p14:sldId id="261"/>
             <p14:sldId id="262"/>
           </p14:sldIdLst>
         </p14:section>
-        <p14:section name="Solución" id="{76915633-9099-4763-5a48-127695954918}">
+        <p14:section name="Solución" id="{4c4af9a2-853b-634b-99e1-1ca1a813d93c}">
           <p14:sldIdLst>
             <p14:sldId id="263"/>
             <p14:sldId id="264"/>
             <p14:sldId id="265"/>
+            <p14:sldId id="266"/>
           </p14:sldIdLst>
         </p14:section>
-        <p14:section name="Demostración" id="{30220135-c72f-87d8-f84e-b0b345b3ab4d}">
+        <p14:section name="Demostración" id="{9e3eccc2-a8fb-19bb-9a9b-138fe252915f}">
           <p14:sldIdLst>
-            <p14:sldId id="266"/>
             <p14:sldId id="267"/>
             <p14:sldId id="268"/>
-          </p14:sldIdLst>
-        </p14:section>
-        <p14:section name="Pruebas" id="{5ab70f5b-5851-eb16-b3b4-296f8a956ab9}">
-          <p14:sldIdLst>
             <p14:sldId id="269"/>
           </p14:sldIdLst>
         </p14:section>
-        <p14:section name="Cierre" id="{e0b3245b-2c55-6cea-bc2f-2a558213c4d8}">
+        <p14:section name="Pruebas" id="{840f2bf7-da1d-e856-b75e-15e3e558beff}">
           <p14:sldIdLst>
             <p14:sldId id="270"/>
+          </p14:sldIdLst>
+        </p14:section>
+        <p14:section name="Cierre" id="{92eb9d42-6507-39f5-ec38-41bbb91208b2}">
+          <p14:sldIdLst>
             <p14:sldId id="271"/>
+            <p14:sldId id="272"/>
           </p14:sldIdLst>
         </p14:section>
       </p14:sectionLst>
@@ -263,42 +265,27 @@
           </c:dLbls>
           <c:cat>
             <c:multiLvlStrRef>
-              <c:f>Sheet1!$A$2:$A$12</c:f>
+              <c:f>Sheet1!$A$2:$A$7</c:f>
               <c:multiLvlStrCache>
-                <c:ptCount val="11"/>
+                <c:ptCount val="6"/>
                 <c:lvl>
                   <c:pt idx="0">
-                    <c:v>Socios</c:v>
+                    <c:v>ms-catalogos</c:v>
                   </c:pt>
                   <c:pt idx="1">
-                    <c:v>Puestos</c:v>
+                    <c:v>ms-cobranza</c:v>
                   </c:pt>
                   <c:pt idx="2">
-                    <c:v>Giros</c:v>
+                    <c:v>ms-egresos</c:v>
                   </c:pt>
                   <c:pt idx="3">
-                    <c:v>Servicios</c:v>
+                    <c:v>ms-reportes</c:v>
                   </c:pt>
                   <c:pt idx="4">
-                    <c:v>Bancos</c:v>
+                    <c:v>ms-auth</c:v>
                   </c:pt>
                   <c:pt idx="5">
-                    <c:v>Cuentas x cobrar</c:v>
-                  </c:pt>
-                  <c:pt idx="6">
-                    <c:v>Pagos</c:v>
-                  </c:pt>
-                  <c:pt idx="7">
-                    <c:v>Recibos</c:v>
-                  </c:pt>
-                  <c:pt idx="8">
-                    <c:v>Egresos</c:v>
-                  </c:pt>
-                  <c:pt idx="9">
-                    <c:v>Reportes</c:v>
-                  </c:pt>
-                  <c:pt idx="10">
-                    <c:v>Login</c:v>
+                    <c:v>ms-auditoria</c:v>
                   </c:pt>
                 </c:lvl>
               </c:multiLvlStrCache>
@@ -306,41 +293,26 @@
           </c:cat>
           <c:val>
             <c:numRef>
-              <c:f>Sheet1!$B$2:$B$12</c:f>
+              <c:f>Sheet1!$B$2:$B$7</c:f>
               <c:numCache>
                 <c:formatCode>General</c:formatCode>
-                <c:ptCount val="11"/>
+                <c:ptCount val="6"/>
                 <c:pt idx="0">
-                  <c:v>5</c:v>
+                  <c:v>25</c:v>
                 </c:pt>
                 <c:pt idx="1">
-                  <c:v>5</c:v>
+                  <c:v>14</c:v>
                 </c:pt>
                 <c:pt idx="2">
-                  <c:v>5</c:v>
+                  <c:v>6</c:v>
                 </c:pt>
                 <c:pt idx="3">
-                  <c:v>5</c:v>
+                  <c:v>6</c:v>
                 </c:pt>
                 <c:pt idx="4">
-                  <c:v>5</c:v>
+                  <c:v>1</c:v>
                 </c:pt>
                 <c:pt idx="5">
-                  <c:v>8</c:v>
-                </c:pt>
-                <c:pt idx="6">
-                  <c:v>3</c:v>
-                </c:pt>
-                <c:pt idx="7">
-                  <c:v>2</c:v>
-                </c:pt>
-                <c:pt idx="8">
-                  <c:v>6</c:v>
-                </c:pt>
-                <c:pt idx="9">
-                  <c:v>6</c:v>
-                </c:pt>
-                <c:pt idx="10">
                   <c:v>1</c:v>
                 </c:pt>
               </c:numCache>
@@ -964,7 +936,7 @@
           <a:p>
             <a:r>
               <a:rPr lang="en-US" dirty="0"/>
-              <a:t>La rúbrica pide implementar los cuatro métodos y consumirlos desde Angular. Hay 24 GET, 16 POST, 5 PUT y 6 DELETE. Los cinco catálogos tienen CRUD completo. Angular los consume con un servicio HttpClient por módulo y 48 verificaciones de método y URL.</a:t>
+              <a:t>Login REST: valida usuario y password, la contraseña se guarda con BCrypt, el backend emite un JWT con el rol y valida cada petición. Autorización por rol validada en el servidor: operador recibe 403 al escribir en catálogos. Pruebas automáticas descubren los 51 endpoints y verifican 401 y 403.</a:t>
             </a:r>
             <a:endParaRPr lang="en-US" dirty="0"/>
           </a:p>
@@ -1052,7 +1024,7 @@
           <a:p>
             <a:r>
               <a:rPr lang="en-US" dirty="0"/>
-              <a:t>En vivo: listar socios (GET), crear (POST), editar (PUT), eliminar (DELETE) y recargar para mostrar la persistencia. Luego cobranza: buscar por socio o puesto, marcar abonada o exonerada y ver el total.</a:t>
+              <a:t>La rúbrica pide implementar los cuatro métodos y consumirlos desde Angular. Hay 26 GET, 16 POST, 5 PUT y 6 DELETE. Los cinco catálogos tienen CRUD completo. Angular los consume con un servicio HttpClient por módulo y 48 verificaciones de método y URL.</a:t>
             </a:r>
             <a:endParaRPr lang="en-US" dirty="0"/>
           </a:p>
@@ -1140,7 +1112,7 @@
           <a:p>
             <a:r>
               <a:rPr lang="en-US" dirty="0"/>
-              <a:t>Procesar pago es transaccional: se actualizan las cuentas y se emite el recibo con correlativo único generado sobre el AUTO_INCREMENT de MySQL. Si algo falla, no quedan cuentas abonadas sin recibo. Lo mismo aplica al canje bancario y al ingreso externo. Diez pruebas de PagoServiceTest lo verifican.</a:t>
+              <a:t>En vivo: listar socios (GET), crear (POST), editar (PUT), eliminar (DELETE) y recargar para mostrar la persistencia. Luego cobranza: buscar por socio o puesto, marcar abonada o exonerada y ver el total.</a:t>
             </a:r>
             <a:endParaRPr lang="en-US" dirty="0"/>
           </a:p>
@@ -1228,7 +1200,7 @@
           <a:p>
             <a:r>
               <a:rPr lang="en-US" dirty="0"/>
-              <a:t>Egresos individuales y masivos desde un .xlsx con reporte de filas válidas e inválidas; procesar y anular. Seis reportes XLSX descargables: movimientos, totales, socios, puestos, egresos y bancos.</a:t>
+              <a:t>Procesar pago es transaccional: se actualizan las cuentas y se emite el recibo con correlativo único generado sobre el AUTO_INCREMENT de MySQL. Si algo falla, no quedan cuentas abonadas sin recibo. Lo mismo aplica al canje bancario y al ingreso externo. Diez pruebas de PagoServiceTest lo verifican.</a:t>
             </a:r>
             <a:endParaRPr lang="en-US" dirty="0"/>
           </a:p>
@@ -1316,7 +1288,7 @@
           <a:p>
             <a:r>
               <a:rPr lang="en-US" dirty="0"/>
-              <a:t>Backend 141 pruebas: 55 de acceso a datos en los 9 repositorios, 63 de servicios con Mockito y 23 de integración. Frontend 101 unitarias con Vitest. 18 e2e con Playwright. Las pruebas detectaron defectos reales: login sin cuerpo daba 500, errores 4xx de Spring enmascarados como 500, fechas con desfase de un día por zona horaria.</a:t>
+              <a:t>Egresos individuales y masivos desde un .xlsx con reporte de filas válidas e inválidas; procesar y anular. Seis reportes XLSX descargables: movimientos, totales, socios, puestos, egresos y bancos.</a:t>
             </a:r>
             <a:endParaRPr lang="en-US" dirty="0"/>
           </a:p>
@@ -1404,7 +1376,7 @@
           <a:p>
             <a:r>
               <a:rPr lang="en-US" dirty="0"/>
-              <a:t>Tres conclusiones: el sector justifica la solución y se cumplió el 97 % de los requisitos; la combinación Spring y Angular dio una solución desacoplada y segura; las pruebas fueron decisivas. Tres recomendaciones: capacitar y respaldar antes de producción; fortalecer auditoría y cumplimiento legal; automatizar pruebas desde el inicio y evolucionar.</a:t>
+              <a:t>Backend 141 pruebas: 55 de acceso a datos en los 9 repositorios, 63 de servicios con Mockito y 23 de integración. Frontend 101 unitarias con Vitest. 18 e2e con Playwright. Las pruebas detectaron defectos reales: login sin cuerpo daba 500, errores 4xx de Spring enmascarados como 500, fechas con desfase de un día por zona horaria.</a:t>
             </a:r>
             <a:endParaRPr lang="en-US" dirty="0"/>
           </a:p>
@@ -1492,7 +1464,7 @@
           <a:p>
             <a:r>
               <a:rPr lang="en-US" dirty="0"/>
-              <a:t>Cierre: cumplimiento de la rúbrica y repositorio. Agradecer y abrir preguntas. Recordar que el video Demo Reel sigue el guion del Anexo G del informe.</a:t>
+              <a:t>Tres conclusiones: el sector justifica la solución y se cumplió el 97 % de los requisitos; la combinación Spring y Angular dio una solución desacoplada y segura; las pruebas fueron decisivas. Tres recomendaciones: capacitar y respaldar antes de producción; fortalecer auditoría y cumplimiento legal; automatizar pruebas desde el inicio y evolucionar.</a:t>
             </a:r>
             <a:endParaRPr lang="en-US" dirty="0"/>
           </a:p>
@@ -1516,6 +1488,94 @@
             <a:fld id="{F7021451-1387-4CA6-816F-3879F97B5CBC}" type="slidenum">
               <a:rPr lang="en-US"/>
               <a:t>16</a:t>
+            </a:fld>
+            <a:endParaRPr lang="en-US"/>
+          </a:p>
+        </p:txBody>
+      </p:sp>
+    </p:spTree>
+    <p:extLst>
+      <p:ext uri="{BB962C8B-B14F-4D97-AF65-F5344CB8AC3E}">
+        <p14:creationId xmlns:p14="http://schemas.microsoft.com/office/powerpoint/2010/main" val="1024086991"/>
+      </p:ext>
+    </p:extLst>
+  </p:cSld>
+  <p:clrMapOvr>
+    <a:masterClrMapping/>
+  </p:clrMapOvr>
+</p:notes>
+</file>
+
+<file path=ppt/notesSlides/notesSlide17.xml><?xml version="1.0" encoding="utf-8"?>
+<p:notes xmlns:a="http://schemas.openxmlformats.org/drawingml/2006/main" xmlns:r="http://schemas.openxmlformats.org/officeDocument/2006/relationships" xmlns:p="http://schemas.openxmlformats.org/presentationml/2006/main">
+  <p:cSld>
+    <p:spTree>
+      <p:nvGrpSpPr>
+        <p:cNvPr id="1" name=""/>
+        <p:cNvGrpSpPr/>
+        <p:nvPr/>
+      </p:nvGrpSpPr>
+      <p:grpSpPr>
+        <a:xfrm>
+          <a:off x="0" y="0"/>
+          <a:ext cx="0" cy="0"/>
+          <a:chOff x="0" y="0"/>
+          <a:chExt cx="0" cy="0"/>
+        </a:xfrm>
+      </p:grpSpPr>
+      <p:sp>
+        <p:nvSpPr>
+          <p:cNvPr id="2" name="Slide Image Placeholder 1"/>
+          <p:cNvSpPr>
+            <a:spLocks noGrp="1" noRot="1" noChangeAspect="1"/>
+          </p:cNvSpPr>
+          <p:nvPr>
+            <p:ph type="sldImg"/>
+          </p:nvPr>
+        </p:nvSpPr>
+        <p:spPr/>
+      </p:sp>
+      <p:sp>
+        <p:nvSpPr>
+          <p:cNvPr id="3" name="Notes Placeholder 2"/>
+          <p:cNvSpPr>
+            <a:spLocks noGrp="1"/>
+          </p:cNvSpPr>
+          <p:nvPr>
+            <p:ph type="body" idx="1"/>
+          </p:nvPr>
+        </p:nvSpPr>
+        <p:spPr/>
+        <p:txBody>
+          <a:bodyPr/>
+          <a:lstStyle/>
+          <a:p>
+            <a:r>
+              <a:rPr lang="en-US" dirty="0"/>
+              <a:t>Cierre: cumplimiento de la rúbrica y repositorio. Agradecer y abrir preguntas. Recordar que el video Demo Reel sigue el guion del Anexo G del informe.</a:t>
+            </a:r>
+            <a:endParaRPr lang="en-US" dirty="0"/>
+          </a:p>
+        </p:txBody>
+      </p:sp>
+      <p:sp>
+        <p:nvSpPr>
+          <p:cNvPr id="4" name="Slide Number Placeholder 3"/>
+          <p:cNvSpPr>
+            <a:spLocks noGrp="1"/>
+          </p:cNvSpPr>
+          <p:nvPr>
+            <p:ph type="sldNum" sz="quarter" idx="10"/>
+          </p:nvPr>
+        </p:nvSpPr>
+        <p:spPr/>
+        <p:txBody>
+          <a:bodyPr/>
+          <a:lstStyle/>
+          <a:p>
+            <a:fld id="{F7021451-1387-4CA6-816F-3879F97B5CBC}" type="slidenum">
+              <a:rPr lang="en-US"/>
+              <a:t>17</a:t>
             </a:fld>
             <a:endParaRPr lang="en-US"/>
           </a:p>
@@ -1932,7 +1992,7 @@
           <a:p>
             <a:r>
               <a:rPr lang="en-US" dirty="0"/>
-              <a:t>Cada objetivo tiene indicador y fórmula en el informe. OBJ1 seguridad: 50 de 50 endpoints de negocio exigen token. OBJ2 integridad de cobros: 3 de 3 operaciones atómicas. OBJ3 acceso a datos: 9 de 9 repositorios con pruebas. OBJ4 cobertura funcional: 32 de 33 requisitos.</a:t>
+              <a:t>Cada objetivo tiene indicador y fórmula en el informe. OBJ1 seguridad: 52 de 52 endpoints de negocio exigen token. OBJ2 integridad de cobros: 3 de 3 operaciones atómicas. OBJ3 acceso a datos: 10 de 10 repositorios con pruebas. OBJ4 cobertura funcional: 32 de 33 requisitos.</a:t>
             </a:r>
             <a:endParaRPr lang="en-US" dirty="0"/>
           </a:p>
@@ -2108,7 +2168,7 @@
           <a:p>
             <a:r>
               <a:rPr lang="en-US" dirty="0"/>
-              <a:t>Angular 22 con Material consume la API REST de Spring Boot. La API tiene cuatro capas: seguridad, controladores, servicios y repositorios, y persiste en MySQL. Hay 51 endpoints.</a:t>
+              <a:t>Siguiendo el repositorio del curso: Angular consume todo por el API Gateway (8762). Eureka registra los servicios. Seis microservicios con base propia: auth, catalogos, cobranza, egresos, reportes y auditoria. OpenFeign entre servicios y RabbitMQ para la auditoria asincrona. Hay 53 endpoints.</a:t>
             </a:r>
             <a:endParaRPr lang="en-US" dirty="0"/>
           </a:p>
@@ -2196,7 +2256,7 @@
           <a:p>
             <a:r>
               <a:rPr lang="en-US" dirty="0"/>
-              <a:t>Login REST: valida usuario y password, la contraseña se guarda con BCrypt, el backend emite un JWT con el rol y valida cada petición. Autorización por rol validada en el servidor: operador recibe 403 al escribir en catálogos. Pruebas automáticas descubren los 51 endpoints y verifican 401 y 403.</a:t>
+              <a:t>OpenFeign es la comunicación síncrona: cobranza pide a catalogos los datos del socio y puesto, y catalogos pregunta a cobranza si algo tiene cobros antes de eliminarlo. RabbitMQ es la asíncrona: cobranza y egresos publican cada movimiento y ms-auditoria lo guarda con el usuario, sin que el cobro espere.</a:t>
             </a:r>
             <a:endParaRPr lang="en-US" dirty="0"/>
           </a:p>
@@ -3123,7 +3183,7 @@
                 <a:ea typeface="Cambria" pitchFamily="34" charset="-122"/>
                 <a:cs typeface="Cambria" pitchFamily="34" charset="-120"/>
               </a:rPr>
-              <a:t>51 servicios REST: GET, POST, PUT y DELETE</a:t>
+              <a:t>Login y seguridad: BCrypt, JWT y roles</a:t>
             </a:r>
             <a:endParaRPr lang="en-US" sz="2800" dirty="0"/>
           </a:p>
@@ -3131,18 +3191,18 @@
       </p:sp>
       <p:sp>
         <p:nvSpPr>
-          <p:cNvPr id="4" name="método GET"/>
+          <p:cNvPr id="4" name="paso seguridad 1"/>
           <p:cNvSpPr/>
           <p:nvPr/>
         </p:nvSpPr>
         <p:spPr>
           <a:xfrm>
-            <a:off x="457200" y="1188720"/>
-            <a:ext cx="2377440" cy="731520"/>
+            <a:off x="457200" y="1234440"/>
+            <a:ext cx="1965960" cy="2377440"/>
           </a:xfrm>
           <a:prstGeom prst="roundRect">
             <a:avLst>
-              <a:gd name="adj" fmla="val 10000"/>
+              <a:gd name="adj" fmla="val 3721"/>
             </a:avLst>
           </a:prstGeom>
           <a:solidFill>
@@ -3165,14 +3225,39 @@
       </p:sp>
       <p:sp>
         <p:nvSpPr>
-          <p:cNvPr id="5" name="Text 2"/>
-          <p:cNvSpPr txBox="1"/>
-          <p:nvPr/>
-        </p:nvSpPr>
-        <p:spPr>
-          <a:xfrm>
-            <a:off x="594360" y="1234440"/>
-            <a:ext cx="914400" cy="640080"/>
+          <p:cNvPr id="5" name="insignia 1"/>
+          <p:cNvSpPr/>
+          <p:nvPr/>
+        </p:nvSpPr>
+        <p:spPr>
+          <a:xfrm>
+            <a:off x="640080" y="1371600"/>
+            <a:ext cx="411480" cy="411480"/>
+          </a:xfrm>
+          <a:prstGeom prst="ellipse">
+            <a:avLst/>
+          </a:prstGeom>
+          <a:solidFill>
+            <a:schemeClr val="accent1"/>
+          </a:solidFill>
+          <a:ln w="12700">
+            <a:solidFill>
+              <a:schemeClr val="accent1"/>
+            </a:solidFill>
+            <a:prstDash val="solid"/>
+          </a:ln>
+        </p:spPr>
+      </p:sp>
+      <p:sp>
+        <p:nvSpPr>
+          <p:cNvPr id="6" name="Text 3"/>
+          <p:cNvSpPr txBox="1"/>
+          <p:nvPr/>
+        </p:nvSpPr>
+        <p:spPr>
+          <a:xfrm>
+            <a:off x="640080" y="1371600"/>
+            <a:ext cx="411480" cy="411480"/>
           </a:xfrm>
           <a:prstGeom prst="rect">
             <a:avLst/>
@@ -3184,74 +3269,107 @@
           <a:bodyPr wrap="square" lIns="0" tIns="0" rIns="0" bIns="0" rtlCol="0" anchor="ctr"/>
           <a:lstStyle/>
           <a:p>
-            <a:pPr indent="0" marL="0">
-              <a:buNone/>
-            </a:pPr>
-            <a:r>
-              <a:rPr lang="en-US" sz="3000" b="1" dirty="0">
-                <a:solidFill>
-                  <a:schemeClr val="accent1"/>
-                </a:solidFill>
-                <a:latin typeface="Cambria" pitchFamily="34" charset="0"/>
-                <a:ea typeface="Cambria" pitchFamily="34" charset="-122"/>
-                <a:cs typeface="Cambria" pitchFamily="34" charset="-120"/>
-              </a:rPr>
-              <a:t>24</a:t>
-            </a:r>
-            <a:endParaRPr lang="en-US" sz="3000" dirty="0"/>
-          </a:p>
-        </p:txBody>
-      </p:sp>
-      <p:sp>
-        <p:nvSpPr>
-          <p:cNvPr id="6" name="Text 3"/>
-          <p:cNvSpPr txBox="1"/>
-          <p:nvPr/>
-        </p:nvSpPr>
-        <p:spPr>
-          <a:xfrm>
-            <a:off x="1508760" y="1234440"/>
-            <a:ext cx="1234440" cy="640080"/>
-          </a:xfrm>
-          <a:prstGeom prst="rect">
-            <a:avLst/>
-          </a:prstGeom>
-          <a:noFill/>
-          <a:ln/>
-        </p:spPr>
-        <p:txBody>
-          <a:bodyPr wrap="square" lIns="0" tIns="0" rIns="0" bIns="0" rtlCol="0" anchor="ctr"/>
-          <a:lstStyle/>
-          <a:p>
-            <a:pPr indent="0" marL="0">
-              <a:buNone/>
-            </a:pPr>
-            <a:r>
-              <a:rPr lang="en-US" sz="1800" b="1" dirty="0">
+            <a:pPr algn="ctr" indent="0" marL="0">
+              <a:buNone/>
+            </a:pPr>
+            <a:r>
+              <a:rPr lang="en-US" sz="1600" b="1" dirty="0">
+                <a:solidFill>
+                  <a:schemeClr val="bg1"/>
+                </a:solidFill>
+              </a:rPr>
+              <a:t>1</a:t>
+            </a:r>
+            <a:endParaRPr lang="en-US" sz="1600" dirty="0"/>
+          </a:p>
+        </p:txBody>
+      </p:sp>
+      <p:sp>
+        <p:nvSpPr>
+          <p:cNvPr id="7" name="Text 4"/>
+          <p:cNvSpPr txBox="1"/>
+          <p:nvPr/>
+        </p:nvSpPr>
+        <p:spPr>
+          <a:xfrm>
+            <a:off x="594360" y="1920240"/>
+            <a:ext cx="1737360" cy="548640"/>
+          </a:xfrm>
+          <a:prstGeom prst="rect">
+            <a:avLst/>
+          </a:prstGeom>
+          <a:noFill/>
+          <a:ln/>
+        </p:spPr>
+        <p:txBody>
+          <a:bodyPr wrap="square" lIns="0" tIns="0" rIns="0" bIns="0" rtlCol="0" anchor="t"/>
+          <a:lstStyle/>
+          <a:p>
+            <a:pPr indent="0" marL="0">
+              <a:buNone/>
+            </a:pPr>
+            <a:r>
+              <a:rPr lang="en-US" sz="1500" b="1" dirty="0">
                 <a:solidFill>
                   <a:schemeClr val="tx2"/>
                 </a:solidFill>
               </a:rPr>
-              <a:t>GET</a:t>
-            </a:r>
-            <a:endParaRPr lang="en-US" sz="1800" dirty="0"/>
-          </a:p>
-        </p:txBody>
-      </p:sp>
-      <p:sp>
-        <p:nvSpPr>
-          <p:cNvPr id="7" name="método POST"/>
+              <a:t>POST /api/auth/login</a:t>
+            </a:r>
+            <a:endParaRPr lang="en-US" sz="1500" dirty="0"/>
+          </a:p>
+        </p:txBody>
+      </p:sp>
+      <p:sp>
+        <p:nvSpPr>
+          <p:cNvPr id="8" name="Text 5"/>
+          <p:cNvSpPr txBox="1"/>
+          <p:nvPr/>
+        </p:nvSpPr>
+        <p:spPr>
+          <a:xfrm>
+            <a:off x="594360" y="2514600"/>
+            <a:ext cx="1737360" cy="1051560"/>
+          </a:xfrm>
+          <a:prstGeom prst="rect">
+            <a:avLst/>
+          </a:prstGeom>
+          <a:noFill/>
+          <a:ln/>
+        </p:spPr>
+        <p:txBody>
+          <a:bodyPr wrap="square" lIns="0" tIns="0" rIns="0" bIns="0" rtlCol="0" anchor="t"/>
+          <a:lstStyle/>
+          <a:p>
+            <a:pPr indent="0" marL="0">
+              <a:buNone/>
+            </a:pPr>
+            <a:r>
+              <a:rPr lang="en-US" sz="1300" dirty="0">
+                <a:solidFill>
+                  <a:schemeClr val="tx1"/>
+                </a:solidFill>
+              </a:rPr>
+              <a:t>Usuario y contraseña obligatorios; 400 y 401 con mensajes claros</a:t>
+            </a:r>
+            <a:endParaRPr lang="en-US" sz="1300" dirty="0"/>
+          </a:p>
+        </p:txBody>
+      </p:sp>
+      <p:sp>
+        <p:nvSpPr>
+          <p:cNvPr id="9" name="paso seguridad 2"/>
           <p:cNvSpPr/>
           <p:nvPr/>
         </p:nvSpPr>
         <p:spPr>
           <a:xfrm>
-            <a:off x="457200" y="2029968"/>
-            <a:ext cx="2377440" cy="731520"/>
+            <a:off x="2560320" y="1234440"/>
+            <a:ext cx="1965960" cy="2377440"/>
           </a:xfrm>
           <a:prstGeom prst="roundRect">
             <a:avLst>
-              <a:gd name="adj" fmla="val 10000"/>
+              <a:gd name="adj" fmla="val 3721"/>
             </a:avLst>
           </a:prstGeom>
           <a:solidFill>
@@ -3274,14 +3392,39 @@
       </p:sp>
       <p:sp>
         <p:nvSpPr>
-          <p:cNvPr id="8" name="Text 5"/>
-          <p:cNvSpPr txBox="1"/>
-          <p:nvPr/>
-        </p:nvSpPr>
-        <p:spPr>
-          <a:xfrm>
-            <a:off x="594360" y="2075688"/>
-            <a:ext cx="914400" cy="640080"/>
+          <p:cNvPr id="10" name="insignia 2"/>
+          <p:cNvSpPr/>
+          <p:nvPr/>
+        </p:nvSpPr>
+        <p:spPr>
+          <a:xfrm>
+            <a:off x="2743200" y="1371600"/>
+            <a:ext cx="411480" cy="411480"/>
+          </a:xfrm>
+          <a:prstGeom prst="ellipse">
+            <a:avLst/>
+          </a:prstGeom>
+          <a:solidFill>
+            <a:schemeClr val="accent1"/>
+          </a:solidFill>
+          <a:ln w="12700">
+            <a:solidFill>
+              <a:schemeClr val="accent1"/>
+            </a:solidFill>
+            <a:prstDash val="solid"/>
+          </a:ln>
+        </p:spPr>
+      </p:sp>
+      <p:sp>
+        <p:nvSpPr>
+          <p:cNvPr id="11" name="Text 8"/>
+          <p:cNvSpPr txBox="1"/>
+          <p:nvPr/>
+        </p:nvSpPr>
+        <p:spPr>
+          <a:xfrm>
+            <a:off x="2743200" y="1371600"/>
+            <a:ext cx="411480" cy="411480"/>
           </a:xfrm>
           <a:prstGeom prst="rect">
             <a:avLst/>
@@ -3293,74 +3436,107 @@
           <a:bodyPr wrap="square" lIns="0" tIns="0" rIns="0" bIns="0" rtlCol="0" anchor="ctr"/>
           <a:lstStyle/>
           <a:p>
-            <a:pPr indent="0" marL="0">
-              <a:buNone/>
-            </a:pPr>
-            <a:r>
-              <a:rPr lang="en-US" sz="3000" b="1" dirty="0">
-                <a:solidFill>
-                  <a:schemeClr val="accent1"/>
-                </a:solidFill>
-                <a:latin typeface="Cambria" pitchFamily="34" charset="0"/>
-                <a:ea typeface="Cambria" pitchFamily="34" charset="-122"/>
-                <a:cs typeface="Cambria" pitchFamily="34" charset="-120"/>
-              </a:rPr>
-              <a:t>16</a:t>
-            </a:r>
-            <a:endParaRPr lang="en-US" sz="3000" dirty="0"/>
-          </a:p>
-        </p:txBody>
-      </p:sp>
-      <p:sp>
-        <p:nvSpPr>
-          <p:cNvPr id="9" name="Text 6"/>
-          <p:cNvSpPr txBox="1"/>
-          <p:nvPr/>
-        </p:nvSpPr>
-        <p:spPr>
-          <a:xfrm>
-            <a:off x="1508760" y="2075688"/>
-            <a:ext cx="1234440" cy="640080"/>
-          </a:xfrm>
-          <a:prstGeom prst="rect">
-            <a:avLst/>
-          </a:prstGeom>
-          <a:noFill/>
-          <a:ln/>
-        </p:spPr>
-        <p:txBody>
-          <a:bodyPr wrap="square" lIns="0" tIns="0" rIns="0" bIns="0" rtlCol="0" anchor="ctr"/>
-          <a:lstStyle/>
-          <a:p>
-            <a:pPr indent="0" marL="0">
-              <a:buNone/>
-            </a:pPr>
-            <a:r>
-              <a:rPr lang="en-US" sz="1800" b="1" dirty="0">
+            <a:pPr algn="ctr" indent="0" marL="0">
+              <a:buNone/>
+            </a:pPr>
+            <a:r>
+              <a:rPr lang="en-US" sz="1600" b="1" dirty="0">
+                <a:solidFill>
+                  <a:schemeClr val="bg1"/>
+                </a:solidFill>
+              </a:rPr>
+              <a:t>2</a:t>
+            </a:r>
+            <a:endParaRPr lang="en-US" sz="1600" dirty="0"/>
+          </a:p>
+        </p:txBody>
+      </p:sp>
+      <p:sp>
+        <p:nvSpPr>
+          <p:cNvPr id="12" name="Text 9"/>
+          <p:cNvSpPr txBox="1"/>
+          <p:nvPr/>
+        </p:nvSpPr>
+        <p:spPr>
+          <a:xfrm>
+            <a:off x="2697480" y="1920240"/>
+            <a:ext cx="1737360" cy="548640"/>
+          </a:xfrm>
+          <a:prstGeom prst="rect">
+            <a:avLst/>
+          </a:prstGeom>
+          <a:noFill/>
+          <a:ln/>
+        </p:spPr>
+        <p:txBody>
+          <a:bodyPr wrap="square" lIns="0" tIns="0" rIns="0" bIns="0" rtlCol="0" anchor="t"/>
+          <a:lstStyle/>
+          <a:p>
+            <a:pPr indent="0" marL="0">
+              <a:buNone/>
+            </a:pPr>
+            <a:r>
+              <a:rPr lang="en-US" sz="1500" b="1" dirty="0">
                 <a:solidFill>
                   <a:schemeClr val="tx2"/>
                 </a:solidFill>
               </a:rPr>
-              <a:t>POST</a:t>
-            </a:r>
-            <a:endParaRPr lang="en-US" sz="1800" dirty="0"/>
-          </a:p>
-        </p:txBody>
-      </p:sp>
-      <p:sp>
-        <p:nvSpPr>
-          <p:cNvPr id="10" name="método PUT"/>
+              <a:t>BCrypt en MySQL</a:t>
+            </a:r>
+            <a:endParaRPr lang="en-US" sz="1500" dirty="0"/>
+          </a:p>
+        </p:txBody>
+      </p:sp>
+      <p:sp>
+        <p:nvSpPr>
+          <p:cNvPr id="13" name="Text 10"/>
+          <p:cNvSpPr txBox="1"/>
+          <p:nvPr/>
+        </p:nvSpPr>
+        <p:spPr>
+          <a:xfrm>
+            <a:off x="2697480" y="2514600"/>
+            <a:ext cx="1737360" cy="1051560"/>
+          </a:xfrm>
+          <a:prstGeom prst="rect">
+            <a:avLst/>
+          </a:prstGeom>
+          <a:noFill/>
+          <a:ln/>
+        </p:spPr>
+        <p:txBody>
+          <a:bodyPr wrap="square" lIns="0" tIns="0" rIns="0" bIns="0" rtlCol="0" anchor="t"/>
+          <a:lstStyle/>
+          <a:p>
+            <a:pPr indent="0" marL="0">
+              <a:buNone/>
+            </a:pPr>
+            <a:r>
+              <a:rPr lang="en-US" sz="1300" dirty="0">
+                <a:solidFill>
+                  <a:schemeClr val="tx1"/>
+                </a:solidFill>
+              </a:rPr>
+              <a:t>La tabla usuarios guarda solo el hash BCrypt, nunca texto plano</a:t>
+            </a:r>
+            <a:endParaRPr lang="en-US" sz="1300" dirty="0"/>
+          </a:p>
+        </p:txBody>
+      </p:sp>
+      <p:sp>
+        <p:nvSpPr>
+          <p:cNvPr id="14" name="paso seguridad 3"/>
           <p:cNvSpPr/>
           <p:nvPr/>
         </p:nvSpPr>
         <p:spPr>
           <a:xfrm>
-            <a:off x="457200" y="2871216"/>
-            <a:ext cx="2377440" cy="731520"/>
+            <a:off x="4663440" y="1234440"/>
+            <a:ext cx="1965960" cy="2377440"/>
           </a:xfrm>
           <a:prstGeom prst="roundRect">
             <a:avLst>
-              <a:gd name="adj" fmla="val 10000"/>
+              <a:gd name="adj" fmla="val 3721"/>
             </a:avLst>
           </a:prstGeom>
           <a:solidFill>
@@ -3383,14 +3559,39 @@
       </p:sp>
       <p:sp>
         <p:nvSpPr>
-          <p:cNvPr id="11" name="Text 8"/>
-          <p:cNvSpPr txBox="1"/>
-          <p:nvPr/>
-        </p:nvSpPr>
-        <p:spPr>
-          <a:xfrm>
-            <a:off x="594360" y="2916936"/>
-            <a:ext cx="914400" cy="640080"/>
+          <p:cNvPr id="15" name="insignia 3"/>
+          <p:cNvSpPr/>
+          <p:nvPr/>
+        </p:nvSpPr>
+        <p:spPr>
+          <a:xfrm>
+            <a:off x="4846320" y="1371600"/>
+            <a:ext cx="411480" cy="411480"/>
+          </a:xfrm>
+          <a:prstGeom prst="ellipse">
+            <a:avLst/>
+          </a:prstGeom>
+          <a:solidFill>
+            <a:schemeClr val="accent1"/>
+          </a:solidFill>
+          <a:ln w="12700">
+            <a:solidFill>
+              <a:schemeClr val="accent1"/>
+            </a:solidFill>
+            <a:prstDash val="solid"/>
+          </a:ln>
+        </p:spPr>
+      </p:sp>
+      <p:sp>
+        <p:nvSpPr>
+          <p:cNvPr id="16" name="Text 13"/>
+          <p:cNvSpPr txBox="1"/>
+          <p:nvPr/>
+        </p:nvSpPr>
+        <p:spPr>
+          <a:xfrm>
+            <a:off x="4846320" y="1371600"/>
+            <a:ext cx="411480" cy="411480"/>
           </a:xfrm>
           <a:prstGeom prst="rect">
             <a:avLst/>
@@ -3402,74 +3603,107 @@
           <a:bodyPr wrap="square" lIns="0" tIns="0" rIns="0" bIns="0" rtlCol="0" anchor="ctr"/>
           <a:lstStyle/>
           <a:p>
-            <a:pPr indent="0" marL="0">
-              <a:buNone/>
-            </a:pPr>
-            <a:r>
-              <a:rPr lang="en-US" sz="3000" b="1" dirty="0">
-                <a:solidFill>
-                  <a:schemeClr val="accent1"/>
-                </a:solidFill>
-                <a:latin typeface="Cambria" pitchFamily="34" charset="0"/>
-                <a:ea typeface="Cambria" pitchFamily="34" charset="-122"/>
-                <a:cs typeface="Cambria" pitchFamily="34" charset="-120"/>
-              </a:rPr>
-              <a:t>5</a:t>
-            </a:r>
-            <a:endParaRPr lang="en-US" sz="3000" dirty="0"/>
-          </a:p>
-        </p:txBody>
-      </p:sp>
-      <p:sp>
-        <p:nvSpPr>
-          <p:cNvPr id="12" name="Text 9"/>
-          <p:cNvSpPr txBox="1"/>
-          <p:nvPr/>
-        </p:nvSpPr>
-        <p:spPr>
-          <a:xfrm>
-            <a:off x="1508760" y="2916936"/>
-            <a:ext cx="1234440" cy="640080"/>
-          </a:xfrm>
-          <a:prstGeom prst="rect">
-            <a:avLst/>
-          </a:prstGeom>
-          <a:noFill/>
-          <a:ln/>
-        </p:spPr>
-        <p:txBody>
-          <a:bodyPr wrap="square" lIns="0" tIns="0" rIns="0" bIns="0" rtlCol="0" anchor="ctr"/>
-          <a:lstStyle/>
-          <a:p>
-            <a:pPr indent="0" marL="0">
-              <a:buNone/>
-            </a:pPr>
-            <a:r>
-              <a:rPr lang="en-US" sz="1800" b="1" dirty="0">
+            <a:pPr algn="ctr" indent="0" marL="0">
+              <a:buNone/>
+            </a:pPr>
+            <a:r>
+              <a:rPr lang="en-US" sz="1600" b="1" dirty="0">
+                <a:solidFill>
+                  <a:schemeClr val="bg1"/>
+                </a:solidFill>
+              </a:rPr>
+              <a:t>3</a:t>
+            </a:r>
+            <a:endParaRPr lang="en-US" sz="1600" dirty="0"/>
+          </a:p>
+        </p:txBody>
+      </p:sp>
+      <p:sp>
+        <p:nvSpPr>
+          <p:cNvPr id="17" name="Text 14"/>
+          <p:cNvSpPr txBox="1"/>
+          <p:nvPr/>
+        </p:nvSpPr>
+        <p:spPr>
+          <a:xfrm>
+            <a:off x="4800600" y="1920240"/>
+            <a:ext cx="1737360" cy="548640"/>
+          </a:xfrm>
+          <a:prstGeom prst="rect">
+            <a:avLst/>
+          </a:prstGeom>
+          <a:noFill/>
+          <a:ln/>
+        </p:spPr>
+        <p:txBody>
+          <a:bodyPr wrap="square" lIns="0" tIns="0" rIns="0" bIns="0" rtlCol="0" anchor="t"/>
+          <a:lstStyle/>
+          <a:p>
+            <a:pPr indent="0" marL="0">
+              <a:buNone/>
+            </a:pPr>
+            <a:r>
+              <a:rPr lang="en-US" sz="1500" b="1" dirty="0">
                 <a:solidFill>
                   <a:schemeClr val="tx2"/>
                 </a:solidFill>
               </a:rPr>
-              <a:t>PUT</a:t>
-            </a:r>
-            <a:endParaRPr lang="en-US" sz="1800" dirty="0"/>
-          </a:p>
-        </p:txBody>
-      </p:sp>
-      <p:sp>
-        <p:nvSpPr>
-          <p:cNvPr id="13" name="método DELETE"/>
+              <a:t>Token JWT</a:t>
+            </a:r>
+            <a:endParaRPr lang="en-US" sz="1500" dirty="0"/>
+          </a:p>
+        </p:txBody>
+      </p:sp>
+      <p:sp>
+        <p:nvSpPr>
+          <p:cNvPr id="18" name="Text 15"/>
+          <p:cNvSpPr txBox="1"/>
+          <p:nvPr/>
+        </p:nvSpPr>
+        <p:spPr>
+          <a:xfrm>
+            <a:off x="4800600" y="2514600"/>
+            <a:ext cx="1737360" cy="1051560"/>
+          </a:xfrm>
+          <a:prstGeom prst="rect">
+            <a:avLst/>
+          </a:prstGeom>
+          <a:noFill/>
+          <a:ln/>
+        </p:spPr>
+        <p:txBody>
+          <a:bodyPr wrap="square" lIns="0" tIns="0" rIns="0" bIns="0" rtlCol="0" anchor="t"/>
+          <a:lstStyle/>
+          <a:p>
+            <a:pPr indent="0" marL="0">
+              <a:buNone/>
+            </a:pPr>
+            <a:r>
+              <a:rPr lang="en-US" sz="1300" dirty="0">
+                <a:solidFill>
+                  <a:schemeClr val="tx1"/>
+                </a:solidFill>
+              </a:rPr>
+              <a:t>Cada petición lleva Authorization: Bearer; sin token, 401</a:t>
+            </a:r>
+            <a:endParaRPr lang="en-US" sz="1300" dirty="0"/>
+          </a:p>
+        </p:txBody>
+      </p:sp>
+      <p:sp>
+        <p:nvSpPr>
+          <p:cNvPr id="19" name="paso seguridad 4"/>
           <p:cNvSpPr/>
           <p:nvPr/>
         </p:nvSpPr>
         <p:spPr>
           <a:xfrm>
-            <a:off x="457200" y="3712464"/>
-            <a:ext cx="2377440" cy="731520"/>
+            <a:off x="6766560" y="1234440"/>
+            <a:ext cx="1965960" cy="2377440"/>
           </a:xfrm>
           <a:prstGeom prst="roundRect">
             <a:avLst>
-              <a:gd name="adj" fmla="val 10000"/>
+              <a:gd name="adj" fmla="val 3721"/>
             </a:avLst>
           </a:prstGeom>
           <a:solidFill>
@@ -3492,14 +3726,39 @@
       </p:sp>
       <p:sp>
         <p:nvSpPr>
-          <p:cNvPr id="14" name="Text 11"/>
-          <p:cNvSpPr txBox="1"/>
-          <p:nvPr/>
-        </p:nvSpPr>
-        <p:spPr>
-          <a:xfrm>
-            <a:off x="594360" y="3758184"/>
-            <a:ext cx="914400" cy="640080"/>
+          <p:cNvPr id="20" name="insignia 4"/>
+          <p:cNvSpPr/>
+          <p:nvPr/>
+        </p:nvSpPr>
+        <p:spPr>
+          <a:xfrm>
+            <a:off x="6949440" y="1371600"/>
+            <a:ext cx="411480" cy="411480"/>
+          </a:xfrm>
+          <a:prstGeom prst="ellipse">
+            <a:avLst/>
+          </a:prstGeom>
+          <a:solidFill>
+            <a:schemeClr val="accent1"/>
+          </a:solidFill>
+          <a:ln w="12700">
+            <a:solidFill>
+              <a:schemeClr val="accent1"/>
+            </a:solidFill>
+            <a:prstDash val="solid"/>
+          </a:ln>
+        </p:spPr>
+      </p:sp>
+      <p:sp>
+        <p:nvSpPr>
+          <p:cNvPr id="21" name="Text 18"/>
+          <p:cNvSpPr txBox="1"/>
+          <p:nvPr/>
+        </p:nvSpPr>
+        <p:spPr>
+          <a:xfrm>
+            <a:off x="6949440" y="1371600"/>
+            <a:ext cx="411480" cy="411480"/>
           </a:xfrm>
           <a:prstGeom prst="rect">
             <a:avLst/>
@@ -3511,76 +3770,140 @@
           <a:bodyPr wrap="square" lIns="0" tIns="0" rIns="0" bIns="0" rtlCol="0" anchor="ctr"/>
           <a:lstStyle/>
           <a:p>
-            <a:pPr indent="0" marL="0">
-              <a:buNone/>
-            </a:pPr>
-            <a:r>
-              <a:rPr lang="en-US" sz="3000" b="1" dirty="0">
-                <a:solidFill>
-                  <a:schemeClr val="accent1"/>
-                </a:solidFill>
-                <a:latin typeface="Cambria" pitchFamily="34" charset="0"/>
-                <a:ea typeface="Cambria" pitchFamily="34" charset="-122"/>
-                <a:cs typeface="Cambria" pitchFamily="34" charset="-120"/>
-              </a:rPr>
-              <a:t>6</a:t>
-            </a:r>
-            <a:endParaRPr lang="en-US" sz="3000" dirty="0"/>
-          </a:p>
-        </p:txBody>
-      </p:sp>
-      <p:sp>
-        <p:nvSpPr>
-          <p:cNvPr id="15" name="Text 12"/>
-          <p:cNvSpPr txBox="1"/>
-          <p:nvPr/>
-        </p:nvSpPr>
-        <p:spPr>
-          <a:xfrm>
-            <a:off x="1508760" y="3758184"/>
-            <a:ext cx="1234440" cy="640080"/>
-          </a:xfrm>
-          <a:prstGeom prst="rect">
-            <a:avLst/>
-          </a:prstGeom>
-          <a:noFill/>
-          <a:ln/>
-        </p:spPr>
-        <p:txBody>
-          <a:bodyPr wrap="square" lIns="0" tIns="0" rIns="0" bIns="0" rtlCol="0" anchor="ctr"/>
-          <a:lstStyle/>
-          <a:p>
-            <a:pPr indent="0" marL="0">
-              <a:buNone/>
-            </a:pPr>
-            <a:r>
-              <a:rPr lang="en-US" sz="1800" b="1" dirty="0">
+            <a:pPr algn="ctr" indent="0" marL="0">
+              <a:buNone/>
+            </a:pPr>
+            <a:r>
+              <a:rPr lang="en-US" sz="1600" b="1" dirty="0">
+                <a:solidFill>
+                  <a:schemeClr val="bg1"/>
+                </a:solidFill>
+              </a:rPr>
+              <a:t>4</a:t>
+            </a:r>
+            <a:endParaRPr lang="en-US" sz="1600" dirty="0"/>
+          </a:p>
+        </p:txBody>
+      </p:sp>
+      <p:sp>
+        <p:nvSpPr>
+          <p:cNvPr id="22" name="Text 19"/>
+          <p:cNvSpPr txBox="1"/>
+          <p:nvPr/>
+        </p:nvSpPr>
+        <p:spPr>
+          <a:xfrm>
+            <a:off x="6903720" y="1920240"/>
+            <a:ext cx="1737360" cy="548640"/>
+          </a:xfrm>
+          <a:prstGeom prst="rect">
+            <a:avLst/>
+          </a:prstGeom>
+          <a:noFill/>
+          <a:ln/>
+        </p:spPr>
+        <p:txBody>
+          <a:bodyPr wrap="square" lIns="0" tIns="0" rIns="0" bIns="0" rtlCol="0" anchor="t"/>
+          <a:lstStyle/>
+          <a:p>
+            <a:pPr indent="0" marL="0">
+              <a:buNone/>
+            </a:pPr>
+            <a:r>
+              <a:rPr lang="en-US" sz="1500" b="1" dirty="0">
                 <a:solidFill>
                   <a:schemeClr val="tx2"/>
                 </a:solidFill>
               </a:rPr>
-              <a:t>DELETE</a:t>
-            </a:r>
-            <a:endParaRPr lang="en-US" sz="1800" dirty="0"/>
-          </a:p>
-        </p:txBody>
-      </p:sp>
-      <p:graphicFrame>
-        <p:nvGraphicFramePr>
-          <p:cNvPr id="16" name="Chart 0" descr=""/>
-          <p:cNvGraphicFramePr/>
-          <p:nvPr/>
-        </p:nvGraphicFramePr>
-        <p:xfrm>
-          <a:off x="3108960" y="1097280"/>
-          <a:ext cx="5577840" cy="3474720"/>
-        </p:xfrm>
-        <a:graphic xmlns:a="http://schemas.openxmlformats.org/drawingml/2006/main">
-          <a:graphicData uri="http://schemas.openxmlformats.org/drawingml/2006/chart">
-            <c:chart xmlns:c="http://schemas.openxmlformats.org/drawingml/2006/chart" r:id="rId1"/>
-          </a:graphicData>
-        </a:graphic>
-      </p:graphicFrame>
+              <a:t>Roles ADMIN / OPERADOR</a:t>
+            </a:r>
+            <a:endParaRPr lang="en-US" sz="1500" dirty="0"/>
+          </a:p>
+        </p:txBody>
+      </p:sp>
+      <p:sp>
+        <p:nvSpPr>
+          <p:cNvPr id="23" name="Text 20"/>
+          <p:cNvSpPr txBox="1"/>
+          <p:nvPr/>
+        </p:nvSpPr>
+        <p:spPr>
+          <a:xfrm>
+            <a:off x="6903720" y="2514600"/>
+            <a:ext cx="1737360" cy="1051560"/>
+          </a:xfrm>
+          <a:prstGeom prst="rect">
+            <a:avLst/>
+          </a:prstGeom>
+          <a:noFill/>
+          <a:ln/>
+        </p:spPr>
+        <p:txBody>
+          <a:bodyPr wrap="square" lIns="0" tIns="0" rIns="0" bIns="0" rtlCol="0" anchor="t"/>
+          <a:lstStyle/>
+          <a:p>
+            <a:pPr indent="0" marL="0">
+              <a:buNone/>
+            </a:pPr>
+            <a:r>
+              <a:rPr lang="en-US" sz="1300" dirty="0">
+                <a:solidFill>
+                  <a:schemeClr val="tx1"/>
+                </a:solidFill>
+              </a:rPr>
+              <a:t>El servidor responde 403 al operador en catálogos y generación</a:t>
+            </a:r>
+            <a:endParaRPr lang="en-US" sz="1300" dirty="0"/>
+          </a:p>
+        </p:txBody>
+      </p:sp>
+      <p:sp>
+        <p:nvSpPr>
+          <p:cNvPr id="24" name="Text 21"/>
+          <p:cNvSpPr txBox="1"/>
+          <p:nvPr/>
+        </p:nvSpPr>
+        <p:spPr>
+          <a:xfrm>
+            <a:off x="457200" y="3840480"/>
+            <a:ext cx="8229600" cy="731520"/>
+          </a:xfrm>
+          <a:prstGeom prst="rect">
+            <a:avLst/>
+          </a:prstGeom>
+          <a:noFill/>
+          <a:ln/>
+        </p:spPr>
+        <p:txBody>
+          <a:bodyPr wrap="square" lIns="0" tIns="0" rIns="0" bIns="0" rtlCol="0" anchor="t"/>
+          <a:lstStyle/>
+          <a:p>
+            <a:pPr indent="0" marL="0">
+              <a:buNone/>
+            </a:pPr>
+            <a:r>
+              <a:rPr lang="en-US" sz="1500" b="1" dirty="0">
+                <a:solidFill>
+                  <a:schemeClr val="accent4"/>
+                </a:solidFill>
+              </a:rPr>
+              <a:t>Verificado: </a:t>
+            </a:r>
+            <a:pPr indent="0" marL="0">
+              <a:buNone/>
+            </a:pPr>
+            <a:r>
+              <a:rPr lang="en-US" sz="1500" dirty="0">
+                <a:solidFill>
+                  <a:schemeClr val="tx1"/>
+                </a:solidFill>
+              </a:rPr>
+              <a:t>cada microservicio valida el JWT por sí mismo; una prueba por servicio descubre sus endpoints y comprueba que los 52 de negocio exigen token, que un token inválido se rechaza y que el operador recibe 403 donde corresponde.</a:t>
+            </a:r>
+            <a:endParaRPr lang="en-US" sz="1500" dirty="0"/>
+          </a:p>
+        </p:txBody>
+      </p:sp>
       <p:sp>
         <p:nvSpPr>
           <p:cNvPr id="25" name="Slide Number Placeholder 0"/>
@@ -3686,34 +4009,37 @@
                 <a:ea typeface="Cambria" pitchFamily="34" charset="-122"/>
                 <a:cs typeface="Cambria" pitchFamily="34" charset="-120"/>
               </a:rPr>
-              <a:t>Demostración: CRUD que persiste y cobranza</a:t>
+              <a:t>53 servicios REST: GET, POST, PUT y DELETE</a:t>
             </a:r>
             <a:endParaRPr lang="en-US" sz="2800" dirty="0"/>
           </a:p>
         </p:txBody>
       </p:sp>
-      <p:pic>
-        <p:nvPicPr>
-          <p:cNvPr id="4" name="captura socios" descr="captura socios">    </p:cNvPr>
-          <p:cNvPicPr>
-            <a:picLocks noChangeAspect="1"/>
-          </p:cNvPicPr>
-          <p:nvPr/>
-        </p:nvPicPr>
-        <p:blipFill>
-          <a:blip r:embed="rId1"/>
-          <a:stretch>
-            <a:fillRect/>
-          </a:stretch>
-        </p:blipFill>
+      <p:sp>
+        <p:nvSpPr>
+          <p:cNvPr id="4" name="método GET"/>
+          <p:cNvSpPr/>
+          <p:nvPr/>
+        </p:nvSpPr>
         <p:spPr>
           <a:xfrm>
             <a:off x="457200" y="1188720"/>
-            <a:ext cx="4023360" cy="2262035"/>
-          </a:xfrm>
-          <a:prstGeom prst="rect">
-            <a:avLst/>
-          </a:prstGeom>
+            <a:ext cx="2377440" cy="731520"/>
+          </a:xfrm>
+          <a:prstGeom prst="roundRect">
+            <a:avLst>
+              <a:gd name="adj" fmla="val 10000"/>
+            </a:avLst>
+          </a:prstGeom>
+          <a:solidFill>
+            <a:schemeClr val="bg2"/>
+          </a:solidFill>
+          <a:ln w="12700">
+            <a:solidFill>
+              <a:schemeClr val="bg2"/>
+            </a:solidFill>
+            <a:prstDash val="solid"/>
+          </a:ln>
           <a:effectLst>
             <a:outerShdw sx="100000" sy="100000" kx="0" ky="0" algn="bl" rotWithShape="0" blurRad="76200" dist="25400" dir="5400000">
               <a:srgbClr val="000000">
@@ -3722,29 +4048,107 @@
             </a:outerShdw>
           </a:effectLst>
         </p:spPr>
-      </p:pic>
-      <p:pic>
-        <p:nvPicPr>
-          <p:cNvPr id="5" name="captura cobranza" descr="captura cobranza">    </p:cNvPr>
-          <p:cNvPicPr>
-            <a:picLocks noChangeAspect="1"/>
-          </p:cNvPicPr>
-          <p:nvPr/>
-        </p:nvPicPr>
-        <p:blipFill>
-          <a:blip r:embed="rId2"/>
-          <a:stretch>
-            <a:fillRect/>
-          </a:stretch>
-        </p:blipFill>
-        <p:spPr>
-          <a:xfrm>
-            <a:off x="4663440" y="1188720"/>
-            <a:ext cx="4023360" cy="2262035"/>
-          </a:xfrm>
-          <a:prstGeom prst="rect">
-            <a:avLst/>
-          </a:prstGeom>
+      </p:sp>
+      <p:sp>
+        <p:nvSpPr>
+          <p:cNvPr id="5" name="Text 2"/>
+          <p:cNvSpPr txBox="1"/>
+          <p:nvPr/>
+        </p:nvSpPr>
+        <p:spPr>
+          <a:xfrm>
+            <a:off x="594360" y="1234440"/>
+            <a:ext cx="914400" cy="640080"/>
+          </a:xfrm>
+          <a:prstGeom prst="rect">
+            <a:avLst/>
+          </a:prstGeom>
+          <a:noFill/>
+          <a:ln/>
+        </p:spPr>
+        <p:txBody>
+          <a:bodyPr wrap="square" lIns="0" tIns="0" rIns="0" bIns="0" rtlCol="0" anchor="ctr"/>
+          <a:lstStyle/>
+          <a:p>
+            <a:pPr indent="0" marL="0">
+              <a:buNone/>
+            </a:pPr>
+            <a:r>
+              <a:rPr lang="en-US" sz="3000" b="1" dirty="0">
+                <a:solidFill>
+                  <a:schemeClr val="accent1"/>
+                </a:solidFill>
+                <a:latin typeface="Cambria" pitchFamily="34" charset="0"/>
+                <a:ea typeface="Cambria" pitchFamily="34" charset="-122"/>
+                <a:cs typeface="Cambria" pitchFamily="34" charset="-120"/>
+              </a:rPr>
+              <a:t>26</a:t>
+            </a:r>
+            <a:endParaRPr lang="en-US" sz="3000" dirty="0"/>
+          </a:p>
+        </p:txBody>
+      </p:sp>
+      <p:sp>
+        <p:nvSpPr>
+          <p:cNvPr id="6" name="Text 3"/>
+          <p:cNvSpPr txBox="1"/>
+          <p:nvPr/>
+        </p:nvSpPr>
+        <p:spPr>
+          <a:xfrm>
+            <a:off x="1508760" y="1234440"/>
+            <a:ext cx="1234440" cy="640080"/>
+          </a:xfrm>
+          <a:prstGeom prst="rect">
+            <a:avLst/>
+          </a:prstGeom>
+          <a:noFill/>
+          <a:ln/>
+        </p:spPr>
+        <p:txBody>
+          <a:bodyPr wrap="square" lIns="0" tIns="0" rIns="0" bIns="0" rtlCol="0" anchor="ctr"/>
+          <a:lstStyle/>
+          <a:p>
+            <a:pPr indent="0" marL="0">
+              <a:buNone/>
+            </a:pPr>
+            <a:r>
+              <a:rPr lang="en-US" sz="1800" b="1" dirty="0">
+                <a:solidFill>
+                  <a:schemeClr val="tx2"/>
+                </a:solidFill>
+              </a:rPr>
+              <a:t>GET</a:t>
+            </a:r>
+            <a:endParaRPr lang="en-US" sz="1800" dirty="0"/>
+          </a:p>
+        </p:txBody>
+      </p:sp>
+      <p:sp>
+        <p:nvSpPr>
+          <p:cNvPr id="7" name="método POST"/>
+          <p:cNvSpPr/>
+          <p:nvPr/>
+        </p:nvSpPr>
+        <p:spPr>
+          <a:xfrm>
+            <a:off x="457200" y="2029968"/>
+            <a:ext cx="2377440" cy="731520"/>
+          </a:xfrm>
+          <a:prstGeom prst="roundRect">
+            <a:avLst>
+              <a:gd name="adj" fmla="val 10000"/>
+            </a:avLst>
+          </a:prstGeom>
+          <a:solidFill>
+            <a:schemeClr val="bg2"/>
+          </a:solidFill>
+          <a:ln w="12700">
+            <a:solidFill>
+              <a:schemeClr val="bg2"/>
+            </a:solidFill>
+            <a:prstDash val="solid"/>
+          </a:ln>
           <a:effectLst>
             <a:outerShdw sx="100000" sy="100000" kx="0" ky="0" algn="bl" rotWithShape="0" blurRad="76200" dist="25400" dir="5400000">
               <a:srgbClr val="000000">
@@ -3753,101 +4157,316 @@
             </a:outerShdw>
           </a:effectLst>
         </p:spPr>
-      </p:pic>
-      <p:sp>
-        <p:nvSpPr>
-          <p:cNvPr id="6" name="Text 1"/>
-          <p:cNvSpPr txBox="1"/>
-          <p:nvPr/>
-        </p:nvSpPr>
-        <p:spPr>
-          <a:xfrm>
-            <a:off x="457200" y="3611880"/>
-            <a:ext cx="4023360" cy="822960"/>
-          </a:xfrm>
-          <a:prstGeom prst="rect">
-            <a:avLst/>
-          </a:prstGeom>
-          <a:noFill/>
-          <a:ln/>
-        </p:spPr>
-        <p:txBody>
-          <a:bodyPr wrap="square" lIns="0" tIns="0" rIns="0" bIns="0" rtlCol="0" anchor="t"/>
-          <a:lstStyle/>
-          <a:p>
-            <a:pPr indent="0" marL="0">
-              <a:buNone/>
-            </a:pPr>
-            <a:r>
-              <a:rPr lang="en-US" sz="1500" b="1" dirty="0">
+      </p:sp>
+      <p:sp>
+        <p:nvSpPr>
+          <p:cNvPr id="8" name="Text 5"/>
+          <p:cNvSpPr txBox="1"/>
+          <p:nvPr/>
+        </p:nvSpPr>
+        <p:spPr>
+          <a:xfrm>
+            <a:off x="594360" y="2075688"/>
+            <a:ext cx="914400" cy="640080"/>
+          </a:xfrm>
+          <a:prstGeom prst="rect">
+            <a:avLst/>
+          </a:prstGeom>
+          <a:noFill/>
+          <a:ln/>
+        </p:spPr>
+        <p:txBody>
+          <a:bodyPr wrap="square" lIns="0" tIns="0" rIns="0" bIns="0" rtlCol="0" anchor="ctr"/>
+          <a:lstStyle/>
+          <a:p>
+            <a:pPr indent="0" marL="0">
+              <a:buNone/>
+            </a:pPr>
+            <a:r>
+              <a:rPr lang="en-US" sz="3000" b="1" dirty="0">
                 <a:solidFill>
                   <a:schemeClr val="accent1"/>
                 </a:solidFill>
-              </a:rPr>
-              <a:t>Socios: </a:t>
-            </a:r>
-            <a:pPr indent="0" marL="0">
-              <a:buNone/>
-            </a:pPr>
-            <a:r>
-              <a:rPr lang="en-US" sz="1500" dirty="0">
-                <a:solidFill>
-                  <a:schemeClr val="tx1"/>
-                </a:solidFill>
-              </a:rPr>
-              <a:t>GET, POST, PUT y DELETE sobre la base de datos.</a:t>
-            </a:r>
-            <a:endParaRPr lang="en-US" sz="1500" dirty="0"/>
-          </a:p>
-        </p:txBody>
-      </p:sp>
-      <p:sp>
-        <p:nvSpPr>
-          <p:cNvPr id="7" name="Text 2"/>
-          <p:cNvSpPr txBox="1"/>
-          <p:nvPr/>
-        </p:nvSpPr>
-        <p:spPr>
-          <a:xfrm>
-            <a:off x="4663440" y="3611880"/>
-            <a:ext cx="4023360" cy="822960"/>
-          </a:xfrm>
-          <a:prstGeom prst="rect">
-            <a:avLst/>
-          </a:prstGeom>
-          <a:noFill/>
-          <a:ln/>
-        </p:spPr>
-        <p:txBody>
-          <a:bodyPr wrap="square" lIns="0" tIns="0" rIns="0" bIns="0" rtlCol="0" anchor="t"/>
-          <a:lstStyle/>
-          <a:p>
-            <a:pPr indent="0" marL="0">
-              <a:buNone/>
-            </a:pPr>
-            <a:r>
-              <a:rPr lang="en-US" sz="1500" b="1" dirty="0">
+                <a:latin typeface="Cambria" pitchFamily="34" charset="0"/>
+                <a:ea typeface="Cambria" pitchFamily="34" charset="-122"/>
+                <a:cs typeface="Cambria" pitchFamily="34" charset="-120"/>
+              </a:rPr>
+              <a:t>16</a:t>
+            </a:r>
+            <a:endParaRPr lang="en-US" sz="3000" dirty="0"/>
+          </a:p>
+        </p:txBody>
+      </p:sp>
+      <p:sp>
+        <p:nvSpPr>
+          <p:cNvPr id="9" name="Text 6"/>
+          <p:cNvSpPr txBox="1"/>
+          <p:nvPr/>
+        </p:nvSpPr>
+        <p:spPr>
+          <a:xfrm>
+            <a:off x="1508760" y="2075688"/>
+            <a:ext cx="1234440" cy="640080"/>
+          </a:xfrm>
+          <a:prstGeom prst="rect">
+            <a:avLst/>
+          </a:prstGeom>
+          <a:noFill/>
+          <a:ln/>
+        </p:spPr>
+        <p:txBody>
+          <a:bodyPr wrap="square" lIns="0" tIns="0" rIns="0" bIns="0" rtlCol="0" anchor="ctr"/>
+          <a:lstStyle/>
+          <a:p>
+            <a:pPr indent="0" marL="0">
+              <a:buNone/>
+            </a:pPr>
+            <a:r>
+              <a:rPr lang="en-US" sz="1800" b="1" dirty="0">
+                <a:solidFill>
+                  <a:schemeClr val="tx2"/>
+                </a:solidFill>
+              </a:rPr>
+              <a:t>POST</a:t>
+            </a:r>
+            <a:endParaRPr lang="en-US" sz="1800" dirty="0"/>
+          </a:p>
+        </p:txBody>
+      </p:sp>
+      <p:sp>
+        <p:nvSpPr>
+          <p:cNvPr id="10" name="método PUT"/>
+          <p:cNvSpPr/>
+          <p:nvPr/>
+        </p:nvSpPr>
+        <p:spPr>
+          <a:xfrm>
+            <a:off x="457200" y="2871216"/>
+            <a:ext cx="2377440" cy="731520"/>
+          </a:xfrm>
+          <a:prstGeom prst="roundRect">
+            <a:avLst>
+              <a:gd name="adj" fmla="val 10000"/>
+            </a:avLst>
+          </a:prstGeom>
+          <a:solidFill>
+            <a:schemeClr val="bg2"/>
+          </a:solidFill>
+          <a:ln w="12700">
+            <a:solidFill>
+              <a:schemeClr val="bg2"/>
+            </a:solidFill>
+            <a:prstDash val="solid"/>
+          </a:ln>
+          <a:effectLst>
+            <a:outerShdw sx="100000" sy="100000" kx="0" ky="0" algn="bl" rotWithShape="0" blurRad="76200" dist="25400" dir="5400000">
+              <a:srgbClr val="000000">
+                <a:alpha val="12000"/>
+              </a:srgbClr>
+            </a:outerShdw>
+          </a:effectLst>
+        </p:spPr>
+      </p:sp>
+      <p:sp>
+        <p:nvSpPr>
+          <p:cNvPr id="11" name="Text 8"/>
+          <p:cNvSpPr txBox="1"/>
+          <p:nvPr/>
+        </p:nvSpPr>
+        <p:spPr>
+          <a:xfrm>
+            <a:off x="594360" y="2916936"/>
+            <a:ext cx="914400" cy="640080"/>
+          </a:xfrm>
+          <a:prstGeom prst="rect">
+            <a:avLst/>
+          </a:prstGeom>
+          <a:noFill/>
+          <a:ln/>
+        </p:spPr>
+        <p:txBody>
+          <a:bodyPr wrap="square" lIns="0" tIns="0" rIns="0" bIns="0" rtlCol="0" anchor="ctr"/>
+          <a:lstStyle/>
+          <a:p>
+            <a:pPr indent="0" marL="0">
+              <a:buNone/>
+            </a:pPr>
+            <a:r>
+              <a:rPr lang="en-US" sz="3000" b="1" dirty="0">
                 <a:solidFill>
                   <a:schemeClr val="accent1"/>
                 </a:solidFill>
-              </a:rPr>
-              <a:t>Cobranza: </a:t>
-            </a:r>
-            <a:pPr indent="0" marL="0">
-              <a:buNone/>
-            </a:pPr>
-            <a:r>
-              <a:rPr lang="en-US" sz="1500" dirty="0">
-                <a:solidFill>
-                  <a:schemeClr val="tx1"/>
-                </a:solidFill>
-              </a:rPr>
-              <a:t>búsqueda por socio o puesto, abonar o exonerar y total a pagar.</a:t>
-            </a:r>
-            <a:endParaRPr lang="en-US" sz="1500" dirty="0"/>
-          </a:p>
-        </p:txBody>
-      </p:sp>
+                <a:latin typeface="Cambria" pitchFamily="34" charset="0"/>
+                <a:ea typeface="Cambria" pitchFamily="34" charset="-122"/>
+                <a:cs typeface="Cambria" pitchFamily="34" charset="-120"/>
+              </a:rPr>
+              <a:t>5</a:t>
+            </a:r>
+            <a:endParaRPr lang="en-US" sz="3000" dirty="0"/>
+          </a:p>
+        </p:txBody>
+      </p:sp>
+      <p:sp>
+        <p:nvSpPr>
+          <p:cNvPr id="12" name="Text 9"/>
+          <p:cNvSpPr txBox="1"/>
+          <p:nvPr/>
+        </p:nvSpPr>
+        <p:spPr>
+          <a:xfrm>
+            <a:off x="1508760" y="2916936"/>
+            <a:ext cx="1234440" cy="640080"/>
+          </a:xfrm>
+          <a:prstGeom prst="rect">
+            <a:avLst/>
+          </a:prstGeom>
+          <a:noFill/>
+          <a:ln/>
+        </p:spPr>
+        <p:txBody>
+          <a:bodyPr wrap="square" lIns="0" tIns="0" rIns="0" bIns="0" rtlCol="0" anchor="ctr"/>
+          <a:lstStyle/>
+          <a:p>
+            <a:pPr indent="0" marL="0">
+              <a:buNone/>
+            </a:pPr>
+            <a:r>
+              <a:rPr lang="en-US" sz="1800" b="1" dirty="0">
+                <a:solidFill>
+                  <a:schemeClr val="tx2"/>
+                </a:solidFill>
+              </a:rPr>
+              <a:t>PUT</a:t>
+            </a:r>
+            <a:endParaRPr lang="en-US" sz="1800" dirty="0"/>
+          </a:p>
+        </p:txBody>
+      </p:sp>
+      <p:sp>
+        <p:nvSpPr>
+          <p:cNvPr id="13" name="método DELETE"/>
+          <p:cNvSpPr/>
+          <p:nvPr/>
+        </p:nvSpPr>
+        <p:spPr>
+          <a:xfrm>
+            <a:off x="457200" y="3712464"/>
+            <a:ext cx="2377440" cy="731520"/>
+          </a:xfrm>
+          <a:prstGeom prst="roundRect">
+            <a:avLst>
+              <a:gd name="adj" fmla="val 10000"/>
+            </a:avLst>
+          </a:prstGeom>
+          <a:solidFill>
+            <a:schemeClr val="bg2"/>
+          </a:solidFill>
+          <a:ln w="12700">
+            <a:solidFill>
+              <a:schemeClr val="bg2"/>
+            </a:solidFill>
+            <a:prstDash val="solid"/>
+          </a:ln>
+          <a:effectLst>
+            <a:outerShdw sx="100000" sy="100000" kx="0" ky="0" algn="bl" rotWithShape="0" blurRad="76200" dist="25400" dir="5400000">
+              <a:srgbClr val="000000">
+                <a:alpha val="12000"/>
+              </a:srgbClr>
+            </a:outerShdw>
+          </a:effectLst>
+        </p:spPr>
+      </p:sp>
+      <p:sp>
+        <p:nvSpPr>
+          <p:cNvPr id="14" name="Text 11"/>
+          <p:cNvSpPr txBox="1"/>
+          <p:nvPr/>
+        </p:nvSpPr>
+        <p:spPr>
+          <a:xfrm>
+            <a:off x="594360" y="3758184"/>
+            <a:ext cx="914400" cy="640080"/>
+          </a:xfrm>
+          <a:prstGeom prst="rect">
+            <a:avLst/>
+          </a:prstGeom>
+          <a:noFill/>
+          <a:ln/>
+        </p:spPr>
+        <p:txBody>
+          <a:bodyPr wrap="square" lIns="0" tIns="0" rIns="0" bIns="0" rtlCol="0" anchor="ctr"/>
+          <a:lstStyle/>
+          <a:p>
+            <a:pPr indent="0" marL="0">
+              <a:buNone/>
+            </a:pPr>
+            <a:r>
+              <a:rPr lang="en-US" sz="3000" b="1" dirty="0">
+                <a:solidFill>
+                  <a:schemeClr val="accent1"/>
+                </a:solidFill>
+                <a:latin typeface="Cambria" pitchFamily="34" charset="0"/>
+                <a:ea typeface="Cambria" pitchFamily="34" charset="-122"/>
+                <a:cs typeface="Cambria" pitchFamily="34" charset="-120"/>
+              </a:rPr>
+              <a:t>6</a:t>
+            </a:r>
+            <a:endParaRPr lang="en-US" sz="3000" dirty="0"/>
+          </a:p>
+        </p:txBody>
+      </p:sp>
+      <p:sp>
+        <p:nvSpPr>
+          <p:cNvPr id="15" name="Text 12"/>
+          <p:cNvSpPr txBox="1"/>
+          <p:nvPr/>
+        </p:nvSpPr>
+        <p:spPr>
+          <a:xfrm>
+            <a:off x="1508760" y="3758184"/>
+            <a:ext cx="1234440" cy="640080"/>
+          </a:xfrm>
+          <a:prstGeom prst="rect">
+            <a:avLst/>
+          </a:prstGeom>
+          <a:noFill/>
+          <a:ln/>
+        </p:spPr>
+        <p:txBody>
+          <a:bodyPr wrap="square" lIns="0" tIns="0" rIns="0" bIns="0" rtlCol="0" anchor="ctr"/>
+          <a:lstStyle/>
+          <a:p>
+            <a:pPr indent="0" marL="0">
+              <a:buNone/>
+            </a:pPr>
+            <a:r>
+              <a:rPr lang="en-US" sz="1800" b="1" dirty="0">
+                <a:solidFill>
+                  <a:schemeClr val="tx2"/>
+                </a:solidFill>
+              </a:rPr>
+              <a:t>DELETE</a:t>
+            </a:r>
+            <a:endParaRPr lang="en-US" sz="1800" dirty="0"/>
+          </a:p>
+        </p:txBody>
+      </p:sp>
+      <p:graphicFrame>
+        <p:nvGraphicFramePr>
+          <p:cNvPr id="16" name="Chart 0" descr=""/>
+          <p:cNvGraphicFramePr/>
+          <p:nvPr/>
+        </p:nvGraphicFramePr>
+        <p:xfrm>
+          <a:off x="3108960" y="1097280"/>
+          <a:ext cx="5577840" cy="3474720"/>
+        </p:xfrm>
+        <a:graphic xmlns:a="http://schemas.openxmlformats.org/drawingml/2006/main">
+          <a:graphicData uri="http://schemas.openxmlformats.org/drawingml/2006/chart">
+            <c:chart xmlns:c="http://schemas.openxmlformats.org/drawingml/2006/chart" r:id="rId1"/>
+          </a:graphicData>
+        </a:graphic>
+      </p:graphicFrame>
       <p:sp>
         <p:nvSpPr>
           <p:cNvPr id="25" name="Slide Number Placeholder 0"/>
@@ -3953,37 +4572,34 @@
                 <a:ea typeface="Cambria" pitchFamily="34" charset="-122"/>
                 <a:cs typeface="Cambria" pitchFamily="34" charset="-120"/>
               </a:rPr>
-              <a:t>Integridad: el pago se confirma completo</a:t>
+              <a:t>Demostración: CRUD que persiste y cobranza</a:t>
             </a:r>
             <a:endParaRPr lang="en-US" sz="2800" dirty="0"/>
           </a:p>
         </p:txBody>
       </p:sp>
-      <p:sp>
-        <p:nvSpPr>
-          <p:cNvPr id="4" name="flujo 1"/>
-          <p:cNvSpPr/>
-          <p:nvPr/>
-        </p:nvSpPr>
+      <p:pic>
+        <p:nvPicPr>
+          <p:cNvPr id="4" name="captura socios" descr="captura socios">    </p:cNvPr>
+          <p:cNvPicPr>
+            <a:picLocks noChangeAspect="1"/>
+          </p:cNvPicPr>
+          <p:nvPr/>
+        </p:nvPicPr>
+        <p:blipFill>
+          <a:blip r:embed="rId1"/>
+          <a:stretch>
+            <a:fillRect/>
+          </a:stretch>
+        </p:blipFill>
         <p:spPr>
           <a:xfrm>
             <a:off x="457200" y="1188720"/>
-            <a:ext cx="3931920" cy="731520"/>
-          </a:xfrm>
-          <a:prstGeom prst="roundRect">
-            <a:avLst>
-              <a:gd name="adj" fmla="val 10000"/>
-            </a:avLst>
-          </a:prstGeom>
-          <a:solidFill>
-            <a:schemeClr val="bg2"/>
-          </a:solidFill>
-          <a:ln w="12700">
-            <a:solidFill>
-              <a:schemeClr val="bg2"/>
-            </a:solidFill>
-            <a:prstDash val="solid"/>
-          </a:ln>
+            <a:ext cx="4023360" cy="2262035"/>
+          </a:xfrm>
+          <a:prstGeom prst="rect">
+            <a:avLst/>
+          </a:prstGeom>
           <a:effectLst>
             <a:outerShdw sx="100000" sy="100000" kx="0" ky="0" algn="bl" rotWithShape="0" blurRad="76200" dist="25400" dir="5400000">
               <a:srgbClr val="000000">
@@ -3992,165 +4608,29 @@
             </a:outerShdw>
           </a:effectLst>
         </p:spPr>
-      </p:sp>
-      <p:sp>
-        <p:nvSpPr>
-          <p:cNvPr id="5" name="insignia 1"/>
-          <p:cNvSpPr/>
-          <p:nvPr/>
-        </p:nvSpPr>
-        <p:spPr>
-          <a:xfrm>
-            <a:off x="594360" y="1344168"/>
-            <a:ext cx="420624" cy="420624"/>
-          </a:xfrm>
-          <a:prstGeom prst="ellipse">
-            <a:avLst/>
-          </a:prstGeom>
-          <a:solidFill>
-            <a:schemeClr val="accent1"/>
-          </a:solidFill>
-          <a:ln w="12700">
-            <a:solidFill>
-              <a:schemeClr val="accent1"/>
-            </a:solidFill>
-            <a:prstDash val="solid"/>
-          </a:ln>
-        </p:spPr>
-      </p:sp>
-      <p:sp>
-        <p:nvSpPr>
-          <p:cNvPr id="6" name="Text 3"/>
-          <p:cNvSpPr txBox="1"/>
-          <p:nvPr/>
-        </p:nvSpPr>
-        <p:spPr>
-          <a:xfrm>
-            <a:off x="594360" y="1344168"/>
-            <a:ext cx="420624" cy="420624"/>
-          </a:xfrm>
-          <a:prstGeom prst="rect">
-            <a:avLst/>
-          </a:prstGeom>
-          <a:noFill/>
-          <a:ln/>
-        </p:spPr>
-        <p:txBody>
-          <a:bodyPr wrap="square" lIns="0" tIns="0" rIns="0" bIns="0" rtlCol="0" anchor="ctr"/>
-          <a:lstStyle/>
-          <a:p>
-            <a:pPr algn="ctr" indent="0" marL="0">
-              <a:buNone/>
-            </a:pPr>
-            <a:r>
-              <a:rPr lang="en-US" sz="1600" b="1" dirty="0">
-                <a:solidFill>
-                  <a:schemeClr val="bg1"/>
-                </a:solidFill>
-              </a:rPr>
-              <a:t>1</a:t>
-            </a:r>
-            <a:endParaRPr lang="en-US" sz="1600" dirty="0"/>
-          </a:p>
-        </p:txBody>
-      </p:sp>
-      <p:sp>
-        <p:nvSpPr>
-          <p:cNvPr id="7" name="Text 4"/>
-          <p:cNvSpPr txBox="1"/>
-          <p:nvPr/>
-        </p:nvSpPr>
-        <p:spPr>
-          <a:xfrm>
-            <a:off x="1188720" y="1261872"/>
-            <a:ext cx="3108960" cy="320040"/>
-          </a:xfrm>
-          <a:prstGeom prst="rect">
-            <a:avLst/>
-          </a:prstGeom>
-          <a:noFill/>
-          <a:ln/>
-        </p:spPr>
-        <p:txBody>
-          <a:bodyPr wrap="square" lIns="0" tIns="0" rIns="0" bIns="0" rtlCol="0" anchor="t"/>
-          <a:lstStyle/>
-          <a:p>
-            <a:pPr indent="0" marL="0">
-              <a:buNone/>
-            </a:pPr>
-            <a:r>
-              <a:rPr lang="en-US" sz="1600" b="1" dirty="0">
-                <a:solidFill>
-                  <a:schemeClr val="tx2"/>
-                </a:solidFill>
-              </a:rPr>
-              <a:t>Cuentas pendientes</a:t>
-            </a:r>
-            <a:endParaRPr lang="en-US" sz="1600" dirty="0"/>
-          </a:p>
-        </p:txBody>
-      </p:sp>
-      <p:sp>
-        <p:nvSpPr>
-          <p:cNvPr id="8" name="Text 5"/>
-          <p:cNvSpPr txBox="1"/>
-          <p:nvPr/>
-        </p:nvSpPr>
-        <p:spPr>
-          <a:xfrm>
-            <a:off x="1188720" y="1581912"/>
-            <a:ext cx="3108960" cy="274320"/>
-          </a:xfrm>
-          <a:prstGeom prst="rect">
-            <a:avLst/>
-          </a:prstGeom>
-          <a:noFill/>
-          <a:ln/>
-        </p:spPr>
-        <p:txBody>
-          <a:bodyPr wrap="square" lIns="0" tIns="0" rIns="0" bIns="0" rtlCol="0" anchor="t"/>
-          <a:lstStyle/>
-          <a:p>
-            <a:pPr indent="0" marL="0">
-              <a:buNone/>
-            </a:pPr>
-            <a:r>
-              <a:rPr lang="en-US" sz="1300" dirty="0">
-                <a:solidFill>
-                  <a:schemeClr val="accent6"/>
-                </a:solidFill>
-              </a:rPr>
-              <a:t>por socio o puesto</a:t>
-            </a:r>
-            <a:endParaRPr lang="en-US" sz="1300" dirty="0"/>
-          </a:p>
-        </p:txBody>
-      </p:sp>
-      <p:sp>
-        <p:nvSpPr>
-          <p:cNvPr id="9" name="flujo 2"/>
-          <p:cNvSpPr/>
-          <p:nvPr/>
-        </p:nvSpPr>
-        <p:spPr>
-          <a:xfrm>
-            <a:off x="457200" y="2057400"/>
-            <a:ext cx="3931920" cy="731520"/>
-          </a:xfrm>
-          <a:prstGeom prst="roundRect">
-            <a:avLst>
-              <a:gd name="adj" fmla="val 10000"/>
-            </a:avLst>
-          </a:prstGeom>
-          <a:solidFill>
-            <a:schemeClr val="bg2"/>
-          </a:solidFill>
-          <a:ln w="12700">
-            <a:solidFill>
-              <a:schemeClr val="bg2"/>
-            </a:solidFill>
-            <a:prstDash val="solid"/>
-          </a:ln>
+      </p:pic>
+      <p:pic>
+        <p:nvPicPr>
+          <p:cNvPr id="5" name="captura cobranza" descr="captura cobranza">    </p:cNvPr>
+          <p:cNvPicPr>
+            <a:picLocks noChangeAspect="1"/>
+          </p:cNvPicPr>
+          <p:nvPr/>
+        </p:nvPicPr>
+        <p:blipFill>
+          <a:blip r:embed="rId2"/>
+          <a:stretch>
+            <a:fillRect/>
+          </a:stretch>
+        </p:blipFill>
+        <p:spPr>
+          <a:xfrm>
+            <a:off x="4663440" y="1188720"/>
+            <a:ext cx="4023360" cy="2262035"/>
+          </a:xfrm>
+          <a:prstGeom prst="rect">
+            <a:avLst/>
+          </a:prstGeom>
           <a:effectLst>
             <a:outerShdw sx="100000" sy="100000" kx="0" ky="0" algn="bl" rotWithShape="0" blurRad="76200" dist="25400" dir="5400000">
               <a:srgbClr val="000000">
@@ -4159,78 +4639,17 @@
             </a:outerShdw>
           </a:effectLst>
         </p:spPr>
-      </p:sp>
-      <p:sp>
-        <p:nvSpPr>
-          <p:cNvPr id="10" name="insignia 2"/>
-          <p:cNvSpPr/>
-          <p:nvPr/>
-        </p:nvSpPr>
-        <p:spPr>
-          <a:xfrm>
-            <a:off x="594360" y="2212848"/>
-            <a:ext cx="420624" cy="420624"/>
-          </a:xfrm>
-          <a:prstGeom prst="ellipse">
-            <a:avLst/>
-          </a:prstGeom>
-          <a:solidFill>
-            <a:schemeClr val="accent1"/>
-          </a:solidFill>
-          <a:ln w="12700">
-            <a:solidFill>
-              <a:schemeClr val="accent1"/>
-            </a:solidFill>
-            <a:prstDash val="solid"/>
-          </a:ln>
-        </p:spPr>
-      </p:sp>
-      <p:sp>
-        <p:nvSpPr>
-          <p:cNvPr id="11" name="Text 8"/>
-          <p:cNvSpPr txBox="1"/>
-          <p:nvPr/>
-        </p:nvSpPr>
-        <p:spPr>
-          <a:xfrm>
-            <a:off x="594360" y="2212848"/>
-            <a:ext cx="420624" cy="420624"/>
-          </a:xfrm>
-          <a:prstGeom prst="rect">
-            <a:avLst/>
-          </a:prstGeom>
-          <a:noFill/>
-          <a:ln/>
-        </p:spPr>
-        <p:txBody>
-          <a:bodyPr wrap="square" lIns="0" tIns="0" rIns="0" bIns="0" rtlCol="0" anchor="ctr"/>
-          <a:lstStyle/>
-          <a:p>
-            <a:pPr algn="ctr" indent="0" marL="0">
-              <a:buNone/>
-            </a:pPr>
-            <a:r>
-              <a:rPr lang="en-US" sz="1600" b="1" dirty="0">
-                <a:solidFill>
-                  <a:schemeClr val="bg1"/>
-                </a:solidFill>
-              </a:rPr>
-              <a:t>2</a:t>
-            </a:r>
-            <a:endParaRPr lang="en-US" sz="1600" dirty="0"/>
-          </a:p>
-        </p:txBody>
-      </p:sp>
-      <p:sp>
-        <p:nvSpPr>
-          <p:cNvPr id="12" name="Text 9"/>
-          <p:cNvSpPr txBox="1"/>
-          <p:nvPr/>
-        </p:nvSpPr>
-        <p:spPr>
-          <a:xfrm>
-            <a:off x="1188720" y="2130552"/>
-            <a:ext cx="3108960" cy="320040"/>
+      </p:pic>
+      <p:sp>
+        <p:nvSpPr>
+          <p:cNvPr id="6" name="Text 1"/>
+          <p:cNvSpPr txBox="1"/>
+          <p:nvPr/>
+        </p:nvSpPr>
+        <p:spPr>
+          <a:xfrm>
+            <a:off x="457200" y="3611880"/>
+            <a:ext cx="4023360" cy="822960"/>
           </a:xfrm>
           <a:prstGeom prst="rect">
             <a:avLst/>
@@ -4246,421 +4665,31 @@
               <a:buNone/>
             </a:pPr>
             <a:r>
-              <a:rPr lang="en-US" sz="1600" b="1" dirty="0">
-                <a:solidFill>
-                  <a:schemeClr val="tx2"/>
-                </a:solidFill>
-              </a:rPr>
-              <a:t>Abonar o exonerar</a:t>
-            </a:r>
-            <a:endParaRPr lang="en-US" sz="1600" dirty="0"/>
-          </a:p>
-        </p:txBody>
-      </p:sp>
-      <p:sp>
-        <p:nvSpPr>
-          <p:cNvPr id="13" name="Text 10"/>
-          <p:cNvSpPr txBox="1"/>
-          <p:nvPr/>
-        </p:nvSpPr>
-        <p:spPr>
-          <a:xfrm>
-            <a:off x="1188720" y="2450592"/>
-            <a:ext cx="3108960" cy="274320"/>
-          </a:xfrm>
-          <a:prstGeom prst="rect">
-            <a:avLst/>
-          </a:prstGeom>
-          <a:noFill/>
-          <a:ln/>
-        </p:spPr>
-        <p:txBody>
-          <a:bodyPr wrap="square" lIns="0" tIns="0" rIns="0" bIns="0" rtlCol="0" anchor="t"/>
-          <a:lstStyle/>
-          <a:p>
-            <a:pPr indent="0" marL="0">
-              <a:buNone/>
-            </a:pPr>
-            <a:r>
-              <a:rPr lang="en-US" sz="1300" dirty="0">
-                <a:solidFill>
-                  <a:schemeClr val="accent6"/>
-                </a:solidFill>
-              </a:rPr>
-              <a:t>se calcula el total</a:t>
-            </a:r>
-            <a:endParaRPr lang="en-US" sz="1300" dirty="0"/>
-          </a:p>
-        </p:txBody>
-      </p:sp>
-      <p:sp>
-        <p:nvSpPr>
-          <p:cNvPr id="14" name="flujo 3"/>
-          <p:cNvSpPr/>
-          <p:nvPr/>
-        </p:nvSpPr>
-        <p:spPr>
-          <a:xfrm>
-            <a:off x="457200" y="2926080"/>
-            <a:ext cx="3931920" cy="731520"/>
-          </a:xfrm>
-          <a:prstGeom prst="roundRect">
-            <a:avLst>
-              <a:gd name="adj" fmla="val 10000"/>
-            </a:avLst>
-          </a:prstGeom>
-          <a:solidFill>
-            <a:schemeClr val="bg2"/>
-          </a:solidFill>
-          <a:ln w="12700">
-            <a:solidFill>
-              <a:schemeClr val="bg2"/>
-            </a:solidFill>
-            <a:prstDash val="solid"/>
-          </a:ln>
-          <a:effectLst>
-            <a:outerShdw sx="100000" sy="100000" kx="0" ky="0" algn="bl" rotWithShape="0" blurRad="76200" dist="25400" dir="5400000">
-              <a:srgbClr val="000000">
-                <a:alpha val="12000"/>
-              </a:srgbClr>
-            </a:outerShdw>
-          </a:effectLst>
-        </p:spPr>
-      </p:sp>
-      <p:sp>
-        <p:nvSpPr>
-          <p:cNvPr id="15" name="insignia 3"/>
-          <p:cNvSpPr/>
-          <p:nvPr/>
-        </p:nvSpPr>
-        <p:spPr>
-          <a:xfrm>
-            <a:off x="594360" y="3081528"/>
-            <a:ext cx="420624" cy="420624"/>
-          </a:xfrm>
-          <a:prstGeom prst="ellipse">
-            <a:avLst/>
-          </a:prstGeom>
-          <a:solidFill>
-            <a:schemeClr val="accent1"/>
-          </a:solidFill>
-          <a:ln w="12700">
-            <a:solidFill>
-              <a:schemeClr val="accent1"/>
-            </a:solidFill>
-            <a:prstDash val="solid"/>
-          </a:ln>
-        </p:spPr>
-      </p:sp>
-      <p:sp>
-        <p:nvSpPr>
-          <p:cNvPr id="16" name="Text 13"/>
-          <p:cNvSpPr txBox="1"/>
-          <p:nvPr/>
-        </p:nvSpPr>
-        <p:spPr>
-          <a:xfrm>
-            <a:off x="594360" y="3081528"/>
-            <a:ext cx="420624" cy="420624"/>
-          </a:xfrm>
-          <a:prstGeom prst="rect">
-            <a:avLst/>
-          </a:prstGeom>
-          <a:noFill/>
-          <a:ln/>
-        </p:spPr>
-        <p:txBody>
-          <a:bodyPr wrap="square" lIns="0" tIns="0" rIns="0" bIns="0" rtlCol="0" anchor="ctr"/>
-          <a:lstStyle/>
-          <a:p>
-            <a:pPr algn="ctr" indent="0" marL="0">
-              <a:buNone/>
-            </a:pPr>
-            <a:r>
-              <a:rPr lang="en-US" sz="1600" b="1" dirty="0">
-                <a:solidFill>
-                  <a:schemeClr val="bg1"/>
-                </a:solidFill>
-              </a:rPr>
-              <a:t>3</a:t>
-            </a:r>
-            <a:endParaRPr lang="en-US" sz="1600" dirty="0"/>
-          </a:p>
-        </p:txBody>
-      </p:sp>
-      <p:sp>
-        <p:nvSpPr>
-          <p:cNvPr id="17" name="Text 14"/>
-          <p:cNvSpPr txBox="1"/>
-          <p:nvPr/>
-        </p:nvSpPr>
-        <p:spPr>
-          <a:xfrm>
-            <a:off x="1188720" y="2999232"/>
-            <a:ext cx="3108960" cy="320040"/>
-          </a:xfrm>
-          <a:prstGeom prst="rect">
-            <a:avLst/>
-          </a:prstGeom>
-          <a:noFill/>
-          <a:ln/>
-        </p:spPr>
-        <p:txBody>
-          <a:bodyPr wrap="square" lIns="0" tIns="0" rIns="0" bIns="0" rtlCol="0" anchor="t"/>
-          <a:lstStyle/>
-          <a:p>
-            <a:pPr indent="0" marL="0">
-              <a:buNone/>
-            </a:pPr>
-            <a:r>
-              <a:rPr lang="en-US" sz="1600" b="1" dirty="0">
-                <a:solidFill>
-                  <a:schemeClr val="tx2"/>
-                </a:solidFill>
-              </a:rPr>
-              <a:t>Procesar</a:t>
-            </a:r>
-            <a:endParaRPr lang="en-US" sz="1600" dirty="0"/>
-          </a:p>
-        </p:txBody>
-      </p:sp>
-      <p:sp>
-        <p:nvSpPr>
-          <p:cNvPr id="18" name="Text 15"/>
-          <p:cNvSpPr txBox="1"/>
-          <p:nvPr/>
-        </p:nvSpPr>
-        <p:spPr>
-          <a:xfrm>
-            <a:off x="1188720" y="3319272"/>
-            <a:ext cx="3108960" cy="274320"/>
-          </a:xfrm>
-          <a:prstGeom prst="rect">
-            <a:avLst/>
-          </a:prstGeom>
-          <a:noFill/>
-          <a:ln/>
-        </p:spPr>
-        <p:txBody>
-          <a:bodyPr wrap="square" lIns="0" tIns="0" rIns="0" bIns="0" rtlCol="0" anchor="t"/>
-          <a:lstStyle/>
-          <a:p>
-            <a:pPr indent="0" marL="0">
-              <a:buNone/>
-            </a:pPr>
-            <a:r>
-              <a:rPr lang="en-US" sz="1300" dirty="0">
-                <a:solidFill>
-                  <a:schemeClr val="accent6"/>
-                </a:solidFill>
-              </a:rPr>
-              <a:t>@Transactional</a:t>
-            </a:r>
-            <a:endParaRPr lang="en-US" sz="1300" dirty="0"/>
-          </a:p>
-        </p:txBody>
-      </p:sp>
-      <p:sp>
-        <p:nvSpPr>
-          <p:cNvPr id="19" name="flujo 4"/>
-          <p:cNvSpPr/>
-          <p:nvPr/>
-        </p:nvSpPr>
-        <p:spPr>
-          <a:xfrm>
-            <a:off x="457200" y="3794760"/>
-            <a:ext cx="3931920" cy="731520"/>
-          </a:xfrm>
-          <a:prstGeom prst="roundRect">
-            <a:avLst>
-              <a:gd name="adj" fmla="val 10000"/>
-            </a:avLst>
-          </a:prstGeom>
-          <a:solidFill>
-            <a:schemeClr val="bg2"/>
-          </a:solidFill>
-          <a:ln w="12700">
-            <a:solidFill>
-              <a:schemeClr val="bg2"/>
-            </a:solidFill>
-            <a:prstDash val="solid"/>
-          </a:ln>
-          <a:effectLst>
-            <a:outerShdw sx="100000" sy="100000" kx="0" ky="0" algn="bl" rotWithShape="0" blurRad="76200" dist="25400" dir="5400000">
-              <a:srgbClr val="000000">
-                <a:alpha val="12000"/>
-              </a:srgbClr>
-            </a:outerShdw>
-          </a:effectLst>
-        </p:spPr>
-      </p:sp>
-      <p:sp>
-        <p:nvSpPr>
-          <p:cNvPr id="20" name="insignia 4"/>
-          <p:cNvSpPr/>
-          <p:nvPr/>
-        </p:nvSpPr>
-        <p:spPr>
-          <a:xfrm>
-            <a:off x="594360" y="3950208"/>
-            <a:ext cx="420624" cy="420624"/>
-          </a:xfrm>
-          <a:prstGeom prst="ellipse">
-            <a:avLst/>
-          </a:prstGeom>
-          <a:solidFill>
-            <a:schemeClr val="accent1"/>
-          </a:solidFill>
-          <a:ln w="12700">
-            <a:solidFill>
-              <a:schemeClr val="accent1"/>
-            </a:solidFill>
-            <a:prstDash val="solid"/>
-          </a:ln>
-        </p:spPr>
-      </p:sp>
-      <p:sp>
-        <p:nvSpPr>
-          <p:cNvPr id="21" name="Text 18"/>
-          <p:cNvSpPr txBox="1"/>
-          <p:nvPr/>
-        </p:nvSpPr>
-        <p:spPr>
-          <a:xfrm>
-            <a:off x="594360" y="3950208"/>
-            <a:ext cx="420624" cy="420624"/>
-          </a:xfrm>
-          <a:prstGeom prst="rect">
-            <a:avLst/>
-          </a:prstGeom>
-          <a:noFill/>
-          <a:ln/>
-        </p:spPr>
-        <p:txBody>
-          <a:bodyPr wrap="square" lIns="0" tIns="0" rIns="0" bIns="0" rtlCol="0" anchor="ctr"/>
-          <a:lstStyle/>
-          <a:p>
-            <a:pPr algn="ctr" indent="0" marL="0">
-              <a:buNone/>
-            </a:pPr>
-            <a:r>
-              <a:rPr lang="en-US" sz="1600" b="1" dirty="0">
-                <a:solidFill>
-                  <a:schemeClr val="bg1"/>
-                </a:solidFill>
-              </a:rPr>
-              <a:t>4</a:t>
-            </a:r>
-            <a:endParaRPr lang="en-US" sz="1600" dirty="0"/>
-          </a:p>
-        </p:txBody>
-      </p:sp>
-      <p:sp>
-        <p:nvSpPr>
-          <p:cNvPr id="22" name="Text 19"/>
-          <p:cNvSpPr txBox="1"/>
-          <p:nvPr/>
-        </p:nvSpPr>
-        <p:spPr>
-          <a:xfrm>
-            <a:off x="1188720" y="3867912"/>
-            <a:ext cx="3108960" cy="320040"/>
-          </a:xfrm>
-          <a:prstGeom prst="rect">
-            <a:avLst/>
-          </a:prstGeom>
-          <a:noFill/>
-          <a:ln/>
-        </p:spPr>
-        <p:txBody>
-          <a:bodyPr wrap="square" lIns="0" tIns="0" rIns="0" bIns="0" rtlCol="0" anchor="t"/>
-          <a:lstStyle/>
-          <a:p>
-            <a:pPr indent="0" marL="0">
-              <a:buNone/>
-            </a:pPr>
-            <a:r>
-              <a:rPr lang="en-US" sz="1600" b="1" dirty="0">
-                <a:solidFill>
-                  <a:schemeClr val="tx2"/>
-                </a:solidFill>
-              </a:rPr>
-              <a:t>Recibo R-00000X</a:t>
-            </a:r>
-            <a:endParaRPr lang="en-US" sz="1600" dirty="0"/>
-          </a:p>
-        </p:txBody>
-      </p:sp>
-      <p:sp>
-        <p:nvSpPr>
-          <p:cNvPr id="23" name="Text 20"/>
-          <p:cNvSpPr txBox="1"/>
-          <p:nvPr/>
-        </p:nvSpPr>
-        <p:spPr>
-          <a:xfrm>
-            <a:off x="1188720" y="4187952"/>
-            <a:ext cx="3108960" cy="274320"/>
-          </a:xfrm>
-          <a:prstGeom prst="rect">
-            <a:avLst/>
-          </a:prstGeom>
-          <a:noFill/>
-          <a:ln/>
-        </p:spPr>
-        <p:txBody>
-          <a:bodyPr wrap="square" lIns="0" tIns="0" rIns="0" bIns="0" rtlCol="0" anchor="t"/>
-          <a:lstStyle/>
-          <a:p>
-            <a:pPr indent="0" marL="0">
-              <a:buNone/>
-            </a:pPr>
-            <a:r>
-              <a:rPr lang="en-US" sz="1300" dirty="0">
-                <a:solidFill>
-                  <a:schemeClr val="accent6"/>
-                </a:solidFill>
-              </a:rPr>
-              <a:t>correlativo único</a:t>
-            </a:r>
-            <a:endParaRPr lang="en-US" sz="1300" dirty="0"/>
-          </a:p>
-        </p:txBody>
-      </p:sp>
-      <p:pic>
-        <p:nvPicPr>
-          <p:cNvPr id="24" name="captura voucher" descr="captura voucher">    </p:cNvPr>
-          <p:cNvPicPr>
-            <a:picLocks noChangeAspect="1"/>
-          </p:cNvPicPr>
-          <p:nvPr/>
-        </p:nvPicPr>
-        <p:blipFill>
-          <a:blip r:embed="rId1"/>
-          <a:stretch>
-            <a:fillRect/>
-          </a:stretch>
-        </p:blipFill>
-        <p:spPr>
-          <a:xfrm>
-            <a:off x="4663440" y="1188720"/>
-            <a:ext cx="4023360" cy="2262035"/>
-          </a:xfrm>
-          <a:prstGeom prst="rect">
-            <a:avLst/>
-          </a:prstGeom>
-          <a:effectLst>
-            <a:outerShdw sx="100000" sy="100000" kx="0" ky="0" algn="bl" rotWithShape="0" blurRad="76200" dist="25400" dir="5400000">
-              <a:srgbClr val="000000">
-                <a:alpha val="12000"/>
-              </a:srgbClr>
-            </a:outerShdw>
-          </a:effectLst>
-        </p:spPr>
-      </p:pic>
-      <p:sp>
-        <p:nvSpPr>
-          <p:cNvPr id="25" name="Text 21"/>
+              <a:rPr lang="en-US" sz="1500" b="1" dirty="0">
+                <a:solidFill>
+                  <a:schemeClr val="accent1"/>
+                </a:solidFill>
+              </a:rPr>
+              <a:t>Socios: </a:t>
+            </a:r>
+            <a:pPr indent="0" marL="0">
+              <a:buNone/>
+            </a:pPr>
+            <a:r>
+              <a:rPr lang="en-US" sz="1500" dirty="0">
+                <a:solidFill>
+                  <a:schemeClr val="tx1"/>
+                </a:solidFill>
+              </a:rPr>
+              <a:t>GET, POST, PUT y DELETE sobre la base de datos.</a:t>
+            </a:r>
+            <a:endParaRPr lang="en-US" sz="1500" dirty="0"/>
+          </a:p>
+        </p:txBody>
+      </p:sp>
+      <p:sp>
+        <p:nvSpPr>
+          <p:cNvPr id="7" name="Text 2"/>
           <p:cNvSpPr txBox="1"/>
           <p:nvPr/>
         </p:nvSpPr>
@@ -4683,14 +4712,25 @@
               <a:buNone/>
             </a:pPr>
             <a:r>
-              <a:rPr lang="en-US" sz="1400" dirty="0">
+              <a:rPr lang="en-US" sz="1500" b="1" dirty="0">
+                <a:solidFill>
+                  <a:schemeClr val="accent1"/>
+                </a:solidFill>
+              </a:rPr>
+              <a:t>Cobranza: </a:t>
+            </a:r>
+            <a:pPr indent="0" marL="0">
+              <a:buNone/>
+            </a:pPr>
+            <a:r>
+              <a:rPr lang="en-US" sz="1500" dirty="0">
                 <a:solidFill>
                   <a:schemeClr val="tx1"/>
                 </a:solidFill>
               </a:rPr>
-              <a:t>Voucher del recibo con su correlativo; también para canje bancario e ingreso externo.</a:t>
-            </a:r>
-            <a:endParaRPr lang="en-US" sz="1400" dirty="0"/>
+              <a:t>búsqueda por socio o puesto, abonar o exonerar y total a pagar.</a:t>
+            </a:r>
+            <a:endParaRPr lang="en-US" sz="1500" dirty="0"/>
           </a:p>
         </p:txBody>
       </p:sp>
@@ -4799,15 +4839,683 @@
                 <a:ea typeface="Cambria" pitchFamily="34" charset="-122"/>
                 <a:cs typeface="Cambria" pitchFamily="34" charset="-120"/>
               </a:rPr>
-              <a:t>Egresos con carga masiva y reportes en Excel</a:t>
+              <a:t>Integridad: el pago se confirma completo</a:t>
             </a:r>
             <a:endParaRPr lang="en-US" sz="2800" dirty="0"/>
+          </a:p>
+        </p:txBody>
+      </p:sp>
+      <p:sp>
+        <p:nvSpPr>
+          <p:cNvPr id="4" name="flujo 1"/>
+          <p:cNvSpPr/>
+          <p:nvPr/>
+        </p:nvSpPr>
+        <p:spPr>
+          <a:xfrm>
+            <a:off x="457200" y="1188720"/>
+            <a:ext cx="3931920" cy="731520"/>
+          </a:xfrm>
+          <a:prstGeom prst="roundRect">
+            <a:avLst>
+              <a:gd name="adj" fmla="val 10000"/>
+            </a:avLst>
+          </a:prstGeom>
+          <a:solidFill>
+            <a:schemeClr val="bg2"/>
+          </a:solidFill>
+          <a:ln w="12700">
+            <a:solidFill>
+              <a:schemeClr val="bg2"/>
+            </a:solidFill>
+            <a:prstDash val="solid"/>
+          </a:ln>
+          <a:effectLst>
+            <a:outerShdw sx="100000" sy="100000" kx="0" ky="0" algn="bl" rotWithShape="0" blurRad="76200" dist="25400" dir="5400000">
+              <a:srgbClr val="000000">
+                <a:alpha val="12000"/>
+              </a:srgbClr>
+            </a:outerShdw>
+          </a:effectLst>
+        </p:spPr>
+      </p:sp>
+      <p:sp>
+        <p:nvSpPr>
+          <p:cNvPr id="5" name="insignia 1"/>
+          <p:cNvSpPr/>
+          <p:nvPr/>
+        </p:nvSpPr>
+        <p:spPr>
+          <a:xfrm>
+            <a:off x="594360" y="1344168"/>
+            <a:ext cx="420624" cy="420624"/>
+          </a:xfrm>
+          <a:prstGeom prst="ellipse">
+            <a:avLst/>
+          </a:prstGeom>
+          <a:solidFill>
+            <a:schemeClr val="accent1"/>
+          </a:solidFill>
+          <a:ln w="12700">
+            <a:solidFill>
+              <a:schemeClr val="accent1"/>
+            </a:solidFill>
+            <a:prstDash val="solid"/>
+          </a:ln>
+        </p:spPr>
+      </p:sp>
+      <p:sp>
+        <p:nvSpPr>
+          <p:cNvPr id="6" name="Text 3"/>
+          <p:cNvSpPr txBox="1"/>
+          <p:nvPr/>
+        </p:nvSpPr>
+        <p:spPr>
+          <a:xfrm>
+            <a:off x="594360" y="1344168"/>
+            <a:ext cx="420624" cy="420624"/>
+          </a:xfrm>
+          <a:prstGeom prst="rect">
+            <a:avLst/>
+          </a:prstGeom>
+          <a:noFill/>
+          <a:ln/>
+        </p:spPr>
+        <p:txBody>
+          <a:bodyPr wrap="square" lIns="0" tIns="0" rIns="0" bIns="0" rtlCol="0" anchor="ctr"/>
+          <a:lstStyle/>
+          <a:p>
+            <a:pPr algn="ctr" indent="0" marL="0">
+              <a:buNone/>
+            </a:pPr>
+            <a:r>
+              <a:rPr lang="en-US" sz="1600" b="1" dirty="0">
+                <a:solidFill>
+                  <a:schemeClr val="bg1"/>
+                </a:solidFill>
+              </a:rPr>
+              <a:t>1</a:t>
+            </a:r>
+            <a:endParaRPr lang="en-US" sz="1600" dirty="0"/>
+          </a:p>
+        </p:txBody>
+      </p:sp>
+      <p:sp>
+        <p:nvSpPr>
+          <p:cNvPr id="7" name="Text 4"/>
+          <p:cNvSpPr txBox="1"/>
+          <p:nvPr/>
+        </p:nvSpPr>
+        <p:spPr>
+          <a:xfrm>
+            <a:off x="1188720" y="1261872"/>
+            <a:ext cx="3108960" cy="320040"/>
+          </a:xfrm>
+          <a:prstGeom prst="rect">
+            <a:avLst/>
+          </a:prstGeom>
+          <a:noFill/>
+          <a:ln/>
+        </p:spPr>
+        <p:txBody>
+          <a:bodyPr wrap="square" lIns="0" tIns="0" rIns="0" bIns="0" rtlCol="0" anchor="t"/>
+          <a:lstStyle/>
+          <a:p>
+            <a:pPr indent="0" marL="0">
+              <a:buNone/>
+            </a:pPr>
+            <a:r>
+              <a:rPr lang="en-US" sz="1600" b="1" dirty="0">
+                <a:solidFill>
+                  <a:schemeClr val="tx2"/>
+                </a:solidFill>
+              </a:rPr>
+              <a:t>Cuentas pendientes</a:t>
+            </a:r>
+            <a:endParaRPr lang="en-US" sz="1600" dirty="0"/>
+          </a:p>
+        </p:txBody>
+      </p:sp>
+      <p:sp>
+        <p:nvSpPr>
+          <p:cNvPr id="8" name="Text 5"/>
+          <p:cNvSpPr txBox="1"/>
+          <p:nvPr/>
+        </p:nvSpPr>
+        <p:spPr>
+          <a:xfrm>
+            <a:off x="1188720" y="1581912"/>
+            <a:ext cx="3108960" cy="274320"/>
+          </a:xfrm>
+          <a:prstGeom prst="rect">
+            <a:avLst/>
+          </a:prstGeom>
+          <a:noFill/>
+          <a:ln/>
+        </p:spPr>
+        <p:txBody>
+          <a:bodyPr wrap="square" lIns="0" tIns="0" rIns="0" bIns="0" rtlCol="0" anchor="t"/>
+          <a:lstStyle/>
+          <a:p>
+            <a:pPr indent="0" marL="0">
+              <a:buNone/>
+            </a:pPr>
+            <a:r>
+              <a:rPr lang="en-US" sz="1300" dirty="0">
+                <a:solidFill>
+                  <a:schemeClr val="accent6"/>
+                </a:solidFill>
+              </a:rPr>
+              <a:t>por socio o puesto</a:t>
+            </a:r>
+            <a:endParaRPr lang="en-US" sz="1300" dirty="0"/>
+          </a:p>
+        </p:txBody>
+      </p:sp>
+      <p:sp>
+        <p:nvSpPr>
+          <p:cNvPr id="9" name="flujo 2"/>
+          <p:cNvSpPr/>
+          <p:nvPr/>
+        </p:nvSpPr>
+        <p:spPr>
+          <a:xfrm>
+            <a:off x="457200" y="2057400"/>
+            <a:ext cx="3931920" cy="731520"/>
+          </a:xfrm>
+          <a:prstGeom prst="roundRect">
+            <a:avLst>
+              <a:gd name="adj" fmla="val 10000"/>
+            </a:avLst>
+          </a:prstGeom>
+          <a:solidFill>
+            <a:schemeClr val="bg2"/>
+          </a:solidFill>
+          <a:ln w="12700">
+            <a:solidFill>
+              <a:schemeClr val="bg2"/>
+            </a:solidFill>
+            <a:prstDash val="solid"/>
+          </a:ln>
+          <a:effectLst>
+            <a:outerShdw sx="100000" sy="100000" kx="0" ky="0" algn="bl" rotWithShape="0" blurRad="76200" dist="25400" dir="5400000">
+              <a:srgbClr val="000000">
+                <a:alpha val="12000"/>
+              </a:srgbClr>
+            </a:outerShdw>
+          </a:effectLst>
+        </p:spPr>
+      </p:sp>
+      <p:sp>
+        <p:nvSpPr>
+          <p:cNvPr id="10" name="insignia 2"/>
+          <p:cNvSpPr/>
+          <p:nvPr/>
+        </p:nvSpPr>
+        <p:spPr>
+          <a:xfrm>
+            <a:off x="594360" y="2212848"/>
+            <a:ext cx="420624" cy="420624"/>
+          </a:xfrm>
+          <a:prstGeom prst="ellipse">
+            <a:avLst/>
+          </a:prstGeom>
+          <a:solidFill>
+            <a:schemeClr val="accent1"/>
+          </a:solidFill>
+          <a:ln w="12700">
+            <a:solidFill>
+              <a:schemeClr val="accent1"/>
+            </a:solidFill>
+            <a:prstDash val="solid"/>
+          </a:ln>
+        </p:spPr>
+      </p:sp>
+      <p:sp>
+        <p:nvSpPr>
+          <p:cNvPr id="11" name="Text 8"/>
+          <p:cNvSpPr txBox="1"/>
+          <p:nvPr/>
+        </p:nvSpPr>
+        <p:spPr>
+          <a:xfrm>
+            <a:off x="594360" y="2212848"/>
+            <a:ext cx="420624" cy="420624"/>
+          </a:xfrm>
+          <a:prstGeom prst="rect">
+            <a:avLst/>
+          </a:prstGeom>
+          <a:noFill/>
+          <a:ln/>
+        </p:spPr>
+        <p:txBody>
+          <a:bodyPr wrap="square" lIns="0" tIns="0" rIns="0" bIns="0" rtlCol="0" anchor="ctr"/>
+          <a:lstStyle/>
+          <a:p>
+            <a:pPr algn="ctr" indent="0" marL="0">
+              <a:buNone/>
+            </a:pPr>
+            <a:r>
+              <a:rPr lang="en-US" sz="1600" b="1" dirty="0">
+                <a:solidFill>
+                  <a:schemeClr val="bg1"/>
+                </a:solidFill>
+              </a:rPr>
+              <a:t>2</a:t>
+            </a:r>
+            <a:endParaRPr lang="en-US" sz="1600" dirty="0"/>
+          </a:p>
+        </p:txBody>
+      </p:sp>
+      <p:sp>
+        <p:nvSpPr>
+          <p:cNvPr id="12" name="Text 9"/>
+          <p:cNvSpPr txBox="1"/>
+          <p:nvPr/>
+        </p:nvSpPr>
+        <p:spPr>
+          <a:xfrm>
+            <a:off x="1188720" y="2130552"/>
+            <a:ext cx="3108960" cy="320040"/>
+          </a:xfrm>
+          <a:prstGeom prst="rect">
+            <a:avLst/>
+          </a:prstGeom>
+          <a:noFill/>
+          <a:ln/>
+        </p:spPr>
+        <p:txBody>
+          <a:bodyPr wrap="square" lIns="0" tIns="0" rIns="0" bIns="0" rtlCol="0" anchor="t"/>
+          <a:lstStyle/>
+          <a:p>
+            <a:pPr indent="0" marL="0">
+              <a:buNone/>
+            </a:pPr>
+            <a:r>
+              <a:rPr lang="en-US" sz="1600" b="1" dirty="0">
+                <a:solidFill>
+                  <a:schemeClr val="tx2"/>
+                </a:solidFill>
+              </a:rPr>
+              <a:t>Abonar o exonerar</a:t>
+            </a:r>
+            <a:endParaRPr lang="en-US" sz="1600" dirty="0"/>
+          </a:p>
+        </p:txBody>
+      </p:sp>
+      <p:sp>
+        <p:nvSpPr>
+          <p:cNvPr id="13" name="Text 10"/>
+          <p:cNvSpPr txBox="1"/>
+          <p:nvPr/>
+        </p:nvSpPr>
+        <p:spPr>
+          <a:xfrm>
+            <a:off x="1188720" y="2450592"/>
+            <a:ext cx="3108960" cy="274320"/>
+          </a:xfrm>
+          <a:prstGeom prst="rect">
+            <a:avLst/>
+          </a:prstGeom>
+          <a:noFill/>
+          <a:ln/>
+        </p:spPr>
+        <p:txBody>
+          <a:bodyPr wrap="square" lIns="0" tIns="0" rIns="0" bIns="0" rtlCol="0" anchor="t"/>
+          <a:lstStyle/>
+          <a:p>
+            <a:pPr indent="0" marL="0">
+              <a:buNone/>
+            </a:pPr>
+            <a:r>
+              <a:rPr lang="en-US" sz="1300" dirty="0">
+                <a:solidFill>
+                  <a:schemeClr val="accent6"/>
+                </a:solidFill>
+              </a:rPr>
+              <a:t>se calcula el total</a:t>
+            </a:r>
+            <a:endParaRPr lang="en-US" sz="1300" dirty="0"/>
+          </a:p>
+        </p:txBody>
+      </p:sp>
+      <p:sp>
+        <p:nvSpPr>
+          <p:cNvPr id="14" name="flujo 3"/>
+          <p:cNvSpPr/>
+          <p:nvPr/>
+        </p:nvSpPr>
+        <p:spPr>
+          <a:xfrm>
+            <a:off x="457200" y="2926080"/>
+            <a:ext cx="3931920" cy="731520"/>
+          </a:xfrm>
+          <a:prstGeom prst="roundRect">
+            <a:avLst>
+              <a:gd name="adj" fmla="val 10000"/>
+            </a:avLst>
+          </a:prstGeom>
+          <a:solidFill>
+            <a:schemeClr val="bg2"/>
+          </a:solidFill>
+          <a:ln w="12700">
+            <a:solidFill>
+              <a:schemeClr val="bg2"/>
+            </a:solidFill>
+            <a:prstDash val="solid"/>
+          </a:ln>
+          <a:effectLst>
+            <a:outerShdw sx="100000" sy="100000" kx="0" ky="0" algn="bl" rotWithShape="0" blurRad="76200" dist="25400" dir="5400000">
+              <a:srgbClr val="000000">
+                <a:alpha val="12000"/>
+              </a:srgbClr>
+            </a:outerShdw>
+          </a:effectLst>
+        </p:spPr>
+      </p:sp>
+      <p:sp>
+        <p:nvSpPr>
+          <p:cNvPr id="15" name="insignia 3"/>
+          <p:cNvSpPr/>
+          <p:nvPr/>
+        </p:nvSpPr>
+        <p:spPr>
+          <a:xfrm>
+            <a:off x="594360" y="3081528"/>
+            <a:ext cx="420624" cy="420624"/>
+          </a:xfrm>
+          <a:prstGeom prst="ellipse">
+            <a:avLst/>
+          </a:prstGeom>
+          <a:solidFill>
+            <a:schemeClr val="accent1"/>
+          </a:solidFill>
+          <a:ln w="12700">
+            <a:solidFill>
+              <a:schemeClr val="accent1"/>
+            </a:solidFill>
+            <a:prstDash val="solid"/>
+          </a:ln>
+        </p:spPr>
+      </p:sp>
+      <p:sp>
+        <p:nvSpPr>
+          <p:cNvPr id="16" name="Text 13"/>
+          <p:cNvSpPr txBox="1"/>
+          <p:nvPr/>
+        </p:nvSpPr>
+        <p:spPr>
+          <a:xfrm>
+            <a:off x="594360" y="3081528"/>
+            <a:ext cx="420624" cy="420624"/>
+          </a:xfrm>
+          <a:prstGeom prst="rect">
+            <a:avLst/>
+          </a:prstGeom>
+          <a:noFill/>
+          <a:ln/>
+        </p:spPr>
+        <p:txBody>
+          <a:bodyPr wrap="square" lIns="0" tIns="0" rIns="0" bIns="0" rtlCol="0" anchor="ctr"/>
+          <a:lstStyle/>
+          <a:p>
+            <a:pPr algn="ctr" indent="0" marL="0">
+              <a:buNone/>
+            </a:pPr>
+            <a:r>
+              <a:rPr lang="en-US" sz="1600" b="1" dirty="0">
+                <a:solidFill>
+                  <a:schemeClr val="bg1"/>
+                </a:solidFill>
+              </a:rPr>
+              <a:t>3</a:t>
+            </a:r>
+            <a:endParaRPr lang="en-US" sz="1600" dirty="0"/>
+          </a:p>
+        </p:txBody>
+      </p:sp>
+      <p:sp>
+        <p:nvSpPr>
+          <p:cNvPr id="17" name="Text 14"/>
+          <p:cNvSpPr txBox="1"/>
+          <p:nvPr/>
+        </p:nvSpPr>
+        <p:spPr>
+          <a:xfrm>
+            <a:off x="1188720" y="2999232"/>
+            <a:ext cx="3108960" cy="320040"/>
+          </a:xfrm>
+          <a:prstGeom prst="rect">
+            <a:avLst/>
+          </a:prstGeom>
+          <a:noFill/>
+          <a:ln/>
+        </p:spPr>
+        <p:txBody>
+          <a:bodyPr wrap="square" lIns="0" tIns="0" rIns="0" bIns="0" rtlCol="0" anchor="t"/>
+          <a:lstStyle/>
+          <a:p>
+            <a:pPr indent="0" marL="0">
+              <a:buNone/>
+            </a:pPr>
+            <a:r>
+              <a:rPr lang="en-US" sz="1600" b="1" dirty="0">
+                <a:solidFill>
+                  <a:schemeClr val="tx2"/>
+                </a:solidFill>
+              </a:rPr>
+              <a:t>Procesar</a:t>
+            </a:r>
+            <a:endParaRPr lang="en-US" sz="1600" dirty="0"/>
+          </a:p>
+        </p:txBody>
+      </p:sp>
+      <p:sp>
+        <p:nvSpPr>
+          <p:cNvPr id="18" name="Text 15"/>
+          <p:cNvSpPr txBox="1"/>
+          <p:nvPr/>
+        </p:nvSpPr>
+        <p:spPr>
+          <a:xfrm>
+            <a:off x="1188720" y="3319272"/>
+            <a:ext cx="3108960" cy="274320"/>
+          </a:xfrm>
+          <a:prstGeom prst="rect">
+            <a:avLst/>
+          </a:prstGeom>
+          <a:noFill/>
+          <a:ln/>
+        </p:spPr>
+        <p:txBody>
+          <a:bodyPr wrap="square" lIns="0" tIns="0" rIns="0" bIns="0" rtlCol="0" anchor="t"/>
+          <a:lstStyle/>
+          <a:p>
+            <a:pPr indent="0" marL="0">
+              <a:buNone/>
+            </a:pPr>
+            <a:r>
+              <a:rPr lang="en-US" sz="1300" dirty="0">
+                <a:solidFill>
+                  <a:schemeClr val="accent6"/>
+                </a:solidFill>
+              </a:rPr>
+              <a:t>@Transactional</a:t>
+            </a:r>
+            <a:endParaRPr lang="en-US" sz="1300" dirty="0"/>
+          </a:p>
+        </p:txBody>
+      </p:sp>
+      <p:sp>
+        <p:nvSpPr>
+          <p:cNvPr id="19" name="flujo 4"/>
+          <p:cNvSpPr/>
+          <p:nvPr/>
+        </p:nvSpPr>
+        <p:spPr>
+          <a:xfrm>
+            <a:off x="457200" y="3794760"/>
+            <a:ext cx="3931920" cy="731520"/>
+          </a:xfrm>
+          <a:prstGeom prst="roundRect">
+            <a:avLst>
+              <a:gd name="adj" fmla="val 10000"/>
+            </a:avLst>
+          </a:prstGeom>
+          <a:solidFill>
+            <a:schemeClr val="bg2"/>
+          </a:solidFill>
+          <a:ln w="12700">
+            <a:solidFill>
+              <a:schemeClr val="bg2"/>
+            </a:solidFill>
+            <a:prstDash val="solid"/>
+          </a:ln>
+          <a:effectLst>
+            <a:outerShdw sx="100000" sy="100000" kx="0" ky="0" algn="bl" rotWithShape="0" blurRad="76200" dist="25400" dir="5400000">
+              <a:srgbClr val="000000">
+                <a:alpha val="12000"/>
+              </a:srgbClr>
+            </a:outerShdw>
+          </a:effectLst>
+        </p:spPr>
+      </p:sp>
+      <p:sp>
+        <p:nvSpPr>
+          <p:cNvPr id="20" name="insignia 4"/>
+          <p:cNvSpPr/>
+          <p:nvPr/>
+        </p:nvSpPr>
+        <p:spPr>
+          <a:xfrm>
+            <a:off x="594360" y="3950208"/>
+            <a:ext cx="420624" cy="420624"/>
+          </a:xfrm>
+          <a:prstGeom prst="ellipse">
+            <a:avLst/>
+          </a:prstGeom>
+          <a:solidFill>
+            <a:schemeClr val="accent1"/>
+          </a:solidFill>
+          <a:ln w="12700">
+            <a:solidFill>
+              <a:schemeClr val="accent1"/>
+            </a:solidFill>
+            <a:prstDash val="solid"/>
+          </a:ln>
+        </p:spPr>
+      </p:sp>
+      <p:sp>
+        <p:nvSpPr>
+          <p:cNvPr id="21" name="Text 18"/>
+          <p:cNvSpPr txBox="1"/>
+          <p:nvPr/>
+        </p:nvSpPr>
+        <p:spPr>
+          <a:xfrm>
+            <a:off x="594360" y="3950208"/>
+            <a:ext cx="420624" cy="420624"/>
+          </a:xfrm>
+          <a:prstGeom prst="rect">
+            <a:avLst/>
+          </a:prstGeom>
+          <a:noFill/>
+          <a:ln/>
+        </p:spPr>
+        <p:txBody>
+          <a:bodyPr wrap="square" lIns="0" tIns="0" rIns="0" bIns="0" rtlCol="0" anchor="ctr"/>
+          <a:lstStyle/>
+          <a:p>
+            <a:pPr algn="ctr" indent="0" marL="0">
+              <a:buNone/>
+            </a:pPr>
+            <a:r>
+              <a:rPr lang="en-US" sz="1600" b="1" dirty="0">
+                <a:solidFill>
+                  <a:schemeClr val="bg1"/>
+                </a:solidFill>
+              </a:rPr>
+              <a:t>4</a:t>
+            </a:r>
+            <a:endParaRPr lang="en-US" sz="1600" dirty="0"/>
+          </a:p>
+        </p:txBody>
+      </p:sp>
+      <p:sp>
+        <p:nvSpPr>
+          <p:cNvPr id="22" name="Text 19"/>
+          <p:cNvSpPr txBox="1"/>
+          <p:nvPr/>
+        </p:nvSpPr>
+        <p:spPr>
+          <a:xfrm>
+            <a:off x="1188720" y="3867912"/>
+            <a:ext cx="3108960" cy="320040"/>
+          </a:xfrm>
+          <a:prstGeom prst="rect">
+            <a:avLst/>
+          </a:prstGeom>
+          <a:noFill/>
+          <a:ln/>
+        </p:spPr>
+        <p:txBody>
+          <a:bodyPr wrap="square" lIns="0" tIns="0" rIns="0" bIns="0" rtlCol="0" anchor="t"/>
+          <a:lstStyle/>
+          <a:p>
+            <a:pPr indent="0" marL="0">
+              <a:buNone/>
+            </a:pPr>
+            <a:r>
+              <a:rPr lang="en-US" sz="1600" b="1" dirty="0">
+                <a:solidFill>
+                  <a:schemeClr val="tx2"/>
+                </a:solidFill>
+              </a:rPr>
+              <a:t>Recibo R-00000X</a:t>
+            </a:r>
+            <a:endParaRPr lang="en-US" sz="1600" dirty="0"/>
+          </a:p>
+        </p:txBody>
+      </p:sp>
+      <p:sp>
+        <p:nvSpPr>
+          <p:cNvPr id="23" name="Text 20"/>
+          <p:cNvSpPr txBox="1"/>
+          <p:nvPr/>
+        </p:nvSpPr>
+        <p:spPr>
+          <a:xfrm>
+            <a:off x="1188720" y="4187952"/>
+            <a:ext cx="3108960" cy="274320"/>
+          </a:xfrm>
+          <a:prstGeom prst="rect">
+            <a:avLst/>
+          </a:prstGeom>
+          <a:noFill/>
+          <a:ln/>
+        </p:spPr>
+        <p:txBody>
+          <a:bodyPr wrap="square" lIns="0" tIns="0" rIns="0" bIns="0" rtlCol="0" anchor="t"/>
+          <a:lstStyle/>
+          <a:p>
+            <a:pPr indent="0" marL="0">
+              <a:buNone/>
+            </a:pPr>
+            <a:r>
+              <a:rPr lang="en-US" sz="1300" dirty="0">
+                <a:solidFill>
+                  <a:schemeClr val="accent6"/>
+                </a:solidFill>
+              </a:rPr>
+              <a:t>correlativo único</a:t>
+            </a:r>
+            <a:endParaRPr lang="en-US" sz="1300" dirty="0"/>
           </a:p>
         </p:txBody>
       </p:sp>
       <p:pic>
         <p:nvPicPr>
-          <p:cNvPr id="4" name="captura carga masiva" descr="captura carga masiva">    </p:cNvPr>
+          <p:cNvPr id="24" name="captura voucher" descr="captura voucher">    </p:cNvPr>
           <p:cNvPicPr>
             <a:picLocks noChangeAspect="1"/>
           </p:cNvPicPr>
@@ -4821,7 +5529,7 @@
         </p:blipFill>
         <p:spPr>
           <a:xfrm>
-            <a:off x="457200" y="1188720"/>
+            <a:off x="4663440" y="1188720"/>
             <a:ext cx="4023360" cy="2262035"/>
           </a:xfrm>
           <a:prstGeom prst="rect">
@@ -4836,87 +5544,9 @@
           </a:effectLst>
         </p:spPr>
       </p:pic>
-      <p:pic>
-        <p:nvPicPr>
-          <p:cNvPr id="5" name="captura reportes" descr="captura reportes">    </p:cNvPr>
-          <p:cNvPicPr>
-            <a:picLocks noChangeAspect="1"/>
-          </p:cNvPicPr>
-          <p:nvPr/>
-        </p:nvPicPr>
-        <p:blipFill>
-          <a:blip r:embed="rId2"/>
-          <a:stretch>
-            <a:fillRect/>
-          </a:stretch>
-        </p:blipFill>
-        <p:spPr>
-          <a:xfrm>
-            <a:off x="4663440" y="1188720"/>
-            <a:ext cx="4023360" cy="2262035"/>
-          </a:xfrm>
-          <a:prstGeom prst="rect">
-            <a:avLst/>
-          </a:prstGeom>
-          <a:effectLst>
-            <a:outerShdw sx="100000" sy="100000" kx="0" ky="0" algn="bl" rotWithShape="0" blurRad="76200" dist="25400" dir="5400000">
-              <a:srgbClr val="000000">
-                <a:alpha val="12000"/>
-              </a:srgbClr>
-            </a:outerShdw>
-          </a:effectLst>
-        </p:spPr>
-      </p:pic>
-      <p:sp>
-        <p:nvSpPr>
-          <p:cNvPr id="6" name="Text 1"/>
-          <p:cNvSpPr txBox="1"/>
-          <p:nvPr/>
-        </p:nvSpPr>
-        <p:spPr>
-          <a:xfrm>
-            <a:off x="457200" y="3611880"/>
-            <a:ext cx="4023360" cy="822960"/>
-          </a:xfrm>
-          <a:prstGeom prst="rect">
-            <a:avLst/>
-          </a:prstGeom>
-          <a:noFill/>
-          <a:ln/>
-        </p:spPr>
-        <p:txBody>
-          <a:bodyPr wrap="square" lIns="0" tIns="0" rIns="0" bIns="0" rtlCol="0" anchor="t"/>
-          <a:lstStyle/>
-          <a:p>
-            <a:pPr indent="0" marL="0">
-              <a:buNone/>
-            </a:pPr>
-            <a:r>
-              <a:rPr lang="en-US" sz="1500" b="1" dirty="0">
-                <a:solidFill>
-                  <a:schemeClr val="accent1"/>
-                </a:solidFill>
-              </a:rPr>
-              <a:t>Carga masiva: </a:t>
-            </a:r>
-            <a:pPr indent="0" marL="0">
-              <a:buNone/>
-            </a:pPr>
-            <a:r>
-              <a:rPr lang="en-US" sz="1500" dirty="0">
-                <a:solidFill>
-                  <a:schemeClr val="tx1"/>
-                </a:solidFill>
-              </a:rPr>
-              <a:t>las filas válidas se registran y las inválidas se reportan.</a:t>
-            </a:r>
-            <a:endParaRPr lang="en-US" sz="1500" dirty="0"/>
-          </a:p>
-        </p:txBody>
-      </p:sp>
-      <p:sp>
-        <p:nvSpPr>
-          <p:cNvPr id="7" name="Text 2"/>
+      <p:sp>
+        <p:nvSpPr>
+          <p:cNvPr id="25" name="Text 21"/>
           <p:cNvSpPr txBox="1"/>
           <p:nvPr/>
         </p:nvSpPr>
@@ -4939,25 +5569,14 @@
               <a:buNone/>
             </a:pPr>
             <a:r>
-              <a:rPr lang="en-US" sz="1500" b="1" dirty="0">
-                <a:solidFill>
-                  <a:schemeClr val="accent1"/>
-                </a:solidFill>
-              </a:rPr>
-              <a:t>Reportes: </a:t>
-            </a:r>
-            <a:pPr indent="0" marL="0">
-              <a:buNone/>
-            </a:pPr>
-            <a:r>
-              <a:rPr lang="en-US" sz="1500" dirty="0">
+              <a:rPr lang="en-US" sz="1400" dirty="0">
                 <a:solidFill>
                   <a:schemeClr val="tx1"/>
                 </a:solidFill>
               </a:rPr>
-              <a:t>seis descargas XLSX con rango de fechas.</a:t>
-            </a:r>
-            <a:endParaRPr lang="en-US" sz="1500" dirty="0"/>
+              <a:t>Voucher del recibo con su correlativo; también para canje bancario e ingreso externo.</a:t>
+            </a:r>
+            <a:endParaRPr lang="en-US" sz="1400" dirty="0"/>
           </a:p>
         </p:txBody>
       </p:sp>
@@ -5066,37 +5685,34 @@
                 <a:ea typeface="Cambria" pitchFamily="34" charset="-122"/>
                 <a:cs typeface="Cambria" pitchFamily="34" charset="-120"/>
               </a:rPr>
-              <a:t>Calidad: 260 pruebas automatizadas en verde</a:t>
+              <a:t>Egresos con carga masiva y reportes en Excel</a:t>
             </a:r>
             <a:endParaRPr lang="en-US" sz="2800" dirty="0"/>
           </a:p>
         </p:txBody>
       </p:sp>
-      <p:sp>
-        <p:nvSpPr>
-          <p:cNvPr id="4" name="pruebas backend"/>
-          <p:cNvSpPr/>
-          <p:nvPr/>
-        </p:nvSpPr>
+      <p:pic>
+        <p:nvPicPr>
+          <p:cNvPr id="4" name="captura carga masiva" descr="captura carga masiva">    </p:cNvPr>
+          <p:cNvPicPr>
+            <a:picLocks noChangeAspect="1"/>
+          </p:cNvPicPr>
+          <p:nvPr/>
+        </p:nvPicPr>
+        <p:blipFill>
+          <a:blip r:embed="rId1"/>
+          <a:stretch>
+            <a:fillRect/>
+          </a:stretch>
+        </p:blipFill>
         <p:spPr>
           <a:xfrm>
             <a:off x="457200" y="1188720"/>
-            <a:ext cx="2651760" cy="1737360"/>
-          </a:xfrm>
-          <a:prstGeom prst="roundRect">
-            <a:avLst>
-              <a:gd name="adj" fmla="val 4211"/>
-            </a:avLst>
-          </a:prstGeom>
-          <a:solidFill>
-            <a:schemeClr val="bg2"/>
-          </a:solidFill>
-          <a:ln w="12700">
-            <a:solidFill>
-              <a:schemeClr val="bg2"/>
-            </a:solidFill>
-            <a:prstDash val="solid"/>
-          </a:ln>
+            <a:ext cx="4023360" cy="2262035"/>
+          </a:xfrm>
+          <a:prstGeom prst="rect">
+            <a:avLst/>
+          </a:prstGeom>
           <a:effectLst>
             <a:outerShdw sx="100000" sy="100000" kx="0" ky="0" algn="bl" rotWithShape="0" blurRad="76200" dist="25400" dir="5400000">
               <a:srgbClr val="000000">
@@ -5105,143 +5721,29 @@
             </a:outerShdw>
           </a:effectLst>
         </p:spPr>
-      </p:sp>
-      <p:sp>
-        <p:nvSpPr>
-          <p:cNvPr id="5" name="Text 2"/>
-          <p:cNvSpPr txBox="1"/>
-          <p:nvPr/>
-        </p:nvSpPr>
-        <p:spPr>
-          <a:xfrm>
-            <a:off x="640080" y="1234440"/>
-            <a:ext cx="2286000" cy="822960"/>
-          </a:xfrm>
-          <a:prstGeom prst="rect">
-            <a:avLst/>
-          </a:prstGeom>
-          <a:noFill/>
-          <a:ln/>
-        </p:spPr>
-        <p:txBody>
-          <a:bodyPr wrap="square" lIns="0" tIns="0" rIns="0" bIns="0" rtlCol="0" anchor="ctr"/>
-          <a:lstStyle/>
-          <a:p>
-            <a:pPr indent="0" marL="0">
-              <a:buNone/>
-            </a:pPr>
-            <a:r>
-              <a:rPr lang="en-US" sz="4400" b="1" dirty="0">
-                <a:solidFill>
-                  <a:schemeClr val="accent1"/>
-                </a:solidFill>
-                <a:latin typeface="Cambria" pitchFamily="34" charset="0"/>
-                <a:ea typeface="Cambria" pitchFamily="34" charset="-122"/>
-                <a:cs typeface="Cambria" pitchFamily="34" charset="-120"/>
-              </a:rPr>
-              <a:t>141</a:t>
-            </a:r>
-            <a:endParaRPr lang="en-US" sz="4400" dirty="0"/>
-          </a:p>
-        </p:txBody>
-      </p:sp>
-      <p:sp>
-        <p:nvSpPr>
-          <p:cNvPr id="6" name="Text 3"/>
-          <p:cNvSpPr txBox="1"/>
-          <p:nvPr/>
-        </p:nvSpPr>
-        <p:spPr>
-          <a:xfrm>
-            <a:off x="640080" y="2103120"/>
-            <a:ext cx="2286000" cy="320040"/>
-          </a:xfrm>
-          <a:prstGeom prst="rect">
-            <a:avLst/>
-          </a:prstGeom>
-          <a:noFill/>
-          <a:ln/>
-        </p:spPr>
-        <p:txBody>
-          <a:bodyPr wrap="square" lIns="0" tIns="0" rIns="0" bIns="0" rtlCol="0" anchor="t"/>
-          <a:lstStyle/>
-          <a:p>
-            <a:pPr indent="0" marL="0">
-              <a:buNone/>
-            </a:pPr>
-            <a:r>
-              <a:rPr lang="en-US" sz="1600" b="1" dirty="0">
-                <a:solidFill>
-                  <a:schemeClr val="tx2"/>
-                </a:solidFill>
-              </a:rPr>
-              <a:t>backend</a:t>
-            </a:r>
-            <a:endParaRPr lang="en-US" sz="1600" dirty="0"/>
-          </a:p>
-        </p:txBody>
-      </p:sp>
-      <p:sp>
-        <p:nvSpPr>
-          <p:cNvPr id="7" name="Text 4"/>
-          <p:cNvSpPr txBox="1"/>
-          <p:nvPr/>
-        </p:nvSpPr>
-        <p:spPr>
-          <a:xfrm>
-            <a:off x="640080" y="2468880"/>
-            <a:ext cx="2286000" cy="274320"/>
-          </a:xfrm>
-          <a:prstGeom prst="rect">
-            <a:avLst/>
-          </a:prstGeom>
-          <a:noFill/>
-          <a:ln/>
-        </p:spPr>
-        <p:txBody>
-          <a:bodyPr wrap="square" lIns="0" tIns="0" rIns="0" bIns="0" rtlCol="0" anchor="t"/>
-          <a:lstStyle/>
-          <a:p>
-            <a:pPr indent="0" marL="0">
-              <a:buNone/>
-            </a:pPr>
-            <a:r>
-              <a:rPr lang="en-US" sz="1300" dirty="0">
-                <a:solidFill>
-                  <a:schemeClr val="accent6"/>
-                </a:solidFill>
-              </a:rPr>
-              <a:t>JUnit, Mockito, MockMvc</a:t>
-            </a:r>
-            <a:endParaRPr lang="en-US" sz="1300" dirty="0"/>
-          </a:p>
-        </p:txBody>
-      </p:sp>
-      <p:sp>
-        <p:nvSpPr>
-          <p:cNvPr id="8" name="pruebas frontend"/>
-          <p:cNvSpPr/>
-          <p:nvPr/>
-        </p:nvSpPr>
-        <p:spPr>
-          <a:xfrm>
-            <a:off x="3246120" y="1188720"/>
-            <a:ext cx="2651760" cy="1737360"/>
-          </a:xfrm>
-          <a:prstGeom prst="roundRect">
-            <a:avLst>
-              <a:gd name="adj" fmla="val 4211"/>
-            </a:avLst>
-          </a:prstGeom>
-          <a:solidFill>
-            <a:schemeClr val="bg2"/>
-          </a:solidFill>
-          <a:ln w="12700">
-            <a:solidFill>
-              <a:schemeClr val="bg2"/>
-            </a:solidFill>
-            <a:prstDash val="solid"/>
-          </a:ln>
+      </p:pic>
+      <p:pic>
+        <p:nvPicPr>
+          <p:cNvPr id="5" name="captura reportes" descr="captura reportes">    </p:cNvPr>
+          <p:cNvPicPr>
+            <a:picLocks noChangeAspect="1"/>
+          </p:cNvPicPr>
+          <p:nvPr/>
+        </p:nvPicPr>
+        <p:blipFill>
+          <a:blip r:embed="rId2"/>
+          <a:stretch>
+            <a:fillRect/>
+          </a:stretch>
+        </p:blipFill>
+        <p:spPr>
+          <a:xfrm>
+            <a:off x="4663440" y="1188720"/>
+            <a:ext cx="4023360" cy="2262035"/>
+          </a:xfrm>
+          <a:prstGeom prst="rect">
+            <a:avLst/>
+          </a:prstGeom>
           <a:effectLst>
             <a:outerShdw sx="100000" sy="100000" kx="0" ky="0" algn="bl" rotWithShape="0" blurRad="76200" dist="25400" dir="5400000">
               <a:srgbClr val="000000">
@@ -5250,56 +5752,64 @@
             </a:outerShdw>
           </a:effectLst>
         </p:spPr>
-      </p:sp>
-      <p:sp>
-        <p:nvSpPr>
-          <p:cNvPr id="9" name="Text 6"/>
-          <p:cNvSpPr txBox="1"/>
-          <p:nvPr/>
-        </p:nvSpPr>
-        <p:spPr>
-          <a:xfrm>
-            <a:off x="3429000" y="1234440"/>
-            <a:ext cx="2286000" cy="822960"/>
-          </a:xfrm>
-          <a:prstGeom prst="rect">
-            <a:avLst/>
-          </a:prstGeom>
-          <a:noFill/>
-          <a:ln/>
-        </p:spPr>
-        <p:txBody>
-          <a:bodyPr wrap="square" lIns="0" tIns="0" rIns="0" bIns="0" rtlCol="0" anchor="ctr"/>
-          <a:lstStyle/>
-          <a:p>
-            <a:pPr indent="0" marL="0">
-              <a:buNone/>
-            </a:pPr>
-            <a:r>
-              <a:rPr lang="en-US" sz="4400" b="1" dirty="0">
+      </p:pic>
+      <p:sp>
+        <p:nvSpPr>
+          <p:cNvPr id="6" name="Text 1"/>
+          <p:cNvSpPr txBox="1"/>
+          <p:nvPr/>
+        </p:nvSpPr>
+        <p:spPr>
+          <a:xfrm>
+            <a:off x="457200" y="3611880"/>
+            <a:ext cx="4023360" cy="822960"/>
+          </a:xfrm>
+          <a:prstGeom prst="rect">
+            <a:avLst/>
+          </a:prstGeom>
+          <a:noFill/>
+          <a:ln/>
+        </p:spPr>
+        <p:txBody>
+          <a:bodyPr wrap="square" lIns="0" tIns="0" rIns="0" bIns="0" rtlCol="0" anchor="t"/>
+          <a:lstStyle/>
+          <a:p>
+            <a:pPr indent="0" marL="0">
+              <a:buNone/>
+            </a:pPr>
+            <a:r>
+              <a:rPr lang="en-US" sz="1500" b="1" dirty="0">
                 <a:solidFill>
                   <a:schemeClr val="accent1"/>
                 </a:solidFill>
-                <a:latin typeface="Cambria" pitchFamily="34" charset="0"/>
-                <a:ea typeface="Cambria" pitchFamily="34" charset="-122"/>
-                <a:cs typeface="Cambria" pitchFamily="34" charset="-120"/>
-              </a:rPr>
-              <a:t>101</a:t>
-            </a:r>
-            <a:endParaRPr lang="en-US" sz="4400" dirty="0"/>
-          </a:p>
-        </p:txBody>
-      </p:sp>
-      <p:sp>
-        <p:nvSpPr>
-          <p:cNvPr id="10" name="Text 7"/>
-          <p:cNvSpPr txBox="1"/>
-          <p:nvPr/>
-        </p:nvSpPr>
-        <p:spPr>
-          <a:xfrm>
-            <a:off x="3429000" y="2103120"/>
-            <a:ext cx="2286000" cy="320040"/>
+              </a:rPr>
+              <a:t>Carga masiva: </a:t>
+            </a:r>
+            <a:pPr indent="0" marL="0">
+              <a:buNone/>
+            </a:pPr>
+            <a:r>
+              <a:rPr lang="en-US" sz="1500" dirty="0">
+                <a:solidFill>
+                  <a:schemeClr val="tx1"/>
+                </a:solidFill>
+              </a:rPr>
+              <a:t>las filas válidas se registran y las inválidas se reportan.</a:t>
+            </a:r>
+            <a:endParaRPr lang="en-US" sz="1500" dirty="0"/>
+          </a:p>
+        </p:txBody>
+      </p:sp>
+      <p:sp>
+        <p:nvSpPr>
+          <p:cNvPr id="7" name="Text 2"/>
+          <p:cNvSpPr txBox="1"/>
+          <p:nvPr/>
+        </p:nvSpPr>
+        <p:spPr>
+          <a:xfrm>
+            <a:off x="4663440" y="3611880"/>
+            <a:ext cx="4023360" cy="822960"/>
           </a:xfrm>
           <a:prstGeom prst="rect">
             <a:avLst/>
@@ -5315,289 +5825,25 @@
               <a:buNone/>
             </a:pPr>
             <a:r>
-              <a:rPr lang="en-US" sz="1600" b="1" dirty="0">
-                <a:solidFill>
-                  <a:schemeClr val="tx2"/>
-                </a:solidFill>
-              </a:rPr>
-              <a:t>frontend</a:t>
-            </a:r>
-            <a:endParaRPr lang="en-US" sz="1600" dirty="0"/>
-          </a:p>
-        </p:txBody>
-      </p:sp>
-      <p:sp>
-        <p:nvSpPr>
-          <p:cNvPr id="11" name="Text 8"/>
-          <p:cNvSpPr txBox="1"/>
-          <p:nvPr/>
-        </p:nvSpPr>
-        <p:spPr>
-          <a:xfrm>
-            <a:off x="3429000" y="2468880"/>
-            <a:ext cx="2286000" cy="274320"/>
-          </a:xfrm>
-          <a:prstGeom prst="rect">
-            <a:avLst/>
-          </a:prstGeom>
-          <a:noFill/>
-          <a:ln/>
-        </p:spPr>
-        <p:txBody>
-          <a:bodyPr wrap="square" lIns="0" tIns="0" rIns="0" bIns="0" rtlCol="0" anchor="t"/>
-          <a:lstStyle/>
-          <a:p>
-            <a:pPr indent="0" marL="0">
-              <a:buNone/>
-            </a:pPr>
-            <a:r>
-              <a:rPr lang="en-US" sz="1300" dirty="0">
-                <a:solidFill>
-                  <a:schemeClr val="accent6"/>
-                </a:solidFill>
-              </a:rPr>
-              <a:t>Vitest</a:t>
-            </a:r>
-            <a:endParaRPr lang="en-US" sz="1300" dirty="0"/>
-          </a:p>
-        </p:txBody>
-      </p:sp>
-      <p:sp>
-        <p:nvSpPr>
-          <p:cNvPr id="12" name="pruebas extremo a extremo"/>
-          <p:cNvSpPr/>
-          <p:nvPr/>
-        </p:nvSpPr>
-        <p:spPr>
-          <a:xfrm>
-            <a:off x="6035040" y="1188720"/>
-            <a:ext cx="2651760" cy="1737360"/>
-          </a:xfrm>
-          <a:prstGeom prst="roundRect">
-            <a:avLst>
-              <a:gd name="adj" fmla="val 4211"/>
-            </a:avLst>
-          </a:prstGeom>
-          <a:solidFill>
-            <a:schemeClr val="bg2"/>
-          </a:solidFill>
-          <a:ln w="12700">
-            <a:solidFill>
-              <a:schemeClr val="bg2"/>
-            </a:solidFill>
-            <a:prstDash val="solid"/>
-          </a:ln>
-          <a:effectLst>
-            <a:outerShdw sx="100000" sy="100000" kx="0" ky="0" algn="bl" rotWithShape="0" blurRad="76200" dist="25400" dir="5400000">
-              <a:srgbClr val="000000">
-                <a:alpha val="12000"/>
-              </a:srgbClr>
-            </a:outerShdw>
-          </a:effectLst>
-        </p:spPr>
-      </p:sp>
-      <p:sp>
-        <p:nvSpPr>
-          <p:cNvPr id="13" name="Text 10"/>
-          <p:cNvSpPr txBox="1"/>
-          <p:nvPr/>
-        </p:nvSpPr>
-        <p:spPr>
-          <a:xfrm>
-            <a:off x="6217920" y="1234440"/>
-            <a:ext cx="2286000" cy="822960"/>
-          </a:xfrm>
-          <a:prstGeom prst="rect">
-            <a:avLst/>
-          </a:prstGeom>
-          <a:noFill/>
-          <a:ln/>
-        </p:spPr>
-        <p:txBody>
-          <a:bodyPr wrap="square" lIns="0" tIns="0" rIns="0" bIns="0" rtlCol="0" anchor="ctr"/>
-          <a:lstStyle/>
-          <a:p>
-            <a:pPr indent="0" marL="0">
-              <a:buNone/>
-            </a:pPr>
-            <a:r>
-              <a:rPr lang="en-US" sz="4400" b="1" dirty="0">
+              <a:rPr lang="en-US" sz="1500" b="1" dirty="0">
                 <a:solidFill>
                   <a:schemeClr val="accent1"/>
                 </a:solidFill>
-                <a:latin typeface="Cambria" pitchFamily="34" charset="0"/>
-                <a:ea typeface="Cambria" pitchFamily="34" charset="-122"/>
-                <a:cs typeface="Cambria" pitchFamily="34" charset="-120"/>
-              </a:rPr>
-              <a:t>18</a:t>
-            </a:r>
-            <a:endParaRPr lang="en-US" sz="4400" dirty="0"/>
-          </a:p>
-        </p:txBody>
-      </p:sp>
-      <p:sp>
-        <p:nvSpPr>
-          <p:cNvPr id="14" name="Text 11"/>
-          <p:cNvSpPr txBox="1"/>
-          <p:nvPr/>
-        </p:nvSpPr>
-        <p:spPr>
-          <a:xfrm>
-            <a:off x="6217920" y="2103120"/>
-            <a:ext cx="2286000" cy="320040"/>
-          </a:xfrm>
-          <a:prstGeom prst="rect">
-            <a:avLst/>
-          </a:prstGeom>
-          <a:noFill/>
-          <a:ln/>
-        </p:spPr>
-        <p:txBody>
-          <a:bodyPr wrap="square" lIns="0" tIns="0" rIns="0" bIns="0" rtlCol="0" anchor="t"/>
-          <a:lstStyle/>
-          <a:p>
-            <a:pPr indent="0" marL="0">
-              <a:buNone/>
-            </a:pPr>
-            <a:r>
-              <a:rPr lang="en-US" sz="1600" b="1" dirty="0">
-                <a:solidFill>
-                  <a:schemeClr val="tx2"/>
-                </a:solidFill>
-              </a:rPr>
-              <a:t>extremo a extremo</a:t>
-            </a:r>
-            <a:endParaRPr lang="en-US" sz="1600" dirty="0"/>
-          </a:p>
-        </p:txBody>
-      </p:sp>
-      <p:sp>
-        <p:nvSpPr>
-          <p:cNvPr id="15" name="Text 12"/>
-          <p:cNvSpPr txBox="1"/>
-          <p:nvPr/>
-        </p:nvSpPr>
-        <p:spPr>
-          <a:xfrm>
-            <a:off x="6217920" y="2468880"/>
-            <a:ext cx="2286000" cy="274320"/>
-          </a:xfrm>
-          <a:prstGeom prst="rect">
-            <a:avLst/>
-          </a:prstGeom>
-          <a:noFill/>
-          <a:ln/>
-        </p:spPr>
-        <p:txBody>
-          <a:bodyPr wrap="square" lIns="0" tIns="0" rIns="0" bIns="0" rtlCol="0" anchor="t"/>
-          <a:lstStyle/>
-          <a:p>
-            <a:pPr indent="0" marL="0">
-              <a:buNone/>
-            </a:pPr>
-            <a:r>
-              <a:rPr lang="en-US" sz="1300" dirty="0">
-                <a:solidFill>
-                  <a:schemeClr val="accent6"/>
-                </a:solidFill>
-              </a:rPr>
-              <a:t>Playwright</a:t>
-            </a:r>
-            <a:endParaRPr lang="en-US" sz="1300" dirty="0"/>
-          </a:p>
-        </p:txBody>
-      </p:sp>
-      <p:sp>
-        <p:nvSpPr>
-          <p:cNvPr id="16" name="Text 13"/>
-          <p:cNvSpPr txBox="1"/>
-          <p:nvPr/>
-        </p:nvSpPr>
-        <p:spPr>
-          <a:xfrm>
-            <a:off x="457200" y="3200400"/>
-            <a:ext cx="8229600" cy="548640"/>
-          </a:xfrm>
-          <a:prstGeom prst="rect">
-            <a:avLst/>
-          </a:prstGeom>
-          <a:noFill/>
-          <a:ln/>
-        </p:spPr>
-        <p:txBody>
-          <a:bodyPr wrap="square" lIns="0" tIns="0" rIns="0" bIns="0" rtlCol="0" anchor="t"/>
-          <a:lstStyle/>
-          <a:p>
-            <a:pPr indent="0" marL="0">
-              <a:buNone/>
-            </a:pPr>
-            <a:r>
-              <a:rPr lang="en-US" sz="1400" b="1" dirty="0">
+              </a:rPr>
+              <a:t>Reportes: </a:t>
+            </a:r>
+            <a:pPr indent="0" marL="0">
+              <a:buNone/>
+            </a:pPr>
+            <a:r>
+              <a:rPr lang="en-US" sz="1500" dirty="0">
                 <a:solidFill>
                   <a:schemeClr val="tx1"/>
                 </a:solidFill>
               </a:rPr>
-              <a:t>Backend: </a:t>
-            </a:r>
-            <a:pPr indent="0" marL="0">
-              <a:buNone/>
-            </a:pPr>
-            <a:r>
-              <a:rPr lang="en-US" sz="1400" dirty="0">
-                <a:solidFill>
-                  <a:schemeClr val="tx1"/>
-                </a:solidFill>
-              </a:rPr>
-              <a:t>55 de acceso a datos (9 repositorios: insertar, actualizar, eliminar y listar), 63 de servicios y 23 de integración.</a:t>
-            </a:r>
-            <a:endParaRPr lang="en-US" sz="1400" dirty="0"/>
-          </a:p>
-        </p:txBody>
-      </p:sp>
-      <p:sp>
-        <p:nvSpPr>
-          <p:cNvPr id="17" name="Text 14"/>
-          <p:cNvSpPr txBox="1"/>
-          <p:nvPr/>
-        </p:nvSpPr>
-        <p:spPr>
-          <a:xfrm>
-            <a:off x="457200" y="3840480"/>
-            <a:ext cx="8229600" cy="731520"/>
-          </a:xfrm>
-          <a:prstGeom prst="rect">
-            <a:avLst/>
-          </a:prstGeom>
-          <a:noFill/>
-          <a:ln/>
-        </p:spPr>
-        <p:txBody>
-          <a:bodyPr wrap="square" lIns="0" tIns="0" rIns="0" bIns="0" rtlCol="0" anchor="t"/>
-          <a:lstStyle/>
-          <a:p>
-            <a:pPr indent="0" marL="0">
-              <a:buNone/>
-            </a:pPr>
-            <a:r>
-              <a:rPr lang="en-US" sz="1400" b="1" dirty="0">
-                <a:solidFill>
-                  <a:schemeClr val="accent5"/>
-                </a:solidFill>
-              </a:rPr>
-              <a:t>Defectos detectados y corregidos: </a:t>
-            </a:r>
-            <a:pPr indent="0" marL="0">
-              <a:buNone/>
-            </a:pPr>
-            <a:r>
-              <a:rPr lang="en-US" sz="1400" dirty="0">
-                <a:solidFill>
-                  <a:schemeClr val="tx1"/>
-                </a:solidFill>
-              </a:rPr>
-              <a:t>login sin cuerpo respondía 500; errores 4xx se enmascaraban como 500; fechas con desfase de un día por la zona horaria de Lima.</a:t>
-            </a:r>
-            <a:endParaRPr lang="en-US" sz="1400" dirty="0"/>
+              <a:t>seis descargas XLSX con rango de fechas.</a:t>
+            </a:r>
+            <a:endParaRPr lang="en-US" sz="1500" dirty="0"/>
           </a:p>
         </p:txBody>
       </p:sp>
@@ -5706,7 +5952,7 @@
                 <a:ea typeface="Cambria" pitchFamily="34" charset="-122"/>
                 <a:cs typeface="Cambria" pitchFamily="34" charset="-120"/>
               </a:rPr>
-              <a:t>Conclusiones y recomendaciones</a:t>
+              <a:t>Calidad: 342 pruebas automatizadas en verde</a:t>
             </a:r>
             <a:endParaRPr lang="en-US" sz="2800" dirty="0"/>
           </a:p>
@@ -5714,18 +5960,18 @@
       </p:sp>
       <p:sp>
         <p:nvSpPr>
-          <p:cNvPr id="4" name="conclusiones"/>
+          <p:cNvPr id="4" name="pruebas backend (9 módulos)"/>
           <p:cNvSpPr/>
           <p:nvPr/>
         </p:nvSpPr>
         <p:spPr>
           <a:xfrm>
             <a:off x="457200" y="1188720"/>
-            <a:ext cx="4023360" cy="3337560"/>
+            <a:ext cx="2651760" cy="1737360"/>
           </a:xfrm>
           <a:prstGeom prst="roundRect">
             <a:avLst>
-              <a:gd name="adj" fmla="val 2192"/>
+              <a:gd name="adj" fmla="val 4211"/>
             </a:avLst>
           </a:prstGeom>
           <a:solidFill>
@@ -5754,8 +6000,47 @@
         </p:nvSpPr>
         <p:spPr>
           <a:xfrm>
-            <a:off x="640080" y="1298448"/>
-            <a:ext cx="3657600" cy="365760"/>
+            <a:off x="640080" y="1234440"/>
+            <a:ext cx="2286000" cy="822960"/>
+          </a:xfrm>
+          <a:prstGeom prst="rect">
+            <a:avLst/>
+          </a:prstGeom>
+          <a:noFill/>
+          <a:ln/>
+        </p:spPr>
+        <p:txBody>
+          <a:bodyPr wrap="square" lIns="0" tIns="0" rIns="0" bIns="0" rtlCol="0" anchor="ctr"/>
+          <a:lstStyle/>
+          <a:p>
+            <a:pPr indent="0" marL="0">
+              <a:buNone/>
+            </a:pPr>
+            <a:r>
+              <a:rPr lang="en-US" sz="4400" b="1" dirty="0">
+                <a:solidFill>
+                  <a:schemeClr val="accent1"/>
+                </a:solidFill>
+                <a:latin typeface="Cambria" pitchFamily="34" charset="0"/>
+                <a:ea typeface="Cambria" pitchFamily="34" charset="-122"/>
+                <a:cs typeface="Cambria" pitchFamily="34" charset="-120"/>
+              </a:rPr>
+              <a:t>218</a:t>
+            </a:r>
+            <a:endParaRPr lang="en-US" sz="4400" dirty="0"/>
+          </a:p>
+        </p:txBody>
+      </p:sp>
+      <p:sp>
+        <p:nvSpPr>
+          <p:cNvPr id="6" name="Text 3"/>
+          <p:cNvSpPr txBox="1"/>
+          <p:nvPr/>
+        </p:nvSpPr>
+        <p:spPr>
+          <a:xfrm>
+            <a:off x="640080" y="2103120"/>
+            <a:ext cx="2286000" cy="320040"/>
           </a:xfrm>
           <a:prstGeom prst="rect">
             <a:avLst/>
@@ -5771,27 +6056,27 @@
               <a:buNone/>
             </a:pPr>
             <a:r>
-              <a:rPr lang="en-US" sz="1800" b="1" dirty="0">
-                <a:solidFill>
-                  <a:schemeClr val="accent1"/>
-                </a:solidFill>
-              </a:rPr>
-              <a:t>Conclusiones</a:t>
-            </a:r>
-            <a:endParaRPr lang="en-US" sz="1800" dirty="0"/>
-          </a:p>
-        </p:txBody>
-      </p:sp>
-      <p:sp>
-        <p:nvSpPr>
-          <p:cNvPr id="6" name="Text 3"/>
-          <p:cNvSpPr txBox="1"/>
-          <p:nvPr/>
-        </p:nvSpPr>
-        <p:spPr>
-          <a:xfrm>
-            <a:off x="640080" y="1737360"/>
-            <a:ext cx="3657600" cy="2743200"/>
+              <a:rPr lang="en-US" sz="1600" b="1" dirty="0">
+                <a:solidFill>
+                  <a:schemeClr val="tx2"/>
+                </a:solidFill>
+              </a:rPr>
+              <a:t>backend (9 módulos)</a:t>
+            </a:r>
+            <a:endParaRPr lang="en-US" sz="1600" dirty="0"/>
+          </a:p>
+        </p:txBody>
+      </p:sp>
+      <p:sp>
+        <p:nvSpPr>
+          <p:cNvPr id="7" name="Text 4"/>
+          <p:cNvSpPr txBox="1"/>
+          <p:nvPr/>
+        </p:nvSpPr>
+        <p:spPr>
+          <a:xfrm>
+            <a:off x="640080" y="2468880"/>
+            <a:ext cx="2286000" cy="274320"/>
           </a:xfrm>
           <a:prstGeom prst="rect">
             <a:avLst/>
@@ -5803,75 +6088,35 @@
           <a:bodyPr wrap="square" lIns="0" tIns="0" rIns="0" bIns="0" rtlCol="0" anchor="t"/>
           <a:lstStyle/>
           <a:p>
-            <a:pPr marL="342900" indent="-342900">
-              <a:spcAft>
-                <a:spcPts val="600"/>
-              </a:spcAft>
-              <a:buSzPct val="100000"/>
-              <a:buChar char="•"/>
-            </a:pPr>
-            <a:r>
-              <a:rPr lang="en-US" sz="1600" dirty="0">
-                <a:solidFill>
-                  <a:schemeClr val="tx1"/>
-                </a:solidFill>
-              </a:rPr>
-              <a:t>32 de 33 requisitos cumplidos (97 %): el diagnóstico respalda la necesidad</a:t>
-            </a:r>
-            <a:endParaRPr lang="en-US" sz="1600" dirty="0"/>
-          </a:p>
-          <a:p>
-            <a:pPr marL="342900" indent="-342900">
-              <a:spcAft>
-                <a:spcPts val="600"/>
-              </a:spcAft>
-              <a:buSzPct val="100000"/>
-              <a:buChar char="•"/>
-            </a:pPr>
-            <a:r>
-              <a:rPr lang="en-US" sz="1600" dirty="0">
-                <a:solidFill>
-                  <a:schemeClr val="tx1"/>
-                </a:solidFill>
-              </a:rPr>
-              <a:t>Spring + Angular: 51 servicios REST, BCrypt, JWT y roles validados en el servidor</a:t>
-            </a:r>
-            <a:endParaRPr lang="en-US" sz="1600" dirty="0"/>
-          </a:p>
-          <a:p>
-            <a:pPr marL="342900" indent="-342900">
-              <a:spcAft>
-                <a:spcPts val="600"/>
-              </a:spcAft>
-              <a:buSzPct val="100000"/>
-              <a:buChar char="•"/>
-            </a:pPr>
-            <a:r>
-              <a:rPr lang="en-US" sz="1600" dirty="0">
-                <a:solidFill>
-                  <a:schemeClr val="tx1"/>
-                </a:solidFill>
-              </a:rPr>
-              <a:t>Las pruebas cubrieron el 100 % de los repositorios y detectaron defectos reales</a:t>
-            </a:r>
-            <a:endParaRPr lang="en-US" sz="1600" dirty="0"/>
-          </a:p>
-        </p:txBody>
-      </p:sp>
-      <p:sp>
-        <p:nvSpPr>
-          <p:cNvPr id="7" name="recomendaciones"/>
+            <a:pPr indent="0" marL="0">
+              <a:buNone/>
+            </a:pPr>
+            <a:r>
+              <a:rPr lang="en-US" sz="1300" dirty="0">
+                <a:solidFill>
+                  <a:schemeClr val="accent6"/>
+                </a:solidFill>
+              </a:rPr>
+              <a:t>JUnit, Mockito, MockMvc</a:t>
+            </a:r>
+            <a:endParaRPr lang="en-US" sz="1300" dirty="0"/>
+          </a:p>
+        </p:txBody>
+      </p:sp>
+      <p:sp>
+        <p:nvSpPr>
+          <p:cNvPr id="8" name="pruebas frontend"/>
           <p:cNvSpPr/>
           <p:nvPr/>
         </p:nvSpPr>
         <p:spPr>
           <a:xfrm>
-            <a:off x="4663440" y="1188720"/>
-            <a:ext cx="4023360" cy="3337560"/>
+            <a:off x="3246120" y="1188720"/>
+            <a:ext cx="2651760" cy="1737360"/>
           </a:xfrm>
           <a:prstGeom prst="roundRect">
             <a:avLst>
-              <a:gd name="adj" fmla="val 2192"/>
+              <a:gd name="adj" fmla="val 4211"/>
             </a:avLst>
           </a:prstGeom>
           <a:solidFill>
@@ -5894,14 +6139,53 @@
       </p:sp>
       <p:sp>
         <p:nvSpPr>
-          <p:cNvPr id="8" name="Text 5"/>
-          <p:cNvSpPr txBox="1"/>
-          <p:nvPr/>
-        </p:nvSpPr>
-        <p:spPr>
-          <a:xfrm>
-            <a:off x="4846320" y="1298448"/>
-            <a:ext cx="3657600" cy="365760"/>
+          <p:cNvPr id="9" name="Text 6"/>
+          <p:cNvSpPr txBox="1"/>
+          <p:nvPr/>
+        </p:nvSpPr>
+        <p:spPr>
+          <a:xfrm>
+            <a:off x="3429000" y="1234440"/>
+            <a:ext cx="2286000" cy="822960"/>
+          </a:xfrm>
+          <a:prstGeom prst="rect">
+            <a:avLst/>
+          </a:prstGeom>
+          <a:noFill/>
+          <a:ln/>
+        </p:spPr>
+        <p:txBody>
+          <a:bodyPr wrap="square" lIns="0" tIns="0" rIns="0" bIns="0" rtlCol="0" anchor="ctr"/>
+          <a:lstStyle/>
+          <a:p>
+            <a:pPr indent="0" marL="0">
+              <a:buNone/>
+            </a:pPr>
+            <a:r>
+              <a:rPr lang="en-US" sz="4400" b="1" dirty="0">
+                <a:solidFill>
+                  <a:schemeClr val="accent1"/>
+                </a:solidFill>
+                <a:latin typeface="Cambria" pitchFamily="34" charset="0"/>
+                <a:ea typeface="Cambria" pitchFamily="34" charset="-122"/>
+                <a:cs typeface="Cambria" pitchFamily="34" charset="-120"/>
+              </a:rPr>
+              <a:t>104</a:t>
+            </a:r>
+            <a:endParaRPr lang="en-US" sz="4400" dirty="0"/>
+          </a:p>
+        </p:txBody>
+      </p:sp>
+      <p:sp>
+        <p:nvSpPr>
+          <p:cNvPr id="10" name="Text 7"/>
+          <p:cNvSpPr txBox="1"/>
+          <p:nvPr/>
+        </p:nvSpPr>
+        <p:spPr>
+          <a:xfrm>
+            <a:off x="3429000" y="2103120"/>
+            <a:ext cx="2286000" cy="320040"/>
           </a:xfrm>
           <a:prstGeom prst="rect">
             <a:avLst/>
@@ -5917,27 +6201,136 @@
               <a:buNone/>
             </a:pPr>
             <a:r>
-              <a:rPr lang="en-US" sz="1800" b="1" dirty="0">
+              <a:rPr lang="en-US" sz="1600" b="1" dirty="0">
+                <a:solidFill>
+                  <a:schemeClr val="tx2"/>
+                </a:solidFill>
+              </a:rPr>
+              <a:t>frontend</a:t>
+            </a:r>
+            <a:endParaRPr lang="en-US" sz="1600" dirty="0"/>
+          </a:p>
+        </p:txBody>
+      </p:sp>
+      <p:sp>
+        <p:nvSpPr>
+          <p:cNvPr id="11" name="Text 8"/>
+          <p:cNvSpPr txBox="1"/>
+          <p:nvPr/>
+        </p:nvSpPr>
+        <p:spPr>
+          <a:xfrm>
+            <a:off x="3429000" y="2468880"/>
+            <a:ext cx="2286000" cy="274320"/>
+          </a:xfrm>
+          <a:prstGeom prst="rect">
+            <a:avLst/>
+          </a:prstGeom>
+          <a:noFill/>
+          <a:ln/>
+        </p:spPr>
+        <p:txBody>
+          <a:bodyPr wrap="square" lIns="0" tIns="0" rIns="0" bIns="0" rtlCol="0" anchor="t"/>
+          <a:lstStyle/>
+          <a:p>
+            <a:pPr indent="0" marL="0">
+              <a:buNone/>
+            </a:pPr>
+            <a:r>
+              <a:rPr lang="en-US" sz="1300" dirty="0">
+                <a:solidFill>
+                  <a:schemeClr val="accent6"/>
+                </a:solidFill>
+              </a:rPr>
+              <a:t>Vitest</a:t>
+            </a:r>
+            <a:endParaRPr lang="en-US" sz="1300" dirty="0"/>
+          </a:p>
+        </p:txBody>
+      </p:sp>
+      <p:sp>
+        <p:nvSpPr>
+          <p:cNvPr id="12" name="pruebas extremo a extremo"/>
+          <p:cNvSpPr/>
+          <p:nvPr/>
+        </p:nvSpPr>
+        <p:spPr>
+          <a:xfrm>
+            <a:off x="6035040" y="1188720"/>
+            <a:ext cx="2651760" cy="1737360"/>
+          </a:xfrm>
+          <a:prstGeom prst="roundRect">
+            <a:avLst>
+              <a:gd name="adj" fmla="val 4211"/>
+            </a:avLst>
+          </a:prstGeom>
+          <a:solidFill>
+            <a:schemeClr val="bg2"/>
+          </a:solidFill>
+          <a:ln w="12700">
+            <a:solidFill>
+              <a:schemeClr val="bg2"/>
+            </a:solidFill>
+            <a:prstDash val="solid"/>
+          </a:ln>
+          <a:effectLst>
+            <a:outerShdw sx="100000" sy="100000" kx="0" ky="0" algn="bl" rotWithShape="0" blurRad="76200" dist="25400" dir="5400000">
+              <a:srgbClr val="000000">
+                <a:alpha val="12000"/>
+              </a:srgbClr>
+            </a:outerShdw>
+          </a:effectLst>
+        </p:spPr>
+      </p:sp>
+      <p:sp>
+        <p:nvSpPr>
+          <p:cNvPr id="13" name="Text 10"/>
+          <p:cNvSpPr txBox="1"/>
+          <p:nvPr/>
+        </p:nvSpPr>
+        <p:spPr>
+          <a:xfrm>
+            <a:off x="6217920" y="1234440"/>
+            <a:ext cx="2286000" cy="822960"/>
+          </a:xfrm>
+          <a:prstGeom prst="rect">
+            <a:avLst/>
+          </a:prstGeom>
+          <a:noFill/>
+          <a:ln/>
+        </p:spPr>
+        <p:txBody>
+          <a:bodyPr wrap="square" lIns="0" tIns="0" rIns="0" bIns="0" rtlCol="0" anchor="ctr"/>
+          <a:lstStyle/>
+          <a:p>
+            <a:pPr indent="0" marL="0">
+              <a:buNone/>
+            </a:pPr>
+            <a:r>
+              <a:rPr lang="en-US" sz="4400" b="1" dirty="0">
                 <a:solidFill>
                   <a:schemeClr val="accent1"/>
                 </a:solidFill>
-              </a:rPr>
-              <a:t>Recomendaciones</a:t>
-            </a:r>
-            <a:endParaRPr lang="en-US" sz="1800" dirty="0"/>
-          </a:p>
-        </p:txBody>
-      </p:sp>
-      <p:sp>
-        <p:nvSpPr>
-          <p:cNvPr id="9" name="Text 6"/>
-          <p:cNvSpPr txBox="1"/>
-          <p:nvPr/>
-        </p:nvSpPr>
-        <p:spPr>
-          <a:xfrm>
-            <a:off x="4846320" y="1737360"/>
-            <a:ext cx="3657600" cy="2743200"/>
+                <a:latin typeface="Cambria" pitchFamily="34" charset="0"/>
+                <a:ea typeface="Cambria" pitchFamily="34" charset="-122"/>
+                <a:cs typeface="Cambria" pitchFamily="34" charset="-120"/>
+              </a:rPr>
+              <a:t>20</a:t>
+            </a:r>
+            <a:endParaRPr lang="en-US" sz="4400" dirty="0"/>
+          </a:p>
+        </p:txBody>
+      </p:sp>
+      <p:sp>
+        <p:nvSpPr>
+          <p:cNvPr id="14" name="Text 11"/>
+          <p:cNvSpPr txBox="1"/>
+          <p:nvPr/>
+        </p:nvSpPr>
+        <p:spPr>
+          <a:xfrm>
+            <a:off x="6217920" y="2103120"/>
+            <a:ext cx="2286000" cy="320040"/>
           </a:xfrm>
           <a:prstGeom prst="rect">
             <a:avLst/>
@@ -5949,58 +6342,148 @@
           <a:bodyPr wrap="square" lIns="0" tIns="0" rIns="0" bIns="0" rtlCol="0" anchor="t"/>
           <a:lstStyle/>
           <a:p>
-            <a:pPr marL="342900" indent="-342900">
-              <a:spcAft>
-                <a:spcPts val="600"/>
-              </a:spcAft>
-              <a:buSzPct val="100000"/>
-              <a:buChar char="•"/>
-            </a:pPr>
-            <a:r>
-              <a:rPr lang="en-US" sz="1600" dirty="0">
+            <a:pPr indent="0" marL="0">
+              <a:buNone/>
+            </a:pPr>
+            <a:r>
+              <a:rPr lang="en-US" sz="1600" b="1" dirty="0">
+                <a:solidFill>
+                  <a:schemeClr val="tx2"/>
+                </a:solidFill>
+              </a:rPr>
+              <a:t>extremo a extremo</a:t>
+            </a:r>
+            <a:endParaRPr lang="en-US" sz="1600" dirty="0"/>
+          </a:p>
+        </p:txBody>
+      </p:sp>
+      <p:sp>
+        <p:nvSpPr>
+          <p:cNvPr id="15" name="Text 12"/>
+          <p:cNvSpPr txBox="1"/>
+          <p:nvPr/>
+        </p:nvSpPr>
+        <p:spPr>
+          <a:xfrm>
+            <a:off x="6217920" y="2468880"/>
+            <a:ext cx="2286000" cy="274320"/>
+          </a:xfrm>
+          <a:prstGeom prst="rect">
+            <a:avLst/>
+          </a:prstGeom>
+          <a:noFill/>
+          <a:ln/>
+        </p:spPr>
+        <p:txBody>
+          <a:bodyPr wrap="square" lIns="0" tIns="0" rIns="0" bIns="0" rtlCol="0" anchor="t"/>
+          <a:lstStyle/>
+          <a:p>
+            <a:pPr indent="0" marL="0">
+              <a:buNone/>
+            </a:pPr>
+            <a:r>
+              <a:rPr lang="en-US" sz="1300" dirty="0">
+                <a:solidFill>
+                  <a:schemeClr val="accent6"/>
+                </a:solidFill>
+              </a:rPr>
+              <a:t>Playwright</a:t>
+            </a:r>
+            <a:endParaRPr lang="en-US" sz="1300" dirty="0"/>
+          </a:p>
+        </p:txBody>
+      </p:sp>
+      <p:sp>
+        <p:nvSpPr>
+          <p:cNvPr id="16" name="Text 13"/>
+          <p:cNvSpPr txBox="1"/>
+          <p:nvPr/>
+        </p:nvSpPr>
+        <p:spPr>
+          <a:xfrm>
+            <a:off x="457200" y="3200400"/>
+            <a:ext cx="8229600" cy="548640"/>
+          </a:xfrm>
+          <a:prstGeom prst="rect">
+            <a:avLst/>
+          </a:prstGeom>
+          <a:noFill/>
+          <a:ln/>
+        </p:spPr>
+        <p:txBody>
+          <a:bodyPr wrap="square" lIns="0" tIns="0" rIns="0" bIns="0" rtlCol="0" anchor="t"/>
+          <a:lstStyle/>
+          <a:p>
+            <a:pPr indent="0" marL="0">
+              <a:buNone/>
+            </a:pPr>
+            <a:r>
+              <a:rPr lang="en-US" sz="1400" b="1" dirty="0">
                 <a:solidFill>
                   <a:schemeClr val="tx1"/>
                 </a:solidFill>
               </a:rPr>
-              <a:t>Capacitar al personal, hacer un piloto y respaldar la base de datos</a:t>
-            </a:r>
-            <a:endParaRPr lang="en-US" sz="1600" dirty="0"/>
-          </a:p>
-          <a:p>
-            <a:pPr marL="342900" indent="-342900">
-              <a:spcAft>
-                <a:spcPts val="600"/>
-              </a:spcAft>
-              <a:buSzPct val="100000"/>
-              <a:buChar char="•"/>
-            </a:pPr>
-            <a:r>
-              <a:rPr lang="en-US" sz="1600" dirty="0">
+              <a:t>Backend: </a:t>
+            </a:r>
+            <a:pPr indent="0" marL="0">
+              <a:buNone/>
+            </a:pPr>
+            <a:r>
+              <a:rPr lang="en-US" sz="1400" dirty="0">
                 <a:solidFill>
                   <a:schemeClr val="tx1"/>
                 </a:solidFill>
               </a:rPr>
-              <a:t>Auditar quién registra cada movimiento y cumplir la Ley 29733 (HTTPS, brechas en 48 h)</a:t>
-            </a:r>
-            <a:endParaRPr lang="en-US" sz="1600" dirty="0"/>
-          </a:p>
-          <a:p>
-            <a:pPr marL="342900" indent="-342900">
-              <a:spcAft>
-                <a:spcPts val="600"/>
-              </a:spcAft>
-              <a:buSzPct val="100000"/>
-              <a:buChar char="•"/>
-            </a:pPr>
-            <a:r>
-              <a:rPr lang="en-US" sz="1600" dirty="0">
+              <a:t>62 de acceso a datos (10 repositorios: insertar, actualizar, eliminar y listar), más servicios, seguridad de cada endpoint, clientes Feign simulados y gateway.</a:t>
+            </a:r>
+            <a:endParaRPr lang="en-US" sz="1400" dirty="0"/>
+          </a:p>
+        </p:txBody>
+      </p:sp>
+      <p:sp>
+        <p:nvSpPr>
+          <p:cNvPr id="17" name="Text 14"/>
+          <p:cNvSpPr txBox="1"/>
+          <p:nvPr/>
+        </p:nvSpPr>
+        <p:spPr>
+          <a:xfrm>
+            <a:off x="457200" y="3840480"/>
+            <a:ext cx="8229600" cy="731520"/>
+          </a:xfrm>
+          <a:prstGeom prst="rect">
+            <a:avLst/>
+          </a:prstGeom>
+          <a:noFill/>
+          <a:ln/>
+        </p:spPr>
+        <p:txBody>
+          <a:bodyPr wrap="square" lIns="0" tIns="0" rIns="0" bIns="0" rtlCol="0" anchor="t"/>
+          <a:lstStyle/>
+          <a:p>
+            <a:pPr indent="0" marL="0">
+              <a:buNone/>
+            </a:pPr>
+            <a:r>
+              <a:rPr lang="en-US" sz="1400" b="1" dirty="0">
+                <a:solidFill>
+                  <a:schemeClr val="accent5"/>
+                </a:solidFill>
+              </a:rPr>
+              <a:t>Defectos detectados y corregidos: </a:t>
+            </a:r>
+            <a:pPr indent="0" marL="0">
+              <a:buNone/>
+            </a:pPr>
+            <a:r>
+              <a:rPr lang="en-US" sz="1400" dirty="0">
                 <a:solidFill>
                   <a:schemeClr val="tx1"/>
                 </a:solidFill>
               </a:rPr>
-              <a:t>Automatizar pruebas desde el inicio y completar RF-26, rendimiento y navegadores</a:t>
-            </a:r>
-            <a:endParaRPr lang="en-US" sz="1600" dirty="0"/>
+              <a:t>login sin cuerpo respondía 500; errores 4xx se enmascaraban como 500; fechas con desfase de un día por la zona horaria de Lima.</a:t>
+            </a:r>
+            <a:endParaRPr lang="en-US" sz="1400" dirty="0"/>
           </a:p>
         </p:txBody>
       </p:sp>
@@ -6076,6 +6559,409 @@
       </p:grpSpPr>
       <p:sp>
         <p:nvSpPr>
+          <p:cNvPr id="2" name="Text 1"/>
+          <p:cNvSpPr/>
+          <p:nvPr>
+            <p:ph idx="101" type="title" hasCustomPrompt="1"/>
+          </p:nvPr>
+        </p:nvSpPr>
+        <p:spPr>
+          <a:xfrm>
+            <a:off x="457200" y="274320"/>
+            <a:ext cx="8229600" cy="731520"/>
+          </a:xfrm>
+          <a:prstGeom prst="rect">
+            <a:avLst/>
+          </a:prstGeom>
+          <a:noFill/>
+          <a:ln/>
+        </p:spPr>
+        <p:txBody>
+          <a:bodyPr wrap="square" lIns="0" tIns="0" rIns="0" bIns="0" rtlCol="0" anchor="ctr"/>
+          <a:lstStyle/>
+          <a:p>
+            <a:pPr algn="l" indent="0" marL="0">
+              <a:buNone/>
+            </a:pPr>
+            <a:r>
+              <a:rPr lang="en-US" sz="2800" b="1" dirty="0">
+                <a:solidFill>
+                  <a:schemeClr val="tx2"/>
+                </a:solidFill>
+                <a:latin typeface="Cambria" pitchFamily="34" charset="0"/>
+                <a:ea typeface="Cambria" pitchFamily="34" charset="-122"/>
+                <a:cs typeface="Cambria" pitchFamily="34" charset="-120"/>
+              </a:rPr>
+              <a:t>Conclusiones y recomendaciones</a:t>
+            </a:r>
+            <a:endParaRPr lang="en-US" sz="2800" dirty="0"/>
+          </a:p>
+        </p:txBody>
+      </p:sp>
+      <p:sp>
+        <p:nvSpPr>
+          <p:cNvPr id="4" name="conclusiones"/>
+          <p:cNvSpPr/>
+          <p:nvPr/>
+        </p:nvSpPr>
+        <p:spPr>
+          <a:xfrm>
+            <a:off x="457200" y="1188720"/>
+            <a:ext cx="4023360" cy="3337560"/>
+          </a:xfrm>
+          <a:prstGeom prst="roundRect">
+            <a:avLst>
+              <a:gd name="adj" fmla="val 2192"/>
+            </a:avLst>
+          </a:prstGeom>
+          <a:solidFill>
+            <a:schemeClr val="bg2"/>
+          </a:solidFill>
+          <a:ln w="12700">
+            <a:solidFill>
+              <a:schemeClr val="bg2"/>
+            </a:solidFill>
+            <a:prstDash val="solid"/>
+          </a:ln>
+          <a:effectLst>
+            <a:outerShdw sx="100000" sy="100000" kx="0" ky="0" algn="bl" rotWithShape="0" blurRad="76200" dist="25400" dir="5400000">
+              <a:srgbClr val="000000">
+                <a:alpha val="12000"/>
+              </a:srgbClr>
+            </a:outerShdw>
+          </a:effectLst>
+        </p:spPr>
+      </p:sp>
+      <p:sp>
+        <p:nvSpPr>
+          <p:cNvPr id="5" name="Text 2"/>
+          <p:cNvSpPr txBox="1"/>
+          <p:nvPr/>
+        </p:nvSpPr>
+        <p:spPr>
+          <a:xfrm>
+            <a:off x="640080" y="1298448"/>
+            <a:ext cx="3657600" cy="365760"/>
+          </a:xfrm>
+          <a:prstGeom prst="rect">
+            <a:avLst/>
+          </a:prstGeom>
+          <a:noFill/>
+          <a:ln/>
+        </p:spPr>
+        <p:txBody>
+          <a:bodyPr wrap="square" lIns="0" tIns="0" rIns="0" bIns="0" rtlCol="0" anchor="t"/>
+          <a:lstStyle/>
+          <a:p>
+            <a:pPr indent="0" marL="0">
+              <a:buNone/>
+            </a:pPr>
+            <a:r>
+              <a:rPr lang="en-US" sz="1800" b="1" dirty="0">
+                <a:solidFill>
+                  <a:schemeClr val="accent1"/>
+                </a:solidFill>
+              </a:rPr>
+              <a:t>Conclusiones</a:t>
+            </a:r>
+            <a:endParaRPr lang="en-US" sz="1800" dirty="0"/>
+          </a:p>
+        </p:txBody>
+      </p:sp>
+      <p:sp>
+        <p:nvSpPr>
+          <p:cNvPr id="6" name="Text 3"/>
+          <p:cNvSpPr txBox="1"/>
+          <p:nvPr/>
+        </p:nvSpPr>
+        <p:spPr>
+          <a:xfrm>
+            <a:off x="640080" y="1737360"/>
+            <a:ext cx="3657600" cy="2743200"/>
+          </a:xfrm>
+          <a:prstGeom prst="rect">
+            <a:avLst/>
+          </a:prstGeom>
+          <a:noFill/>
+          <a:ln/>
+        </p:spPr>
+        <p:txBody>
+          <a:bodyPr wrap="square" lIns="0" tIns="0" rIns="0" bIns="0" rtlCol="0" anchor="t"/>
+          <a:lstStyle/>
+          <a:p>
+            <a:pPr marL="342900" indent="-342900">
+              <a:spcAft>
+                <a:spcPts val="600"/>
+              </a:spcAft>
+              <a:buSzPct val="100000"/>
+              <a:buChar char="•"/>
+            </a:pPr>
+            <a:r>
+              <a:rPr lang="en-US" sz="1600" dirty="0">
+                <a:solidFill>
+                  <a:schemeClr val="tx1"/>
+                </a:solidFill>
+              </a:rPr>
+              <a:t>32 de 33 requisitos cumplidos (97 %): el diagnóstico respalda la necesidad</a:t>
+            </a:r>
+            <a:endParaRPr lang="en-US" sz="1600" dirty="0"/>
+          </a:p>
+          <a:p>
+            <a:pPr marL="342900" indent="-342900">
+              <a:spcAft>
+                <a:spcPts val="600"/>
+              </a:spcAft>
+              <a:buSzPct val="100000"/>
+              <a:buChar char="•"/>
+            </a:pPr>
+            <a:r>
+              <a:rPr lang="en-US" sz="1600" dirty="0">
+                <a:solidFill>
+                  <a:schemeClr val="tx1"/>
+                </a:solidFill>
+              </a:rPr>
+              <a:t>Microservicios Spring Cloud + Angular: 53 servicios REST, BCrypt, JWT y roles validados en el servidor</a:t>
+            </a:r>
+            <a:endParaRPr lang="en-US" sz="1600" dirty="0"/>
+          </a:p>
+          <a:p>
+            <a:pPr marL="342900" indent="-342900">
+              <a:spcAft>
+                <a:spcPts val="600"/>
+              </a:spcAft>
+              <a:buSzPct val="100000"/>
+              <a:buChar char="•"/>
+            </a:pPr>
+            <a:r>
+              <a:rPr lang="en-US" sz="1600" dirty="0">
+                <a:solidFill>
+                  <a:schemeClr val="tx1"/>
+                </a:solidFill>
+              </a:rPr>
+              <a:t>Las pruebas cubrieron el 100 % de los repositorios y detectaron defectos reales</a:t>
+            </a:r>
+            <a:endParaRPr lang="en-US" sz="1600" dirty="0"/>
+          </a:p>
+        </p:txBody>
+      </p:sp>
+      <p:sp>
+        <p:nvSpPr>
+          <p:cNvPr id="7" name="recomendaciones"/>
+          <p:cNvSpPr/>
+          <p:nvPr/>
+        </p:nvSpPr>
+        <p:spPr>
+          <a:xfrm>
+            <a:off x="4663440" y="1188720"/>
+            <a:ext cx="4023360" cy="3337560"/>
+          </a:xfrm>
+          <a:prstGeom prst="roundRect">
+            <a:avLst>
+              <a:gd name="adj" fmla="val 2192"/>
+            </a:avLst>
+          </a:prstGeom>
+          <a:solidFill>
+            <a:schemeClr val="bg2"/>
+          </a:solidFill>
+          <a:ln w="12700">
+            <a:solidFill>
+              <a:schemeClr val="bg2"/>
+            </a:solidFill>
+            <a:prstDash val="solid"/>
+          </a:ln>
+          <a:effectLst>
+            <a:outerShdw sx="100000" sy="100000" kx="0" ky="0" algn="bl" rotWithShape="0" blurRad="76200" dist="25400" dir="5400000">
+              <a:srgbClr val="000000">
+                <a:alpha val="12000"/>
+              </a:srgbClr>
+            </a:outerShdw>
+          </a:effectLst>
+        </p:spPr>
+      </p:sp>
+      <p:sp>
+        <p:nvSpPr>
+          <p:cNvPr id="8" name="Text 5"/>
+          <p:cNvSpPr txBox="1"/>
+          <p:nvPr/>
+        </p:nvSpPr>
+        <p:spPr>
+          <a:xfrm>
+            <a:off x="4846320" y="1298448"/>
+            <a:ext cx="3657600" cy="365760"/>
+          </a:xfrm>
+          <a:prstGeom prst="rect">
+            <a:avLst/>
+          </a:prstGeom>
+          <a:noFill/>
+          <a:ln/>
+        </p:spPr>
+        <p:txBody>
+          <a:bodyPr wrap="square" lIns="0" tIns="0" rIns="0" bIns="0" rtlCol="0" anchor="t"/>
+          <a:lstStyle/>
+          <a:p>
+            <a:pPr indent="0" marL="0">
+              <a:buNone/>
+            </a:pPr>
+            <a:r>
+              <a:rPr lang="en-US" sz="1800" b="1" dirty="0">
+                <a:solidFill>
+                  <a:schemeClr val="accent1"/>
+                </a:solidFill>
+              </a:rPr>
+              <a:t>Recomendaciones</a:t>
+            </a:r>
+            <a:endParaRPr lang="en-US" sz="1800" dirty="0"/>
+          </a:p>
+        </p:txBody>
+      </p:sp>
+      <p:sp>
+        <p:nvSpPr>
+          <p:cNvPr id="9" name="Text 6"/>
+          <p:cNvSpPr txBox="1"/>
+          <p:nvPr/>
+        </p:nvSpPr>
+        <p:spPr>
+          <a:xfrm>
+            <a:off x="4846320" y="1737360"/>
+            <a:ext cx="3657600" cy="2743200"/>
+          </a:xfrm>
+          <a:prstGeom prst="rect">
+            <a:avLst/>
+          </a:prstGeom>
+          <a:noFill/>
+          <a:ln/>
+        </p:spPr>
+        <p:txBody>
+          <a:bodyPr wrap="square" lIns="0" tIns="0" rIns="0" bIns="0" rtlCol="0" anchor="t"/>
+          <a:lstStyle/>
+          <a:p>
+            <a:pPr marL="342900" indent="-342900">
+              <a:spcAft>
+                <a:spcPts val="600"/>
+              </a:spcAft>
+              <a:buSzPct val="100000"/>
+              <a:buChar char="•"/>
+            </a:pPr>
+            <a:r>
+              <a:rPr lang="en-US" sz="1600" dirty="0">
+                <a:solidFill>
+                  <a:schemeClr val="tx1"/>
+                </a:solidFill>
+              </a:rPr>
+              <a:t>Capacitar al personal, hacer un piloto y respaldar la base de datos</a:t>
+            </a:r>
+            <a:endParaRPr lang="en-US" sz="1600" dirty="0"/>
+          </a:p>
+          <a:p>
+            <a:pPr marL="342900" indent="-342900">
+              <a:spcAft>
+                <a:spcPts val="600"/>
+              </a:spcAft>
+              <a:buSzPct val="100000"/>
+              <a:buChar char="•"/>
+            </a:pPr>
+            <a:r>
+              <a:rPr lang="en-US" sz="1600" dirty="0">
+                <a:solidFill>
+                  <a:schemeClr val="tx1"/>
+                </a:solidFill>
+              </a:rPr>
+              <a:t>Auditar quién registra cada movimiento y cumplir la Ley 29733 (HTTPS, brechas en 48 h)</a:t>
+            </a:r>
+            <a:endParaRPr lang="en-US" sz="1600" dirty="0"/>
+          </a:p>
+          <a:p>
+            <a:pPr marL="342900" indent="-342900">
+              <a:spcAft>
+                <a:spcPts val="600"/>
+              </a:spcAft>
+              <a:buSzPct val="100000"/>
+              <a:buChar char="•"/>
+            </a:pPr>
+            <a:r>
+              <a:rPr lang="en-US" sz="1600" dirty="0">
+                <a:solidFill>
+                  <a:schemeClr val="tx1"/>
+                </a:solidFill>
+              </a:rPr>
+              <a:t>Automatizar pruebas desde el inicio y completar RF-26, rendimiento y navegadores</a:t>
+            </a:r>
+            <a:endParaRPr lang="en-US" sz="1600" dirty="0"/>
+          </a:p>
+        </p:txBody>
+      </p:sp>
+      <p:sp>
+        <p:nvSpPr>
+          <p:cNvPr id="25" name="Slide Number Placeholder 0"/>
+          <p:cNvSpPr>
+            <a:spLocks noGrp="1"/>
+          </p:cNvSpPr>
+          <p:nvPr>
+            <p:ph type="sldNum" sz="quarter" idx="4294967295"/>
+          </p:nvPr>
+        </p:nvSpPr>
+        <p:spPr>
+          <a:xfrm>
+            <a:off x="8412480" y="4754880"/>
+            <a:ext cx="457200" cy="274320"/>
+          </a:xfrm>
+          <a:prstGeom prst="rect">
+            <a:avLst/>
+          </a:prstGeom>
+          <a:extLst>
+            <a:ext uri="{C572A759-6A51-4108-AA02-DFA0A04FC94B}">
+              <ma14:wrappingTextBoxFlag xmlns:ma14="http://schemas.microsoft.com/office/mac/drawingml/2011/main" val="0"/>
+            </a:ext>
+          </a:extLst>
+        </p:spPr>
+        <p:txBody>
+          <a:bodyPr/>
+          <a:lstStyle>
+            <a:lvl1pPr>
+              <a:defRPr sz="1000">
+                <a:solidFill>
+                  <a:schemeClr val="accent6"/>
+                </a:solidFill>
+              </a:defRPr>
+            </a:lvl1pPr>
+          </a:lstStyle>
+          <a:p>
+            <a:pPr algn="r"/>
+            <a:fld id="{F7021451-1387-4CA6-816F-3879F97B5CBC}" type="slidenum">
+              <a:rPr b="0" lang="en-US"/>
+              <a:t>16</a:t>
+            </a:fld>
+            <a:endParaRPr lang="en-US"/>
+          </a:p>
+        </p:txBody>
+      </p:sp>
+    </p:spTree>
+  </p:cSld>
+  <p:clrMapOvr>
+    <a:masterClrMapping/>
+  </p:clrMapOvr>
+</p:sld>
+</file>
+
+<file path=ppt/slides/slide17.xml><?xml version="1.0" encoding="utf-8"?>
+<p:sld xmlns:a="http://schemas.openxmlformats.org/drawingml/2006/main" xmlns:r="http://schemas.openxmlformats.org/officeDocument/2006/relationships" xmlns:p="http://schemas.openxmlformats.org/presentationml/2006/main">
+  <p:cSld name="Slide 17">
+    <p:spTree>
+      <p:nvGrpSpPr>
+        <p:cNvPr id="1" name=""/>
+        <p:cNvGrpSpPr/>
+        <p:nvPr/>
+      </p:nvGrpSpPr>
+      <p:grpSpPr>
+        <a:xfrm>
+          <a:off x="0" y="0"/>
+          <a:ext cx="0" cy="0"/>
+          <a:chOff x="0" y="0"/>
+          <a:chExt cx="0" cy="0"/>
+        </a:xfrm>
+      </p:grpSpPr>
+      <p:sp>
+        <p:nvSpPr>
           <p:cNvPr id="3" name="Text 0"/>
           <p:cNvSpPr txBox="1"/>
           <p:nvPr/>
@@ -6309,7 +7195,7 @@
                   <a:schemeClr val="bg1"/>
                 </a:solidFill>
               </a:rPr>
-              <a:t>51 endpoints con GET, POST, PUT y DELETE; login con BCrypt y validaciones</a:t>
+              <a:t>53 endpoints en 6 microservicios (Eureka, Gateway, Feign, RabbitMQ); login con BCrypt</a:t>
             </a:r>
             <a:endParaRPr lang="en-US" sz="1400" dirty="0"/>
           </a:p>
@@ -6410,7 +7296,7 @@
                   <a:schemeClr val="bg1"/>
                 </a:solidFill>
               </a:rPr>
-              <a:t>Servicios HttpClient en todos los módulos; 48 verificaciones y 18 e2e</a:t>
+              <a:t>Servicios HttpClient en todos los módulos; 51 verificaciones y 20 e2e</a:t>
             </a:r>
             <a:endParaRPr lang="en-US" sz="1400" dirty="0"/>
           </a:p>
@@ -7484,7 +8370,7 @@
                   <a:schemeClr val="accent6"/>
                 </a:solidFill>
               </a:rPr>
-              <a:t>141 + 101 + 18 pruebas en verde</a:t>
+              <a:t>218 + 104 + 20 pruebas en verde</a:t>
             </a:r>
             <a:endParaRPr lang="en-US" sz="1400" dirty="0"/>
           </a:p>
@@ -9622,7 +10508,7 @@
                   <a:schemeClr val="tx1"/>
                 </a:solidFill>
               </a:rPr>
-              <a:t>50 de 50 endpoints de negocio exigen token JWT; BCrypt en contraseñas</a:t>
+              <a:t>52 de 52 endpoints de negocio exigen token JWT; BCrypt en contraseñas</a:t>
             </a:r>
             <a:endParaRPr lang="en-US" sz="1300" dirty="0"/>
           </a:p>
@@ -9912,7 +10798,7 @@
                   <a:schemeClr val="tx1"/>
                 </a:solidFill>
               </a:rPr>
-              <a:t>9 de 9 repositorios con pruebas de insertar, actualizar, eliminar y listar</a:t>
+              <a:t>10 de 10 repositorios con pruebas de insertar, actualizar, eliminar y listar</a:t>
             </a:r>
             <a:endParaRPr lang="en-US" sz="1300" dirty="0"/>
           </a:p>
@@ -10625,7 +11511,7 @@
                 <a:ea typeface="Cambria" pitchFamily="34" charset="-122"/>
                 <a:cs typeface="Cambria" pitchFamily="34" charset="-120"/>
               </a:rPr>
-              <a:t>Arquitectura: cliente, API REST y base de datos</a:t>
+              <a:t>Arquitectura de microservicios</a:t>
             </a:r>
             <a:endParaRPr lang="en-US" sz="2800" dirty="0"/>
           </a:p>
@@ -10633,7 +11519,7 @@
       </p:sp>
       <p:pic>
         <p:nvPicPr>
-          <p:cNvPr id="4" name="diagrama arquitectura" descr="Arquitectura de SIGAC: Angular, Spring Boot y MySQL">    </p:cNvPr>
+          <p:cNvPr id="4" name="diagrama arquitectura" descr="Arquitectura de microservicios de SIGAC">    </p:cNvPr>
           <p:cNvPicPr>
             <a:picLocks noChangeAspect="1"/>
           </p:cNvPicPr>
@@ -10648,7 +11534,7 @@
         <p:spPr>
           <a:xfrm>
             <a:off x="457200" y="1097280"/>
-            <a:ext cx="8229600" cy="4169664"/>
+            <a:ext cx="8229600" cy="3679115"/>
           </a:xfrm>
           <a:prstGeom prst="rect">
             <a:avLst/>
@@ -10760,7 +11646,7 @@
                 <a:ea typeface="Cambria" pitchFamily="34" charset="-122"/>
                 <a:cs typeface="Cambria" pitchFamily="34" charset="-120"/>
               </a:rPr>
-              <a:t>Login y seguridad: BCrypt, JWT y roles</a:t>
+              <a:t>Comunicación entre microservicios</a:t>
             </a:r>
             <a:endParaRPr lang="en-US" sz="2800" dirty="0"/>
           </a:p>
@@ -10768,18 +11654,18 @@
       </p:sp>
       <p:sp>
         <p:nvSpPr>
-          <p:cNvPr id="4" name="paso seguridad 1"/>
+          <p:cNvPr id="4" name="openfeign"/>
           <p:cNvSpPr/>
           <p:nvPr/>
         </p:nvSpPr>
         <p:spPr>
           <a:xfrm>
-            <a:off x="457200" y="1234440"/>
-            <a:ext cx="1965960" cy="2377440"/>
+            <a:off x="457200" y="1188720"/>
+            <a:ext cx="2651760" cy="3337560"/>
           </a:xfrm>
           <a:prstGeom prst="roundRect">
             <a:avLst>
-              <a:gd name="adj" fmla="val 3721"/>
+              <a:gd name="adj" fmla="val 2759"/>
             </a:avLst>
           </a:prstGeom>
           <a:solidFill>
@@ -10802,151 +11688,130 @@
       </p:sp>
       <p:sp>
         <p:nvSpPr>
-          <p:cNvPr id="5" name="insignia 1"/>
+          <p:cNvPr id="5" name="Text 2"/>
+          <p:cNvSpPr txBox="1"/>
+          <p:nvPr/>
+        </p:nvSpPr>
+        <p:spPr>
+          <a:xfrm>
+            <a:off x="640080" y="1280160"/>
+            <a:ext cx="2377440" cy="365760"/>
+          </a:xfrm>
+          <a:prstGeom prst="rect">
+            <a:avLst/>
+          </a:prstGeom>
+          <a:noFill/>
+          <a:ln/>
+        </p:spPr>
+        <p:txBody>
+          <a:bodyPr wrap="square" lIns="0" tIns="0" rIns="0" bIns="0" rtlCol="0" anchor="t"/>
+          <a:lstStyle/>
+          <a:p>
+            <a:pPr indent="0" marL="0">
+              <a:buNone/>
+            </a:pPr>
+            <a:r>
+              <a:rPr lang="en-US" sz="1600" b="1" dirty="0">
+                <a:solidFill>
+                  <a:schemeClr val="accent1"/>
+                </a:solidFill>
+              </a:rPr>
+              <a:t>OpenFeign (síncrona)</a:t>
+            </a:r>
+            <a:endParaRPr lang="en-US" sz="1600" dirty="0"/>
+          </a:p>
+        </p:txBody>
+      </p:sp>
+      <p:sp>
+        <p:nvSpPr>
+          <p:cNvPr id="6" name="Text 3"/>
+          <p:cNvSpPr txBox="1"/>
+          <p:nvPr/>
+        </p:nvSpPr>
+        <p:spPr>
+          <a:xfrm>
+            <a:off x="640080" y="1691640"/>
+            <a:ext cx="2331720" cy="2743200"/>
+          </a:xfrm>
+          <a:prstGeom prst="rect">
+            <a:avLst/>
+          </a:prstGeom>
+          <a:noFill/>
+          <a:ln/>
+        </p:spPr>
+        <p:txBody>
+          <a:bodyPr wrap="square" lIns="0" tIns="0" rIns="0" bIns="0" rtlCol="0" anchor="t"/>
+          <a:lstStyle/>
+          <a:p>
+            <a:pPr marL="342900" indent="-342900">
+              <a:spcAft>
+                <a:spcPts val="600"/>
+              </a:spcAft>
+              <a:buSzPct val="100000"/>
+              <a:buChar char="•"/>
+            </a:pPr>
+            <a:r>
+              <a:rPr lang="en-US" sz="1400" dirty="0">
+                <a:solidFill>
+                  <a:schemeClr val="tx1"/>
+                </a:solidFill>
+              </a:rPr>
+              <a:t>Cobranza lee socio, puesto y banco de Catálogos</a:t>
+            </a:r>
+            <a:endParaRPr lang="en-US" sz="1400" dirty="0"/>
+          </a:p>
+          <a:p>
+            <a:pPr marL="342900" indent="-342900">
+              <a:spcAft>
+                <a:spcPts val="600"/>
+              </a:spcAft>
+              <a:buSzPct val="100000"/>
+              <a:buChar char="•"/>
+            </a:pPr>
+            <a:r>
+              <a:rPr lang="en-US" sz="1400" dirty="0">
+                <a:solidFill>
+                  <a:schemeClr val="tx1"/>
+                </a:solidFill>
+              </a:rPr>
+              <a:t>Catálogos no elimina lo que tiene cobranza (409)</a:t>
+            </a:r>
+            <a:endParaRPr lang="en-US" sz="1400" dirty="0"/>
+          </a:p>
+          <a:p>
+            <a:pPr marL="342900" indent="-342900">
+              <a:spcAft>
+                <a:spcPts val="600"/>
+              </a:spcAft>
+              <a:buSzPct val="100000"/>
+              <a:buChar char="•"/>
+            </a:pPr>
+            <a:r>
+              <a:rPr lang="en-US" sz="1400" dirty="0">
+                <a:solidFill>
+                  <a:schemeClr val="tx1"/>
+                </a:solidFill>
+              </a:rPr>
+              <a:t>Reportes consulta Cobranza y Egresos</a:t>
+            </a:r>
+            <a:endParaRPr lang="en-US" sz="1400" dirty="0"/>
+          </a:p>
+        </p:txBody>
+      </p:sp>
+      <p:sp>
+        <p:nvSpPr>
+          <p:cNvPr id="7" name="rabbitmq"/>
           <p:cNvSpPr/>
           <p:nvPr/>
         </p:nvSpPr>
         <p:spPr>
           <a:xfrm>
-            <a:off x="640080" y="1371600"/>
-            <a:ext cx="411480" cy="411480"/>
-          </a:xfrm>
-          <a:prstGeom prst="ellipse">
-            <a:avLst/>
-          </a:prstGeom>
-          <a:solidFill>
-            <a:schemeClr val="accent1"/>
-          </a:solidFill>
-          <a:ln w="12700">
-            <a:solidFill>
-              <a:schemeClr val="accent1"/>
-            </a:solidFill>
-            <a:prstDash val="solid"/>
-          </a:ln>
-        </p:spPr>
-      </p:sp>
-      <p:sp>
-        <p:nvSpPr>
-          <p:cNvPr id="6" name="Text 3"/>
-          <p:cNvSpPr txBox="1"/>
-          <p:nvPr/>
-        </p:nvSpPr>
-        <p:spPr>
-          <a:xfrm>
-            <a:off x="640080" y="1371600"/>
-            <a:ext cx="411480" cy="411480"/>
-          </a:xfrm>
-          <a:prstGeom prst="rect">
-            <a:avLst/>
-          </a:prstGeom>
-          <a:noFill/>
-          <a:ln/>
-        </p:spPr>
-        <p:txBody>
-          <a:bodyPr wrap="square" lIns="0" tIns="0" rIns="0" bIns="0" rtlCol="0" anchor="ctr"/>
-          <a:lstStyle/>
-          <a:p>
-            <a:pPr algn="ctr" indent="0" marL="0">
-              <a:buNone/>
-            </a:pPr>
-            <a:r>
-              <a:rPr lang="en-US" sz="1600" b="1" dirty="0">
-                <a:solidFill>
-                  <a:schemeClr val="bg1"/>
-                </a:solidFill>
-              </a:rPr>
-              <a:t>1</a:t>
-            </a:r>
-            <a:endParaRPr lang="en-US" sz="1600" dirty="0"/>
-          </a:p>
-        </p:txBody>
-      </p:sp>
-      <p:sp>
-        <p:nvSpPr>
-          <p:cNvPr id="7" name="Text 4"/>
-          <p:cNvSpPr txBox="1"/>
-          <p:nvPr/>
-        </p:nvSpPr>
-        <p:spPr>
-          <a:xfrm>
-            <a:off x="594360" y="1920240"/>
-            <a:ext cx="1737360" cy="548640"/>
-          </a:xfrm>
-          <a:prstGeom prst="rect">
-            <a:avLst/>
-          </a:prstGeom>
-          <a:noFill/>
-          <a:ln/>
-        </p:spPr>
-        <p:txBody>
-          <a:bodyPr wrap="square" lIns="0" tIns="0" rIns="0" bIns="0" rtlCol="0" anchor="t"/>
-          <a:lstStyle/>
-          <a:p>
-            <a:pPr indent="0" marL="0">
-              <a:buNone/>
-            </a:pPr>
-            <a:r>
-              <a:rPr lang="en-US" sz="1500" b="1" dirty="0">
-                <a:solidFill>
-                  <a:schemeClr val="tx2"/>
-                </a:solidFill>
-              </a:rPr>
-              <a:t>POST /api/auth/login</a:t>
-            </a:r>
-            <a:endParaRPr lang="en-US" sz="1500" dirty="0"/>
-          </a:p>
-        </p:txBody>
-      </p:sp>
-      <p:sp>
-        <p:nvSpPr>
-          <p:cNvPr id="8" name="Text 5"/>
-          <p:cNvSpPr txBox="1"/>
-          <p:nvPr/>
-        </p:nvSpPr>
-        <p:spPr>
-          <a:xfrm>
-            <a:off x="594360" y="2514600"/>
-            <a:ext cx="1737360" cy="1051560"/>
-          </a:xfrm>
-          <a:prstGeom prst="rect">
-            <a:avLst/>
-          </a:prstGeom>
-          <a:noFill/>
-          <a:ln/>
-        </p:spPr>
-        <p:txBody>
-          <a:bodyPr wrap="square" lIns="0" tIns="0" rIns="0" bIns="0" rtlCol="0" anchor="t"/>
-          <a:lstStyle/>
-          <a:p>
-            <a:pPr indent="0" marL="0">
-              <a:buNone/>
-            </a:pPr>
-            <a:r>
-              <a:rPr lang="en-US" sz="1300" dirty="0">
-                <a:solidFill>
-                  <a:schemeClr val="tx1"/>
-                </a:solidFill>
-              </a:rPr>
-              <a:t>Usuario y contraseña obligatorios; 400 y 401 con mensajes claros</a:t>
-            </a:r>
-            <a:endParaRPr lang="en-US" sz="1300" dirty="0"/>
-          </a:p>
-        </p:txBody>
-      </p:sp>
-      <p:sp>
-        <p:nvSpPr>
-          <p:cNvPr id="9" name="paso seguridad 2"/>
-          <p:cNvSpPr/>
-          <p:nvPr/>
-        </p:nvSpPr>
-        <p:spPr>
-          <a:xfrm>
-            <a:off x="2560320" y="1234440"/>
-            <a:ext cx="1965960" cy="2377440"/>
+            <a:off x="3246120" y="1188720"/>
+            <a:ext cx="2651760" cy="3337560"/>
           </a:xfrm>
           <a:prstGeom prst="roundRect">
             <a:avLst>
-              <a:gd name="adj" fmla="val 3721"/>
+              <a:gd name="adj" fmla="val 2759"/>
             </a:avLst>
           </a:prstGeom>
           <a:solidFill>
@@ -10969,60 +11834,35 @@
       </p:sp>
       <p:sp>
         <p:nvSpPr>
-          <p:cNvPr id="10" name="insignia 2"/>
-          <p:cNvSpPr/>
-          <p:nvPr/>
-        </p:nvSpPr>
-        <p:spPr>
-          <a:xfrm>
-            <a:off x="2743200" y="1371600"/>
-            <a:ext cx="411480" cy="411480"/>
-          </a:xfrm>
-          <a:prstGeom prst="ellipse">
-            <a:avLst/>
-          </a:prstGeom>
-          <a:solidFill>
-            <a:schemeClr val="accent1"/>
-          </a:solidFill>
-          <a:ln w="12700">
-            <a:solidFill>
-              <a:schemeClr val="accent1"/>
-            </a:solidFill>
-            <a:prstDash val="solid"/>
-          </a:ln>
-        </p:spPr>
-      </p:sp>
-      <p:sp>
-        <p:nvSpPr>
-          <p:cNvPr id="11" name="Text 8"/>
-          <p:cNvSpPr txBox="1"/>
-          <p:nvPr/>
-        </p:nvSpPr>
-        <p:spPr>
-          <a:xfrm>
-            <a:off x="2743200" y="1371600"/>
-            <a:ext cx="411480" cy="411480"/>
-          </a:xfrm>
-          <a:prstGeom prst="rect">
-            <a:avLst/>
-          </a:prstGeom>
-          <a:noFill/>
-          <a:ln/>
-        </p:spPr>
-        <p:txBody>
-          <a:bodyPr wrap="square" lIns="0" tIns="0" rIns="0" bIns="0" rtlCol="0" anchor="ctr"/>
-          <a:lstStyle/>
-          <a:p>
-            <a:pPr algn="ctr" indent="0" marL="0">
+          <p:cNvPr id="8" name="Text 5"/>
+          <p:cNvSpPr txBox="1"/>
+          <p:nvPr/>
+        </p:nvSpPr>
+        <p:spPr>
+          <a:xfrm>
+            <a:off x="3429000" y="1280160"/>
+            <a:ext cx="2377440" cy="365760"/>
+          </a:xfrm>
+          <a:prstGeom prst="rect">
+            <a:avLst/>
+          </a:prstGeom>
+          <a:noFill/>
+          <a:ln/>
+        </p:spPr>
+        <p:txBody>
+          <a:bodyPr wrap="square" lIns="0" tIns="0" rIns="0" bIns="0" rtlCol="0" anchor="t"/>
+          <a:lstStyle/>
+          <a:p>
+            <a:pPr indent="0" marL="0">
               <a:buNone/>
             </a:pPr>
             <a:r>
               <a:rPr lang="en-US" sz="1600" b="1" dirty="0">
                 <a:solidFill>
-                  <a:schemeClr val="bg1"/>
-                </a:solidFill>
-              </a:rPr>
-              <a:t>2</a:t>
+                  <a:schemeClr val="accent1"/>
+                </a:solidFill>
+              </a:rPr>
+              <a:t>RabbitMQ (asíncrona)</a:t>
             </a:r>
             <a:endParaRPr lang="en-US" sz="1600" dirty="0"/>
           </a:p>
@@ -11030,14 +11870,14 @@
       </p:sp>
       <p:sp>
         <p:nvSpPr>
-          <p:cNvPr id="12" name="Text 9"/>
-          <p:cNvSpPr txBox="1"/>
-          <p:nvPr/>
-        </p:nvSpPr>
-        <p:spPr>
-          <a:xfrm>
-            <a:off x="2697480" y="1920240"/>
-            <a:ext cx="1737360" cy="548640"/>
+          <p:cNvPr id="9" name="Text 6"/>
+          <p:cNvSpPr txBox="1"/>
+          <p:nvPr/>
+        </p:nvSpPr>
+        <p:spPr>
+          <a:xfrm>
+            <a:off x="3429000" y="1691640"/>
+            <a:ext cx="2331720" cy="2743200"/>
           </a:xfrm>
           <a:prstGeom prst="rect">
             <a:avLst/>
@@ -11049,438 +11889,109 @@
           <a:bodyPr wrap="square" lIns="0" tIns="0" rIns="0" bIns="0" rtlCol="0" anchor="t"/>
           <a:lstStyle/>
           <a:p>
-            <a:pPr indent="0" marL="0">
-              <a:buNone/>
-            </a:pPr>
-            <a:r>
-              <a:rPr lang="en-US" sz="1500" b="1" dirty="0">
-                <a:solidFill>
-                  <a:schemeClr val="tx2"/>
-                </a:solidFill>
-              </a:rPr>
-              <a:t>BCrypt en MySQL</a:t>
-            </a:r>
-            <a:endParaRPr lang="en-US" sz="1500" dirty="0"/>
-          </a:p>
-        </p:txBody>
-      </p:sp>
-      <p:sp>
-        <p:nvSpPr>
-          <p:cNvPr id="13" name="Text 10"/>
-          <p:cNvSpPr txBox="1"/>
-          <p:nvPr/>
-        </p:nvSpPr>
-        <p:spPr>
-          <a:xfrm>
-            <a:off x="2697480" y="2514600"/>
-            <a:ext cx="1737360" cy="1051560"/>
-          </a:xfrm>
-          <a:prstGeom prst="rect">
-            <a:avLst/>
-          </a:prstGeom>
-          <a:noFill/>
-          <a:ln/>
-        </p:spPr>
-        <p:txBody>
-          <a:bodyPr wrap="square" lIns="0" tIns="0" rIns="0" bIns="0" rtlCol="0" anchor="t"/>
-          <a:lstStyle/>
-          <a:p>
-            <a:pPr indent="0" marL="0">
-              <a:buNone/>
-            </a:pPr>
-            <a:r>
-              <a:rPr lang="en-US" sz="1300" dirty="0">
+            <a:pPr marL="342900" indent="-342900">
+              <a:spcAft>
+                <a:spcPts val="600"/>
+              </a:spcAft>
+              <a:buSzPct val="100000"/>
+              <a:buChar char="•"/>
+            </a:pPr>
+            <a:r>
+              <a:rPr lang="en-US" sz="1400" dirty="0">
                 <a:solidFill>
                   <a:schemeClr val="tx1"/>
                 </a:solidFill>
               </a:rPr>
-              <a:t>La tabla usuarios guarda solo el hash BCrypt, nunca texto plano</a:t>
-            </a:r>
-            <a:endParaRPr lang="en-US" sz="1300" dirty="0"/>
-          </a:p>
-        </p:txBody>
-      </p:sp>
-      <p:sp>
-        <p:nvSpPr>
-          <p:cNvPr id="14" name="paso seguridad 3"/>
-          <p:cNvSpPr/>
-          <p:nvPr/>
-        </p:nvSpPr>
-        <p:spPr>
-          <a:xfrm>
-            <a:off x="4663440" y="1234440"/>
-            <a:ext cx="1965960" cy="2377440"/>
-          </a:xfrm>
-          <a:prstGeom prst="roundRect">
-            <a:avLst>
-              <a:gd name="adj" fmla="val 3721"/>
-            </a:avLst>
-          </a:prstGeom>
-          <a:solidFill>
-            <a:schemeClr val="bg2"/>
-          </a:solidFill>
-          <a:ln w="12700">
-            <a:solidFill>
-              <a:schemeClr val="bg2"/>
-            </a:solidFill>
-            <a:prstDash val="solid"/>
-          </a:ln>
-          <a:effectLst>
-            <a:outerShdw sx="100000" sy="100000" kx="0" ky="0" algn="bl" rotWithShape="0" blurRad="76200" dist="25400" dir="5400000">
-              <a:srgbClr val="000000">
-                <a:alpha val="12000"/>
-              </a:srgbClr>
-            </a:outerShdw>
-          </a:effectLst>
-        </p:spPr>
-      </p:sp>
-      <p:sp>
-        <p:nvSpPr>
-          <p:cNvPr id="15" name="insignia 3"/>
-          <p:cNvSpPr/>
-          <p:nvPr/>
-        </p:nvSpPr>
-        <p:spPr>
-          <a:xfrm>
-            <a:off x="4846320" y="1371600"/>
-            <a:ext cx="411480" cy="411480"/>
-          </a:xfrm>
-          <a:prstGeom prst="ellipse">
-            <a:avLst/>
-          </a:prstGeom>
-          <a:solidFill>
-            <a:schemeClr val="accent1"/>
-          </a:solidFill>
-          <a:ln w="12700">
-            <a:solidFill>
-              <a:schemeClr val="accent1"/>
-            </a:solidFill>
-            <a:prstDash val="solid"/>
-          </a:ln>
-        </p:spPr>
-      </p:sp>
-      <p:sp>
-        <p:nvSpPr>
-          <p:cNvPr id="16" name="Text 13"/>
-          <p:cNvSpPr txBox="1"/>
-          <p:nvPr/>
-        </p:nvSpPr>
-        <p:spPr>
-          <a:xfrm>
-            <a:off x="4846320" y="1371600"/>
-            <a:ext cx="411480" cy="411480"/>
-          </a:xfrm>
-          <a:prstGeom prst="rect">
-            <a:avLst/>
-          </a:prstGeom>
-          <a:noFill/>
-          <a:ln/>
-        </p:spPr>
-        <p:txBody>
-          <a:bodyPr wrap="square" lIns="0" tIns="0" rIns="0" bIns="0" rtlCol="0" anchor="ctr"/>
-          <a:lstStyle/>
-          <a:p>
-            <a:pPr algn="ctr" indent="0" marL="0">
-              <a:buNone/>
-            </a:pPr>
-            <a:r>
-              <a:rPr lang="en-US" sz="1600" b="1" dirty="0">
-                <a:solidFill>
-                  <a:schemeClr val="bg1"/>
-                </a:solidFill>
-              </a:rPr>
-              <a:t>3</a:t>
-            </a:r>
-            <a:endParaRPr lang="en-US" sz="1600" dirty="0"/>
-          </a:p>
-        </p:txBody>
-      </p:sp>
-      <p:sp>
-        <p:nvSpPr>
-          <p:cNvPr id="17" name="Text 14"/>
-          <p:cNvSpPr txBox="1"/>
-          <p:nvPr/>
-        </p:nvSpPr>
-        <p:spPr>
-          <a:xfrm>
-            <a:off x="4800600" y="1920240"/>
-            <a:ext cx="1737360" cy="548640"/>
-          </a:xfrm>
-          <a:prstGeom prst="rect">
-            <a:avLst/>
-          </a:prstGeom>
-          <a:noFill/>
-          <a:ln/>
-        </p:spPr>
-        <p:txBody>
-          <a:bodyPr wrap="square" lIns="0" tIns="0" rIns="0" bIns="0" rtlCol="0" anchor="t"/>
-          <a:lstStyle/>
-          <a:p>
-            <a:pPr indent="0" marL="0">
-              <a:buNone/>
-            </a:pPr>
-            <a:r>
-              <a:rPr lang="en-US" sz="1500" b="1" dirty="0">
-                <a:solidFill>
-                  <a:schemeClr val="tx2"/>
-                </a:solidFill>
-              </a:rPr>
-              <a:t>Token JWT</a:t>
-            </a:r>
-            <a:endParaRPr lang="en-US" sz="1500" dirty="0"/>
-          </a:p>
-        </p:txBody>
-      </p:sp>
-      <p:sp>
-        <p:nvSpPr>
-          <p:cNvPr id="18" name="Text 15"/>
-          <p:cNvSpPr txBox="1"/>
-          <p:nvPr/>
-        </p:nvSpPr>
-        <p:spPr>
-          <a:xfrm>
-            <a:off x="4800600" y="2514600"/>
-            <a:ext cx="1737360" cy="1051560"/>
-          </a:xfrm>
-          <a:prstGeom prst="rect">
-            <a:avLst/>
-          </a:prstGeom>
-          <a:noFill/>
-          <a:ln/>
-        </p:spPr>
-        <p:txBody>
-          <a:bodyPr wrap="square" lIns="0" tIns="0" rIns="0" bIns="0" rtlCol="0" anchor="t"/>
-          <a:lstStyle/>
-          <a:p>
-            <a:pPr indent="0" marL="0">
-              <a:buNone/>
-            </a:pPr>
-            <a:r>
-              <a:rPr lang="en-US" sz="1300" dirty="0">
+              <a:t>Cobranza y Egresos publican cada movimiento</a:t>
+            </a:r>
+            <a:endParaRPr lang="en-US" sz="1400" dirty="0"/>
+          </a:p>
+          <a:p>
+            <a:pPr marL="342900" indent="-342900">
+              <a:spcAft>
+                <a:spcPts val="600"/>
+              </a:spcAft>
+              <a:buSzPct val="100000"/>
+              <a:buChar char="•"/>
+            </a:pPr>
+            <a:r>
+              <a:rPr lang="en-US" sz="1400" dirty="0">
                 <a:solidFill>
                   <a:schemeClr val="tx1"/>
                 </a:solidFill>
               </a:rPr>
-              <a:t>Cada petición lleva Authorization: Bearer; sin token, 401</a:t>
-            </a:r>
-            <a:endParaRPr lang="en-US" sz="1300" dirty="0"/>
-          </a:p>
-        </p:txBody>
-      </p:sp>
-      <p:sp>
-        <p:nvSpPr>
-          <p:cNvPr id="19" name="paso seguridad 4"/>
-          <p:cNvSpPr/>
-          <p:nvPr/>
-        </p:nvSpPr>
-        <p:spPr>
-          <a:xfrm>
-            <a:off x="6766560" y="1234440"/>
-            <a:ext cx="1965960" cy="2377440"/>
-          </a:xfrm>
-          <a:prstGeom prst="roundRect">
-            <a:avLst>
-              <a:gd name="adj" fmla="val 3721"/>
-            </a:avLst>
-          </a:prstGeom>
-          <a:solidFill>
-            <a:schemeClr val="bg2"/>
-          </a:solidFill>
-          <a:ln w="12700">
-            <a:solidFill>
-              <a:schemeClr val="bg2"/>
-            </a:solidFill>
-            <a:prstDash val="solid"/>
-          </a:ln>
-          <a:effectLst>
-            <a:outerShdw sx="100000" sy="100000" kx="0" ky="0" algn="bl" rotWithShape="0" blurRad="76200" dist="25400" dir="5400000">
-              <a:srgbClr val="000000">
-                <a:alpha val="12000"/>
-              </a:srgbClr>
-            </a:outerShdw>
-          </a:effectLst>
-        </p:spPr>
-      </p:sp>
-      <p:sp>
-        <p:nvSpPr>
-          <p:cNvPr id="20" name="insignia 4"/>
-          <p:cNvSpPr/>
-          <p:nvPr/>
-        </p:nvSpPr>
-        <p:spPr>
-          <a:xfrm>
-            <a:off x="6949440" y="1371600"/>
-            <a:ext cx="411480" cy="411480"/>
-          </a:xfrm>
-          <a:prstGeom prst="ellipse">
-            <a:avLst/>
-          </a:prstGeom>
-          <a:solidFill>
-            <a:schemeClr val="accent1"/>
-          </a:solidFill>
-          <a:ln w="12700">
-            <a:solidFill>
-              <a:schemeClr val="accent1"/>
-            </a:solidFill>
-            <a:prstDash val="solid"/>
-          </a:ln>
-        </p:spPr>
-      </p:sp>
-      <p:sp>
-        <p:nvSpPr>
-          <p:cNvPr id="21" name="Text 18"/>
-          <p:cNvSpPr txBox="1"/>
-          <p:nvPr/>
-        </p:nvSpPr>
-        <p:spPr>
-          <a:xfrm>
-            <a:off x="6949440" y="1371600"/>
-            <a:ext cx="411480" cy="411480"/>
-          </a:xfrm>
-          <a:prstGeom prst="rect">
-            <a:avLst/>
-          </a:prstGeom>
-          <a:noFill/>
-          <a:ln/>
-        </p:spPr>
-        <p:txBody>
-          <a:bodyPr wrap="square" lIns="0" tIns="0" rIns="0" bIns="0" rtlCol="0" anchor="ctr"/>
-          <a:lstStyle/>
-          <a:p>
-            <a:pPr algn="ctr" indent="0" marL="0">
-              <a:buNone/>
-            </a:pPr>
-            <a:r>
-              <a:rPr lang="en-US" sz="1600" b="1" dirty="0">
-                <a:solidFill>
-                  <a:schemeClr val="bg1"/>
-                </a:solidFill>
-              </a:rPr>
-              <a:t>4</a:t>
-            </a:r>
-            <a:endParaRPr lang="en-US" sz="1600" dirty="0"/>
-          </a:p>
-        </p:txBody>
-      </p:sp>
-      <p:sp>
-        <p:nvSpPr>
-          <p:cNvPr id="22" name="Text 19"/>
-          <p:cNvSpPr txBox="1"/>
-          <p:nvPr/>
-        </p:nvSpPr>
-        <p:spPr>
-          <a:xfrm>
-            <a:off x="6903720" y="1920240"/>
-            <a:ext cx="1737360" cy="548640"/>
-          </a:xfrm>
-          <a:prstGeom prst="rect">
-            <a:avLst/>
-          </a:prstGeom>
-          <a:noFill/>
-          <a:ln/>
-        </p:spPr>
-        <p:txBody>
-          <a:bodyPr wrap="square" lIns="0" tIns="0" rIns="0" bIns="0" rtlCol="0" anchor="t"/>
-          <a:lstStyle/>
-          <a:p>
-            <a:pPr indent="0" marL="0">
-              <a:buNone/>
-            </a:pPr>
-            <a:r>
-              <a:rPr lang="en-US" sz="1500" b="1" dirty="0">
-                <a:solidFill>
-                  <a:schemeClr val="tx2"/>
-                </a:solidFill>
-              </a:rPr>
-              <a:t>Roles ADMIN / OPERADOR</a:t>
-            </a:r>
-            <a:endParaRPr lang="en-US" sz="1500" dirty="0"/>
-          </a:p>
-        </p:txBody>
-      </p:sp>
-      <p:sp>
-        <p:nvSpPr>
-          <p:cNvPr id="23" name="Text 20"/>
-          <p:cNvSpPr txBox="1"/>
-          <p:nvPr/>
-        </p:nvSpPr>
-        <p:spPr>
-          <a:xfrm>
-            <a:off x="6903720" y="2514600"/>
-            <a:ext cx="1737360" cy="1051560"/>
-          </a:xfrm>
-          <a:prstGeom prst="rect">
-            <a:avLst/>
-          </a:prstGeom>
-          <a:noFill/>
-          <a:ln/>
-        </p:spPr>
-        <p:txBody>
-          <a:bodyPr wrap="square" lIns="0" tIns="0" rIns="0" bIns="0" rtlCol="0" anchor="t"/>
-          <a:lstStyle/>
-          <a:p>
-            <a:pPr indent="0" marL="0">
-              <a:buNone/>
-            </a:pPr>
-            <a:r>
-              <a:rPr lang="en-US" sz="1300" dirty="0">
+              <a:t>Auditoría lo guarda con el usuario</a:t>
+            </a:r>
+            <a:endParaRPr lang="en-US" sz="1400" dirty="0"/>
+          </a:p>
+          <a:p>
+            <a:pPr marL="342900" indent="-342900">
+              <a:spcAft>
+                <a:spcPts val="600"/>
+              </a:spcAft>
+              <a:buSzPct val="100000"/>
+              <a:buChar char="•"/>
+            </a:pPr>
+            <a:r>
+              <a:rPr lang="en-US" sz="1400" dirty="0">
                 <a:solidFill>
                   <a:schemeClr val="tx1"/>
                 </a:solidFill>
               </a:rPr>
-              <a:t>El servidor responde 403 al operador en catálogos y generación</a:t>
-            </a:r>
-            <a:endParaRPr lang="en-US" sz="1300" dirty="0"/>
-          </a:p>
-        </p:txBody>
-      </p:sp>
-      <p:sp>
-        <p:nvSpPr>
-          <p:cNvPr id="24" name="Text 21"/>
-          <p:cNvSpPr txBox="1"/>
-          <p:nvPr/>
-        </p:nvSpPr>
-        <p:spPr>
-          <a:xfrm>
-            <a:off x="457200" y="3840480"/>
-            <a:ext cx="8229600" cy="731520"/>
-          </a:xfrm>
-          <a:prstGeom prst="rect">
-            <a:avLst/>
-          </a:prstGeom>
-          <a:noFill/>
-          <a:ln/>
-        </p:spPr>
-        <p:txBody>
-          <a:bodyPr wrap="square" lIns="0" tIns="0" rIns="0" bIns="0" rtlCol="0" anchor="t"/>
-          <a:lstStyle/>
-          <a:p>
-            <a:pPr indent="0" marL="0">
-              <a:buNone/>
-            </a:pPr>
-            <a:r>
-              <a:rPr lang="en-US" sz="1500" b="1" dirty="0">
-                <a:solidFill>
-                  <a:schemeClr val="accent4"/>
-                </a:solidFill>
-              </a:rPr>
-              <a:t>Verificado: </a:t>
-            </a:r>
-            <a:pPr indent="0" marL="0">
-              <a:buNone/>
-            </a:pPr>
-            <a:r>
-              <a:rPr lang="en-US" sz="1500" dirty="0">
-                <a:solidFill>
-                  <a:schemeClr val="tx1"/>
-                </a:solidFill>
-              </a:rPr>
-              <a:t>una prueba descubre los 51 endpoints desde los controladores y comprueba que 50 exigen token, que un token inválido se rechaza y que el operador recibe 403 donde corresponde.</a:t>
-            </a:r>
-            <a:endParaRPr lang="en-US" sz="1500" dirty="0"/>
-          </a:p>
-        </p:txBody>
-      </p:sp>
+              <a:t>Si RabbitMQ cae, el cobro no se detiene</a:t>
+            </a:r>
+            <a:endParaRPr lang="en-US" sz="1400" dirty="0"/>
+          </a:p>
+        </p:txBody>
+      </p:sp>
+      <p:pic>
+        <p:nvPicPr>
+          <p:cNvPr id="10" name="captura auditoria" descr="Bitácora de auditoría">    </p:cNvPr>
+          <p:cNvPicPr>
+            <a:picLocks noChangeAspect="1"/>
+          </p:cNvPicPr>
+          <p:nvPr/>
+        </p:nvPicPr>
+        <p:blipFill>
+          <a:blip r:embed="rId1"/>
+          <a:stretch>
+            <a:fillRect/>
+          </a:stretch>
+        </p:blipFill>
+        <p:spPr>
+          <a:xfrm>
+            <a:off x="6035040" y="1188720"/>
+            <a:ext cx="2651760" cy="1490887"/>
+          </a:xfrm>
+          <a:prstGeom prst="rect">
+            <a:avLst/>
+          </a:prstGeom>
+        </p:spPr>
+      </p:pic>
+      <p:pic>
+        <p:nvPicPr>
+          <p:cNvPr id="11" name="captura eureka" descr="Panel de Eureka">    </p:cNvPr>
+          <p:cNvPicPr>
+            <a:picLocks noChangeAspect="1"/>
+          </p:cNvPicPr>
+          <p:nvPr/>
+        </p:nvPicPr>
+        <p:blipFill>
+          <a:blip r:embed="rId2"/>
+          <a:stretch>
+            <a:fillRect/>
+          </a:stretch>
+        </p:blipFill>
+        <p:spPr>
+          <a:xfrm>
+            <a:off x="6035040" y="2788920"/>
+            <a:ext cx="2651760" cy="1490887"/>
+          </a:xfrm>
+          <a:prstGeom prst="rect">
+            <a:avLst/>
+          </a:prstGeom>
+        </p:spPr>
+      </p:pic>
       <p:sp>
         <p:nvSpPr>
           <p:cNvPr id="25" name="Slide Number Placeholder 0"/>
